--- a/AI_Timesheet_Presentation.pptx
+++ b/AI_Timesheet_Presentation.pptx
@@ -5,22 +5,23 @@
     <p:sldMasterId id="2147483648" r:id="rId1"/>
   </p:sldMasterIdLst>
   <p:sldIdLst>
-    <p:sldId id="256" r:id="rId7"/>
-    <p:sldId id="257" r:id="rId8"/>
-    <p:sldId id="258" r:id="rId9"/>
-    <p:sldId id="259" r:id="rId10"/>
-    <p:sldId id="260" r:id="rId11"/>
-    <p:sldId id="261" r:id="rId12"/>
-    <p:sldId id="262" r:id="rId13"/>
-    <p:sldId id="263" r:id="rId14"/>
-    <p:sldId id="264" r:id="rId15"/>
-    <p:sldId id="265" r:id="rId16"/>
-    <p:sldId id="266" r:id="rId17"/>
-    <p:sldId id="267" r:id="rId18"/>
-    <p:sldId id="268" r:id="rId19"/>
-    <p:sldId id="269" r:id="rId20"/>
+    <p:sldId id="256" r:id="rId2"/>
+    <p:sldId id="257" r:id="rId3"/>
+    <p:sldId id="258" r:id="rId4"/>
+    <p:sldId id="259" r:id="rId5"/>
+    <p:sldId id="260" r:id="rId6"/>
+    <p:sldId id="261" r:id="rId7"/>
+    <p:sldId id="262" r:id="rId8"/>
+    <p:sldId id="263" r:id="rId9"/>
+    <p:sldId id="264" r:id="rId10"/>
+    <p:sldId id="265" r:id="rId11"/>
+    <p:sldId id="266" r:id="rId12"/>
+    <p:sldId id="267" r:id="rId13"/>
+    <p:sldId id="268" r:id="rId14"/>
+    <p:sldId id="269" r:id="rId15"/>
+    <p:sldId id="270" r:id="rId16"/>
   </p:sldIdLst>
-  <p:sldSz cx="12191695" cy="6858000" type="screen4x3"/>
+  <p:sldSz cx="12192000" cy="6858000"/>
   <p:notesSz cx="6858000" cy="9144000"/>
   <p:defaultTextStyle>
     <a:defPPr>
@@ -117,6 +118,22 @@
       </a:defRPr>
     </a:lvl9pPr>
   </p:defaultTextStyle>
+  <p:extLst>
+    <p:ext uri="{EFAFB233-063F-42B5-8137-9DF3F51BA10A}">
+      <p15:sldGuideLst xmlns:p15="http://schemas.microsoft.com/office/powerpoint/2012/main">
+        <p15:guide id="1" orient="horz" pos="2160">
+          <p15:clr>
+            <a:srgbClr val="A4A3A4"/>
+          </p15:clr>
+        </p15:guide>
+        <p15:guide id="2" pos="2880">
+          <p15:clr>
+            <a:srgbClr val="A4A3A4"/>
+          </p15:clr>
+        </p15:guide>
+      </p15:sldGuideLst>
+    </p:ext>
+  </p:extLst>
 </p:presentation>
 </file>
 
@@ -158,10 +175,9 @@
           <a:lstStyle/>
           <a:p>
             <a:r>
-              <a:rPr lang="en-US" smtClean="0"/>
+              <a:rPr lang="en-US"/>
               <a:t>Click to edit Master title style</a:t>
             </a:r>
-            <a:endParaRPr lang="en-US"/>
           </a:p>
         </p:txBody>
       </p:sp>
@@ -277,10 +293,9 @@
           </a:lstStyle>
           <a:p>
             <a:r>
-              <a:rPr lang="en-US" smtClean="0"/>
+              <a:rPr lang="en-US"/>
               <a:t>Click to edit Master subtitle style</a:t>
             </a:r>
-            <a:endParaRPr lang="en-US"/>
           </a:p>
         </p:txBody>
       </p:sp>
@@ -301,7 +316,7 @@
           <a:p>
             <a:fld id="{5BCAD085-E8A6-8845-BD4E-CB4CCA059FC4}" type="datetimeFigureOut">
               <a:rPr lang="en-US" smtClean="0"/>
-              <a:t>1/27/13</a:t>
+              <a:t>7/10/2026</a:t>
             </a:fld>
             <a:endParaRPr lang="en-US"/>
           </a:p>
@@ -395,10 +410,9 @@
           <a:lstStyle/>
           <a:p>
             <a:r>
-              <a:rPr lang="en-US" smtClean="0"/>
+              <a:rPr lang="en-US"/>
               <a:t>Click to edit Master title style</a:t>
             </a:r>
-            <a:endParaRPr lang="en-US"/>
           </a:p>
         </p:txBody>
       </p:sp>
@@ -419,38 +433,37 @@
           <a:p>
             <a:pPr lvl="0"/>
             <a:r>
-              <a:rPr lang="en-US" smtClean="0"/>
+              <a:rPr lang="en-US"/>
               <a:t>Click to edit Master text styles</a:t>
             </a:r>
           </a:p>
           <a:p>
             <a:pPr lvl="1"/>
             <a:r>
-              <a:rPr lang="en-US" smtClean="0"/>
+              <a:rPr lang="en-US"/>
               <a:t>Second level</a:t>
             </a:r>
           </a:p>
           <a:p>
             <a:pPr lvl="2"/>
             <a:r>
-              <a:rPr lang="en-US" smtClean="0"/>
+              <a:rPr lang="en-US"/>
               <a:t>Third level</a:t>
             </a:r>
           </a:p>
           <a:p>
             <a:pPr lvl="3"/>
             <a:r>
-              <a:rPr lang="en-US" smtClean="0"/>
+              <a:rPr lang="en-US"/>
               <a:t>Fourth level</a:t>
             </a:r>
           </a:p>
           <a:p>
             <a:pPr lvl="4"/>
             <a:r>
-              <a:rPr lang="en-US" smtClean="0"/>
+              <a:rPr lang="en-US"/>
               <a:t>Fifth level</a:t>
             </a:r>
-            <a:endParaRPr lang="en-US"/>
           </a:p>
         </p:txBody>
       </p:sp>
@@ -471,7 +484,7 @@
           <a:p>
             <a:fld id="{5BCAD085-E8A6-8845-BD4E-CB4CCA059FC4}" type="datetimeFigureOut">
               <a:rPr lang="en-US" smtClean="0"/>
-              <a:t>1/27/13</a:t>
+              <a:t>7/10/2026</a:t>
             </a:fld>
             <a:endParaRPr lang="en-US"/>
           </a:p>
@@ -570,10 +583,9 @@
           <a:lstStyle/>
           <a:p>
             <a:r>
-              <a:rPr lang="en-US" smtClean="0"/>
+              <a:rPr lang="en-US"/>
               <a:t>Click to edit Master title style</a:t>
             </a:r>
-            <a:endParaRPr lang="en-US"/>
           </a:p>
         </p:txBody>
       </p:sp>
@@ -599,38 +611,37 @@
           <a:p>
             <a:pPr lvl="0"/>
             <a:r>
-              <a:rPr lang="en-US" smtClean="0"/>
+              <a:rPr lang="en-US"/>
               <a:t>Click to edit Master text styles</a:t>
             </a:r>
           </a:p>
           <a:p>
             <a:pPr lvl="1"/>
             <a:r>
-              <a:rPr lang="en-US" smtClean="0"/>
+              <a:rPr lang="en-US"/>
               <a:t>Second level</a:t>
             </a:r>
           </a:p>
           <a:p>
             <a:pPr lvl="2"/>
             <a:r>
-              <a:rPr lang="en-US" smtClean="0"/>
+              <a:rPr lang="en-US"/>
               <a:t>Third level</a:t>
             </a:r>
           </a:p>
           <a:p>
             <a:pPr lvl="3"/>
             <a:r>
-              <a:rPr lang="en-US" smtClean="0"/>
+              <a:rPr lang="en-US"/>
               <a:t>Fourth level</a:t>
             </a:r>
           </a:p>
           <a:p>
             <a:pPr lvl="4"/>
             <a:r>
-              <a:rPr lang="en-US" smtClean="0"/>
+              <a:rPr lang="en-US"/>
               <a:t>Fifth level</a:t>
             </a:r>
-            <a:endParaRPr lang="en-US"/>
           </a:p>
         </p:txBody>
       </p:sp>
@@ -651,7 +662,7 @@
           <a:p>
             <a:fld id="{5BCAD085-E8A6-8845-BD4E-CB4CCA059FC4}" type="datetimeFigureOut">
               <a:rPr lang="en-US" smtClean="0"/>
-              <a:t>1/27/13</a:t>
+              <a:t>7/10/2026</a:t>
             </a:fld>
             <a:endParaRPr lang="en-US"/>
           </a:p>
@@ -745,10 +756,9 @@
           <a:lstStyle/>
           <a:p>
             <a:r>
-              <a:rPr lang="en-US" smtClean="0"/>
+              <a:rPr lang="en-US"/>
               <a:t>Click to edit Master title style</a:t>
             </a:r>
-            <a:endParaRPr lang="en-US"/>
           </a:p>
         </p:txBody>
       </p:sp>
@@ -769,38 +779,37 @@
           <a:p>
             <a:pPr lvl="0"/>
             <a:r>
-              <a:rPr lang="en-US" smtClean="0"/>
+              <a:rPr lang="en-US"/>
               <a:t>Click to edit Master text styles</a:t>
             </a:r>
           </a:p>
           <a:p>
             <a:pPr lvl="1"/>
             <a:r>
-              <a:rPr lang="en-US" smtClean="0"/>
+              <a:rPr lang="en-US"/>
               <a:t>Second level</a:t>
             </a:r>
           </a:p>
           <a:p>
             <a:pPr lvl="2"/>
             <a:r>
-              <a:rPr lang="en-US" smtClean="0"/>
+              <a:rPr lang="en-US"/>
               <a:t>Third level</a:t>
             </a:r>
           </a:p>
           <a:p>
             <a:pPr lvl="3"/>
             <a:r>
-              <a:rPr lang="en-US" smtClean="0"/>
+              <a:rPr lang="en-US"/>
               <a:t>Fourth level</a:t>
             </a:r>
           </a:p>
           <a:p>
             <a:pPr lvl="4"/>
             <a:r>
-              <a:rPr lang="en-US" smtClean="0"/>
+              <a:rPr lang="en-US"/>
               <a:t>Fifth level</a:t>
             </a:r>
-            <a:endParaRPr lang="en-US"/>
           </a:p>
         </p:txBody>
       </p:sp>
@@ -821,7 +830,7 @@
           <a:p>
             <a:fld id="{5BCAD085-E8A6-8845-BD4E-CB4CCA059FC4}" type="datetimeFigureOut">
               <a:rPr lang="en-US" smtClean="0"/>
-              <a:t>1/27/13</a:t>
+              <a:t>7/10/2026</a:t>
             </a:fld>
             <a:endParaRPr lang="en-US"/>
           </a:p>
@@ -924,10 +933,9 @@
           </a:lstStyle>
           <a:p>
             <a:r>
-              <a:rPr lang="en-US" smtClean="0"/>
+              <a:rPr lang="en-US"/>
               <a:t>Click to edit Master title style</a:t>
             </a:r>
-            <a:endParaRPr lang="en-US"/>
           </a:p>
         </p:txBody>
       </p:sp>
@@ -1044,7 +1052,7 @@
           <a:p>
             <a:pPr lvl="0"/>
             <a:r>
-              <a:rPr lang="en-US" smtClean="0"/>
+              <a:rPr lang="en-US"/>
               <a:t>Click to edit Master text styles</a:t>
             </a:r>
           </a:p>
@@ -1067,7 +1075,7 @@
           <a:p>
             <a:fld id="{5BCAD085-E8A6-8845-BD4E-CB4CCA059FC4}" type="datetimeFigureOut">
               <a:rPr lang="en-US" smtClean="0"/>
-              <a:t>1/27/13</a:t>
+              <a:t>7/10/2026</a:t>
             </a:fld>
             <a:endParaRPr lang="en-US"/>
           </a:p>
@@ -1161,10 +1169,9 @@
           <a:lstStyle/>
           <a:p>
             <a:r>
-              <a:rPr lang="en-US" smtClean="0"/>
+              <a:rPr lang="en-US"/>
               <a:t>Click to edit Master title style</a:t>
             </a:r>
-            <a:endParaRPr lang="en-US"/>
           </a:p>
         </p:txBody>
       </p:sp>
@@ -1218,38 +1225,37 @@
           <a:p>
             <a:pPr lvl="0"/>
             <a:r>
-              <a:rPr lang="en-US" smtClean="0"/>
+              <a:rPr lang="en-US"/>
               <a:t>Click to edit Master text styles</a:t>
             </a:r>
           </a:p>
           <a:p>
             <a:pPr lvl="1"/>
             <a:r>
-              <a:rPr lang="en-US" smtClean="0"/>
+              <a:rPr lang="en-US"/>
               <a:t>Second level</a:t>
             </a:r>
           </a:p>
           <a:p>
             <a:pPr lvl="2"/>
             <a:r>
-              <a:rPr lang="en-US" smtClean="0"/>
+              <a:rPr lang="en-US"/>
               <a:t>Third level</a:t>
             </a:r>
           </a:p>
           <a:p>
             <a:pPr lvl="3"/>
             <a:r>
-              <a:rPr lang="en-US" smtClean="0"/>
+              <a:rPr lang="en-US"/>
               <a:t>Fourth level</a:t>
             </a:r>
           </a:p>
           <a:p>
             <a:pPr lvl="4"/>
             <a:r>
-              <a:rPr lang="en-US" smtClean="0"/>
+              <a:rPr lang="en-US"/>
               <a:t>Fifth level</a:t>
             </a:r>
-            <a:endParaRPr lang="en-US"/>
           </a:p>
         </p:txBody>
       </p:sp>
@@ -1303,38 +1309,37 @@
           <a:p>
             <a:pPr lvl="0"/>
             <a:r>
-              <a:rPr lang="en-US" smtClean="0"/>
+              <a:rPr lang="en-US"/>
               <a:t>Click to edit Master text styles</a:t>
             </a:r>
           </a:p>
           <a:p>
             <a:pPr lvl="1"/>
             <a:r>
-              <a:rPr lang="en-US" smtClean="0"/>
+              <a:rPr lang="en-US"/>
               <a:t>Second level</a:t>
             </a:r>
           </a:p>
           <a:p>
             <a:pPr lvl="2"/>
             <a:r>
-              <a:rPr lang="en-US" smtClean="0"/>
+              <a:rPr lang="en-US"/>
               <a:t>Third level</a:t>
             </a:r>
           </a:p>
           <a:p>
             <a:pPr lvl="3"/>
             <a:r>
-              <a:rPr lang="en-US" smtClean="0"/>
+              <a:rPr lang="en-US"/>
               <a:t>Fourth level</a:t>
             </a:r>
           </a:p>
           <a:p>
             <a:pPr lvl="4"/>
             <a:r>
-              <a:rPr lang="en-US" smtClean="0"/>
+              <a:rPr lang="en-US"/>
               <a:t>Fifth level</a:t>
             </a:r>
-            <a:endParaRPr lang="en-US"/>
           </a:p>
         </p:txBody>
       </p:sp>
@@ -1355,7 +1360,7 @@
           <a:p>
             <a:fld id="{5BCAD085-E8A6-8845-BD4E-CB4CCA059FC4}" type="datetimeFigureOut">
               <a:rPr lang="en-US" smtClean="0"/>
-              <a:t>1/27/13</a:t>
+              <a:t>7/10/2026</a:t>
             </a:fld>
             <a:endParaRPr lang="en-US"/>
           </a:p>
@@ -1453,10 +1458,9 @@
           </a:lstStyle>
           <a:p>
             <a:r>
-              <a:rPr lang="en-US" smtClean="0"/>
+              <a:rPr lang="en-US"/>
               <a:t>Click to edit Master title style</a:t>
             </a:r>
-            <a:endParaRPr lang="en-US"/>
           </a:p>
         </p:txBody>
       </p:sp>
@@ -1519,7 +1523,7 @@
           <a:p>
             <a:pPr lvl="0"/>
             <a:r>
-              <a:rPr lang="en-US" smtClean="0"/>
+              <a:rPr lang="en-US"/>
               <a:t>Click to edit Master text styles</a:t>
             </a:r>
           </a:p>
@@ -1575,38 +1579,37 @@
           <a:p>
             <a:pPr lvl="0"/>
             <a:r>
-              <a:rPr lang="en-US" smtClean="0"/>
+              <a:rPr lang="en-US"/>
               <a:t>Click to edit Master text styles</a:t>
             </a:r>
           </a:p>
           <a:p>
             <a:pPr lvl="1"/>
             <a:r>
-              <a:rPr lang="en-US" smtClean="0"/>
+              <a:rPr lang="en-US"/>
               <a:t>Second level</a:t>
             </a:r>
           </a:p>
           <a:p>
             <a:pPr lvl="2"/>
             <a:r>
-              <a:rPr lang="en-US" smtClean="0"/>
+              <a:rPr lang="en-US"/>
               <a:t>Third level</a:t>
             </a:r>
           </a:p>
           <a:p>
             <a:pPr lvl="3"/>
             <a:r>
-              <a:rPr lang="en-US" smtClean="0"/>
+              <a:rPr lang="en-US"/>
               <a:t>Fourth level</a:t>
             </a:r>
           </a:p>
           <a:p>
             <a:pPr lvl="4"/>
             <a:r>
-              <a:rPr lang="en-US" smtClean="0"/>
+              <a:rPr lang="en-US"/>
               <a:t>Fifth level</a:t>
             </a:r>
-            <a:endParaRPr lang="en-US"/>
           </a:p>
         </p:txBody>
       </p:sp>
@@ -1669,7 +1672,7 @@
           <a:p>
             <a:pPr lvl="0"/>
             <a:r>
-              <a:rPr lang="en-US" smtClean="0"/>
+              <a:rPr lang="en-US"/>
               <a:t>Click to edit Master text styles</a:t>
             </a:r>
           </a:p>
@@ -1725,38 +1728,37 @@
           <a:p>
             <a:pPr lvl="0"/>
             <a:r>
-              <a:rPr lang="en-US" smtClean="0"/>
+              <a:rPr lang="en-US"/>
               <a:t>Click to edit Master text styles</a:t>
             </a:r>
           </a:p>
           <a:p>
             <a:pPr lvl="1"/>
             <a:r>
-              <a:rPr lang="en-US" smtClean="0"/>
+              <a:rPr lang="en-US"/>
               <a:t>Second level</a:t>
             </a:r>
           </a:p>
           <a:p>
             <a:pPr lvl="2"/>
             <a:r>
-              <a:rPr lang="en-US" smtClean="0"/>
+              <a:rPr lang="en-US"/>
               <a:t>Third level</a:t>
             </a:r>
           </a:p>
           <a:p>
             <a:pPr lvl="3"/>
             <a:r>
-              <a:rPr lang="en-US" smtClean="0"/>
+              <a:rPr lang="en-US"/>
               <a:t>Fourth level</a:t>
             </a:r>
           </a:p>
           <a:p>
             <a:pPr lvl="4"/>
             <a:r>
-              <a:rPr lang="en-US" smtClean="0"/>
+              <a:rPr lang="en-US"/>
               <a:t>Fifth level</a:t>
             </a:r>
-            <a:endParaRPr lang="en-US"/>
           </a:p>
         </p:txBody>
       </p:sp>
@@ -1777,7 +1779,7 @@
           <a:p>
             <a:fld id="{5BCAD085-E8A6-8845-BD4E-CB4CCA059FC4}" type="datetimeFigureOut">
               <a:rPr lang="en-US" smtClean="0"/>
-              <a:t>1/27/13</a:t>
+              <a:t>7/10/2026</a:t>
             </a:fld>
             <a:endParaRPr lang="en-US"/>
           </a:p>
@@ -1871,10 +1873,9 @@
           <a:lstStyle/>
           <a:p>
             <a:r>
-              <a:rPr lang="en-US" smtClean="0"/>
+              <a:rPr lang="en-US"/>
               <a:t>Click to edit Master title style</a:t>
             </a:r>
-            <a:endParaRPr lang="en-US"/>
           </a:p>
         </p:txBody>
       </p:sp>
@@ -1895,7 +1896,7 @@
           <a:p>
             <a:fld id="{5BCAD085-E8A6-8845-BD4E-CB4CCA059FC4}" type="datetimeFigureOut">
               <a:rPr lang="en-US" smtClean="0"/>
-              <a:t>1/27/13</a:t>
+              <a:t>7/10/2026</a:t>
             </a:fld>
             <a:endParaRPr lang="en-US"/>
           </a:p>
@@ -1990,7 +1991,7 @@
           <a:p>
             <a:fld id="{5BCAD085-E8A6-8845-BD4E-CB4CCA059FC4}" type="datetimeFigureOut">
               <a:rPr lang="en-US" smtClean="0"/>
-              <a:t>1/27/13</a:t>
+              <a:t>7/10/2026</a:t>
             </a:fld>
             <a:endParaRPr lang="en-US"/>
           </a:p>
@@ -2093,10 +2094,9 @@
           </a:lstStyle>
           <a:p>
             <a:r>
-              <a:rPr lang="en-US" smtClean="0"/>
+              <a:rPr lang="en-US"/>
               <a:t>Click to edit Master title style</a:t>
             </a:r>
-            <a:endParaRPr lang="en-US"/>
           </a:p>
         </p:txBody>
       </p:sp>
@@ -2150,38 +2150,37 @@
           <a:p>
             <a:pPr lvl="0"/>
             <a:r>
-              <a:rPr lang="en-US" smtClean="0"/>
+              <a:rPr lang="en-US"/>
               <a:t>Click to edit Master text styles</a:t>
             </a:r>
           </a:p>
           <a:p>
             <a:pPr lvl="1"/>
             <a:r>
-              <a:rPr lang="en-US" smtClean="0"/>
+              <a:rPr lang="en-US"/>
               <a:t>Second level</a:t>
             </a:r>
           </a:p>
           <a:p>
             <a:pPr lvl="2"/>
             <a:r>
-              <a:rPr lang="en-US" smtClean="0"/>
+              <a:rPr lang="en-US"/>
               <a:t>Third level</a:t>
             </a:r>
           </a:p>
           <a:p>
             <a:pPr lvl="3"/>
             <a:r>
-              <a:rPr lang="en-US" smtClean="0"/>
+              <a:rPr lang="en-US"/>
               <a:t>Fourth level</a:t>
             </a:r>
           </a:p>
           <a:p>
             <a:pPr lvl="4"/>
             <a:r>
-              <a:rPr lang="en-US" smtClean="0"/>
+              <a:rPr lang="en-US"/>
               <a:t>Fifth level</a:t>
             </a:r>
-            <a:endParaRPr lang="en-US"/>
           </a:p>
         </p:txBody>
       </p:sp>
@@ -2244,7 +2243,7 @@
           <a:p>
             <a:pPr lvl="0"/>
             <a:r>
-              <a:rPr lang="en-US" smtClean="0"/>
+              <a:rPr lang="en-US"/>
               <a:t>Click to edit Master text styles</a:t>
             </a:r>
           </a:p>
@@ -2267,7 +2266,7 @@
           <a:p>
             <a:fld id="{5BCAD085-E8A6-8845-BD4E-CB4CCA059FC4}" type="datetimeFigureOut">
               <a:rPr lang="en-US" smtClean="0"/>
-              <a:t>1/27/13</a:t>
+              <a:t>7/10/2026</a:t>
             </a:fld>
             <a:endParaRPr lang="en-US"/>
           </a:p>
@@ -2370,10 +2369,9 @@
           </a:lstStyle>
           <a:p>
             <a:r>
-              <a:rPr lang="en-US" smtClean="0"/>
+              <a:rPr lang="en-US"/>
               <a:t>Click to edit Master title style</a:t>
             </a:r>
-            <a:endParaRPr lang="en-US"/>
           </a:p>
         </p:txBody>
       </p:sp>
@@ -2497,7 +2495,7 @@
           <a:p>
             <a:pPr lvl="0"/>
             <a:r>
-              <a:rPr lang="en-US" smtClean="0"/>
+              <a:rPr lang="en-US"/>
               <a:t>Click to edit Master text styles</a:t>
             </a:r>
           </a:p>
@@ -2520,7 +2518,7 @@
           <a:p>
             <a:fld id="{5BCAD085-E8A6-8845-BD4E-CB4CCA059FC4}" type="datetimeFigureOut">
               <a:rPr lang="en-US" smtClean="0"/>
-              <a:t>1/27/13</a:t>
+              <a:t>7/10/2026</a:t>
             </a:fld>
             <a:endParaRPr lang="en-US"/>
           </a:p>
@@ -2629,10 +2627,9 @@
           <a:lstStyle/>
           <a:p>
             <a:r>
-              <a:rPr lang="en-US" smtClean="0"/>
+              <a:rPr lang="en-US"/>
               <a:t>Click to edit Master title style</a:t>
             </a:r>
-            <a:endParaRPr lang="en-US"/>
           </a:p>
         </p:txBody>
       </p:sp>
@@ -2663,38 +2660,37 @@
           <a:p>
             <a:pPr lvl="0"/>
             <a:r>
-              <a:rPr lang="en-US" smtClean="0"/>
+              <a:rPr lang="en-US"/>
               <a:t>Click to edit Master text styles</a:t>
             </a:r>
           </a:p>
           <a:p>
             <a:pPr lvl="1"/>
             <a:r>
-              <a:rPr lang="en-US" smtClean="0"/>
+              <a:rPr lang="en-US"/>
               <a:t>Second level</a:t>
             </a:r>
           </a:p>
           <a:p>
             <a:pPr lvl="2"/>
             <a:r>
-              <a:rPr lang="en-US" smtClean="0"/>
+              <a:rPr lang="en-US"/>
               <a:t>Third level</a:t>
             </a:r>
           </a:p>
           <a:p>
             <a:pPr lvl="3"/>
             <a:r>
-              <a:rPr lang="en-US" smtClean="0"/>
+              <a:rPr lang="en-US"/>
               <a:t>Fourth level</a:t>
             </a:r>
           </a:p>
           <a:p>
             <a:pPr lvl="4"/>
             <a:r>
-              <a:rPr lang="en-US" smtClean="0"/>
+              <a:rPr lang="en-US"/>
               <a:t>Fifth level</a:t>
             </a:r>
-            <a:endParaRPr lang="en-US"/>
           </a:p>
         </p:txBody>
       </p:sp>
@@ -2733,7 +2729,7 @@
           <a:p>
             <a:fld id="{5BCAD085-E8A6-8845-BD4E-CB4CCA059FC4}" type="datetimeFigureOut">
               <a:rPr lang="en-US" smtClean="0"/>
-              <a:t>1/27/13</a:t>
+              <a:t>7/10/2026</a:t>
             </a:fld>
             <a:endParaRPr lang="en-US"/>
           </a:p>
@@ -3092,7 +3088,7 @@
 </file>
 
 <file path=ppt/slides/slide1.xml><?xml version="1.0" encoding="utf-8"?>
-<p:sld xmlns:a="http://schemas.openxmlformats.org/drawingml/2006/main" xmlns:p="http://schemas.openxmlformats.org/presentationml/2006/main" xmlns:r="http://schemas.openxmlformats.org/officeDocument/2006/relationships">
+<p:sld xmlns:a="http://schemas.openxmlformats.org/drawingml/2006/main" xmlns:r="http://schemas.openxmlformats.org/officeDocument/2006/relationships" xmlns:p="http://schemas.openxmlformats.org/presentationml/2006/main">
   <p:cSld>
     <p:spTree>
       <p:nvGrpSpPr>
@@ -3100,7 +3096,14 @@
         <p:cNvGrpSpPr/>
         <p:nvPr/>
       </p:nvGrpSpPr>
-      <p:grpSpPr/>
+      <p:grpSpPr>
+        <a:xfrm>
+          <a:off x="0" y="0"/>
+          <a:ext cx="0" cy="0"/>
+          <a:chOff x="0" y="0"/>
+          <a:chExt cx="0" cy="0"/>
+        </a:xfrm>
+      </p:grpSpPr>
       <p:sp>
         <p:nvSpPr>
           <p:cNvPr id="2" name="Rectangle 1"/>
@@ -3142,6 +3145,7 @@
           <a:lstStyle/>
           <a:p>
             <a:pPr algn="ctr"/>
+            <a:endParaRPr/>
           </a:p>
         </p:txBody>
       </p:sp>
@@ -3186,6 +3190,7 @@
           <a:lstStyle/>
           <a:p>
             <a:pPr algn="ctr"/>
+            <a:endParaRPr/>
           </a:p>
         </p:txBody>
       </p:sp>
@@ -3230,6 +3235,7 @@
           <a:lstStyle/>
           <a:p>
             <a:pPr algn="ctr"/>
+            <a:endParaRPr/>
           </a:p>
         </p:txBody>
       </p:sp>
@@ -3274,6 +3280,7 @@
           <a:lstStyle/>
           <a:p>
             <a:pPr algn="ctr"/>
+            <a:endParaRPr/>
           </a:p>
         </p:txBody>
       </p:sp>
@@ -3294,7 +3301,7 @@
           <a:noFill/>
         </p:spPr>
         <p:txBody>
-          <a:bodyPr wrap="square" anchor="t" lIns="25400" rIns="25400" tIns="25400" bIns="25400">
+          <a:bodyPr wrap="square" lIns="25400" tIns="25400" rIns="25400" bIns="25400" anchor="t">
             <a:spAutoFit/>
           </a:bodyPr>
           <a:lstStyle/>
@@ -3339,7 +3346,7 @@
           <a:noFill/>
         </p:spPr>
         <p:txBody>
-          <a:bodyPr wrap="square" anchor="t" lIns="25400" rIns="25400" tIns="25400" bIns="25400">
+          <a:bodyPr wrap="square" lIns="25400" tIns="25400" rIns="25400" bIns="25400" anchor="t">
             <a:spAutoFit/>
           </a:bodyPr>
           <a:lstStyle/>
@@ -3384,7 +3391,7 @@
           <a:noFill/>
         </p:spPr>
         <p:txBody>
-          <a:bodyPr wrap="square" anchor="t" lIns="25400" rIns="25400" tIns="25400" bIns="25400">
+          <a:bodyPr wrap="square" lIns="25400" tIns="25400" rIns="25400" bIns="25400" anchor="t">
             <a:spAutoFit/>
           </a:bodyPr>
           <a:lstStyle/>
@@ -3429,7 +3436,7 @@
           <a:noFill/>
         </p:spPr>
         <p:txBody>
-          <a:bodyPr wrap="square" anchor="t" lIns="25400" rIns="25400" tIns="25400" bIns="25400">
+          <a:bodyPr wrap="square" lIns="25400" tIns="25400" rIns="25400" bIns="25400" anchor="t">
             <a:spAutoFit/>
           </a:bodyPr>
           <a:lstStyle/>
@@ -3474,7 +3481,7 @@
           <a:noFill/>
         </p:spPr>
         <p:txBody>
-          <a:bodyPr wrap="square" anchor="t" lIns="25400" rIns="25400" tIns="25400" bIns="25400">
+          <a:bodyPr wrap="square" lIns="25400" tIns="25400" rIns="25400" bIns="25400" anchor="t">
             <a:spAutoFit/>
           </a:bodyPr>
           <a:lstStyle/>
@@ -3519,7 +3526,7 @@
           <a:noFill/>
         </p:spPr>
         <p:txBody>
-          <a:bodyPr wrap="square" anchor="t" lIns="25400" rIns="25400" tIns="25400" bIns="25400">
+          <a:bodyPr wrap="square" lIns="25400" tIns="25400" rIns="25400" bIns="25400" anchor="t">
             <a:spAutoFit/>
           </a:bodyPr>
           <a:lstStyle/>
@@ -3565,6 +3572,30 @@
           </a:p>
         </p:txBody>
       </p:sp>
+      <p:pic>
+        <p:nvPicPr>
+          <p:cNvPr id="12" name="Picture 11" descr="logo_acc4c792.png"/>
+          <p:cNvPicPr>
+            <a:picLocks noChangeAspect="1"/>
+          </p:cNvPicPr>
+          <p:nvPr/>
+        </p:nvPicPr>
+        <p:blipFill>
+          <a:blip r:embed="rId2"/>
+          <a:stretch>
+            <a:fillRect/>
+          </a:stretch>
+        </p:blipFill>
+        <p:spPr>
+          <a:xfrm>
+            <a:off x="10408615" y="310896"/>
+            <a:ext cx="1417320" cy="516798"/>
+          </a:xfrm>
+          <a:prstGeom prst="rect">
+            <a:avLst/>
+          </a:prstGeom>
+        </p:spPr>
+      </p:pic>
     </p:spTree>
   </p:cSld>
   <p:clrMapOvr>
@@ -3574,7 +3605,7 @@
 </file>
 
 <file path=ppt/slides/slide10.xml><?xml version="1.0" encoding="utf-8"?>
-<p:sld xmlns:a="http://schemas.openxmlformats.org/drawingml/2006/main" xmlns:p="http://schemas.openxmlformats.org/presentationml/2006/main" xmlns:r="http://schemas.openxmlformats.org/officeDocument/2006/relationships">
+<p:sld xmlns:a="http://schemas.openxmlformats.org/drawingml/2006/main" xmlns:r="http://schemas.openxmlformats.org/officeDocument/2006/relationships" xmlns:p="http://schemas.openxmlformats.org/presentationml/2006/main">
   <p:cSld>
     <p:spTree>
       <p:nvGrpSpPr>
@@ -3582,7 +3613,14 @@
         <p:cNvGrpSpPr/>
         <p:nvPr/>
       </p:nvGrpSpPr>
-      <p:grpSpPr/>
+      <p:grpSpPr>
+        <a:xfrm>
+          <a:off x="0" y="0"/>
+          <a:ext cx="0" cy="0"/>
+          <a:chOff x="0" y="0"/>
+          <a:chExt cx="0" cy="0"/>
+        </a:xfrm>
+      </p:grpSpPr>
       <p:sp>
         <p:nvSpPr>
           <p:cNvPr id="2" name="Rectangle 1"/>
@@ -3624,6 +3662,7 @@
           <a:lstStyle/>
           <a:p>
             <a:pPr algn="ctr"/>
+            <a:endParaRPr/>
           </a:p>
         </p:txBody>
       </p:sp>
@@ -3668,6 +3707,7 @@
           <a:lstStyle/>
           <a:p>
             <a:pPr algn="ctr"/>
+            <a:endParaRPr/>
           </a:p>
         </p:txBody>
       </p:sp>
@@ -3688,7 +3728,7 @@
           <a:noFill/>
         </p:spPr>
         <p:txBody>
-          <a:bodyPr wrap="square" anchor="t" lIns="25400" rIns="25400" tIns="25400" bIns="25400">
+          <a:bodyPr wrap="square" lIns="25400" tIns="25400" rIns="25400" bIns="25400" anchor="t">
             <a:spAutoFit/>
           </a:bodyPr>
           <a:lstStyle/>
@@ -3733,7 +3773,7 @@
           <a:noFill/>
         </p:spPr>
         <p:txBody>
-          <a:bodyPr wrap="square" anchor="t" lIns="25400" rIns="25400" tIns="25400" bIns="25400">
+          <a:bodyPr wrap="square" lIns="25400" tIns="25400" rIns="25400" bIns="25400" anchor="t">
             <a:spAutoFit/>
           </a:bodyPr>
           <a:lstStyle/>
@@ -3802,6 +3842,7 @@
           <a:lstStyle/>
           <a:p>
             <a:pPr algn="ctr"/>
+            <a:endParaRPr/>
           </a:p>
         </p:txBody>
       </p:sp>
@@ -3814,7 +3855,7 @@
         <p:spPr>
           <a:xfrm>
             <a:off x="658368" y="1874519"/>
-            <a:ext cx="10789920" cy="640080"/>
+            <a:ext cx="10789920" cy="457200"/>
           </a:xfrm>
           <a:prstGeom prst="rect">
             <a:avLst/>
@@ -3822,7 +3863,7 @@
           <a:noFill/>
         </p:spPr>
         <p:txBody>
-          <a:bodyPr wrap="square" anchor="t" lIns="25400" rIns="25400" tIns="25400" bIns="25400">
+          <a:bodyPr wrap="square" lIns="25400" tIns="25400" rIns="25400" bIns="25400" anchor="t">
             <a:spAutoFit/>
           </a:bodyPr>
           <a:lstStyle/>
@@ -3839,7 +3880,7 @@
               </a:spcAft>
             </a:pPr>
             <a:r>
-              <a:rPr sz="1800" b="0">
+              <a:rPr sz="1700" b="0">
                 <a:solidFill>
                   <a:srgbClr val="475569"/>
                 </a:solidFill>
@@ -3858,8 +3899,8 @@
         </p:nvSpPr>
         <p:spPr>
           <a:xfrm>
-            <a:off x="658368" y="2788919"/>
-            <a:ext cx="6949440" cy="621792"/>
+            <a:off x="658368" y="2514599"/>
+            <a:ext cx="5852160" cy="585216"/>
           </a:xfrm>
           <a:prstGeom prst="roundRect">
             <a:avLst/>
@@ -3893,6 +3934,7 @@
           <a:lstStyle/>
           <a:p>
             <a:pPr algn="ctr"/>
+            <a:endParaRPr/>
           </a:p>
         </p:txBody>
       </p:sp>
@@ -3904,8 +3946,8 @@
         </p:nvSpPr>
         <p:spPr>
           <a:xfrm>
-            <a:off x="914400" y="2907791"/>
-            <a:ext cx="6583680" cy="411480"/>
+            <a:off x="914400" y="2624327"/>
+            <a:ext cx="5486400" cy="411480"/>
           </a:xfrm>
           <a:prstGeom prst="rect">
             <a:avLst/>
@@ -3913,7 +3955,7 @@
           <a:noFill/>
         </p:spPr>
         <p:txBody>
-          <a:bodyPr wrap="square" anchor="t" lIns="25400" rIns="25400" tIns="25400" bIns="25400">
+          <a:bodyPr wrap="square" lIns="25400" tIns="25400" rIns="25400" bIns="25400" anchor="t">
             <a:spAutoFit/>
           </a:bodyPr>
           <a:lstStyle/>
@@ -3930,7 +3972,7 @@
               </a:spcAft>
             </a:pPr>
             <a:r>
-              <a:rPr sz="1600" b="1">
+              <a:rPr sz="1550" b="1">
                 <a:solidFill>
                   <a:srgbClr val="0F172A"/>
                 </a:solidFill>
@@ -3949,8 +3991,8 @@
         </p:nvSpPr>
         <p:spPr>
           <a:xfrm>
-            <a:off x="658368" y="3566159"/>
-            <a:ext cx="6949440" cy="621792"/>
+            <a:off x="658368" y="3227831"/>
+            <a:ext cx="5852160" cy="585216"/>
           </a:xfrm>
           <a:prstGeom prst="roundRect">
             <a:avLst/>
@@ -3984,6 +4026,7 @@
           <a:lstStyle/>
           <a:p>
             <a:pPr algn="ctr"/>
+            <a:endParaRPr/>
           </a:p>
         </p:txBody>
       </p:sp>
@@ -3995,8 +4038,8 @@
         </p:nvSpPr>
         <p:spPr>
           <a:xfrm>
-            <a:off x="914400" y="3685031"/>
-            <a:ext cx="6583680" cy="411480"/>
+            <a:off x="914400" y="3337559"/>
+            <a:ext cx="5486400" cy="411480"/>
           </a:xfrm>
           <a:prstGeom prst="rect">
             <a:avLst/>
@@ -4004,7 +4047,7 @@
           <a:noFill/>
         </p:spPr>
         <p:txBody>
-          <a:bodyPr wrap="square" anchor="t" lIns="25400" rIns="25400" tIns="25400" bIns="25400">
+          <a:bodyPr wrap="square" lIns="25400" tIns="25400" rIns="25400" bIns="25400" anchor="t">
             <a:spAutoFit/>
           </a:bodyPr>
           <a:lstStyle/>
@@ -4021,7 +4064,7 @@
               </a:spcAft>
             </a:pPr>
             <a:r>
-              <a:rPr sz="1600" b="1">
+              <a:rPr sz="1550" b="1">
                 <a:solidFill>
                   <a:srgbClr val="0F172A"/>
                 </a:solidFill>
@@ -4040,8 +4083,8 @@
         </p:nvSpPr>
         <p:spPr>
           <a:xfrm>
-            <a:off x="658368" y="4343399"/>
-            <a:ext cx="6949440" cy="621792"/>
+            <a:off x="658368" y="3941063"/>
+            <a:ext cx="5852160" cy="585216"/>
           </a:xfrm>
           <a:prstGeom prst="roundRect">
             <a:avLst/>
@@ -4075,6 +4118,7 @@
           <a:lstStyle/>
           <a:p>
             <a:pPr algn="ctr"/>
+            <a:endParaRPr/>
           </a:p>
         </p:txBody>
       </p:sp>
@@ -4086,8 +4130,8 @@
         </p:nvSpPr>
         <p:spPr>
           <a:xfrm>
-            <a:off x="914400" y="4462271"/>
-            <a:ext cx="6583680" cy="411480"/>
+            <a:off x="914400" y="4050791"/>
+            <a:ext cx="5486400" cy="411480"/>
           </a:xfrm>
           <a:prstGeom prst="rect">
             <a:avLst/>
@@ -4095,7 +4139,7 @@
           <a:noFill/>
         </p:spPr>
         <p:txBody>
-          <a:bodyPr wrap="square" anchor="t" lIns="25400" rIns="25400" tIns="25400" bIns="25400">
+          <a:bodyPr wrap="square" lIns="25400" tIns="25400" rIns="25400" bIns="25400" anchor="t">
             <a:spAutoFit/>
           </a:bodyPr>
           <a:lstStyle/>
@@ -4112,7 +4156,7 @@
               </a:spcAft>
             </a:pPr>
             <a:r>
-              <a:rPr sz="1600" b="1">
+              <a:rPr sz="1550" b="1">
                 <a:solidFill>
                   <a:srgbClr val="0F172A"/>
                 </a:solidFill>
@@ -4131,8 +4175,8 @@
         </p:nvSpPr>
         <p:spPr>
           <a:xfrm>
-            <a:off x="658368" y="5120639"/>
-            <a:ext cx="6949440" cy="621792"/>
+            <a:off x="658368" y="4654295"/>
+            <a:ext cx="5852160" cy="585216"/>
           </a:xfrm>
           <a:prstGeom prst="roundRect">
             <a:avLst/>
@@ -4166,6 +4210,7 @@
           <a:lstStyle/>
           <a:p>
             <a:pPr algn="ctr"/>
+            <a:endParaRPr/>
           </a:p>
         </p:txBody>
       </p:sp>
@@ -4177,8 +4222,8 @@
         </p:nvSpPr>
         <p:spPr>
           <a:xfrm>
-            <a:off x="914400" y="5239511"/>
-            <a:ext cx="6583680" cy="411480"/>
+            <a:off x="914400" y="4764023"/>
+            <a:ext cx="5486400" cy="411480"/>
           </a:xfrm>
           <a:prstGeom prst="rect">
             <a:avLst/>
@@ -4186,7 +4231,7 @@
           <a:noFill/>
         </p:spPr>
         <p:txBody>
-          <a:bodyPr wrap="square" anchor="t" lIns="25400" rIns="25400" tIns="25400" bIns="25400">
+          <a:bodyPr wrap="square" lIns="25400" tIns="25400" rIns="25400" bIns="25400" anchor="t">
             <a:spAutoFit/>
           </a:bodyPr>
           <a:lstStyle/>
@@ -4203,7 +4248,7 @@
               </a:spcAft>
             </a:pPr>
             <a:r>
-              <a:rPr sz="1600" b="1">
+              <a:rPr sz="1550" b="1">
                 <a:solidFill>
                   <a:srgbClr val="0F172A"/>
                 </a:solidFill>
@@ -4216,14 +4261,524 @@
       </p:sp>
       <p:sp>
         <p:nvSpPr>
-          <p:cNvPr id="16" name="Rounded Rectangle 15"/>
+          <p:cNvPr id="16" name="TextBox 15"/>
+          <p:cNvSpPr txBox="1"/>
+          <p:nvPr/>
+        </p:nvSpPr>
+        <p:spPr>
+          <a:xfrm>
+            <a:off x="658368" y="5486399"/>
+            <a:ext cx="5852160" cy="822960"/>
+          </a:xfrm>
+          <a:prstGeom prst="rect">
+            <a:avLst/>
+          </a:prstGeom>
+          <a:noFill/>
+        </p:spPr>
+        <p:txBody>
+          <a:bodyPr wrap="square" lIns="25400" tIns="25400" rIns="25400" bIns="25400" anchor="t">
+            <a:spAutoFit/>
+          </a:bodyPr>
+          <a:lstStyle/>
+          <a:p>
+            <a:pPr algn="l">
+              <a:lnSpc>
+                <a:spcPct val="112000"/>
+              </a:lnSpc>
+              <a:spcBef>
+                <a:spcPts val="0"/>
+              </a:spcBef>
+              <a:spcAft>
+                <a:spcPts val="600"/>
+              </a:spcAft>
+            </a:pPr>
+            <a:r>
+              <a:rPr sz="1350" b="1">
+                <a:solidFill>
+                  <a:srgbClr val="0F172A"/>
+                </a:solidFill>
+                <a:latin typeface="Segoe UI"/>
+              </a:rPr>
+              <a:t>Why it’s accurate:  </a:t>
+            </a:r>
+            <a:r>
+              <a:rPr sz="1350" b="0">
+                <a:solidFill>
+                  <a:srgbClr val="64748B"/>
+                </a:solidFill>
+                <a:latin typeface="Segoe UI"/>
+              </a:rPr>
+              <a:t>data is fed newest-first with clear date rules and filtered by author, so “latest” means latest.</a:t>
+            </a:r>
+          </a:p>
+        </p:txBody>
+      </p:sp>
+      <p:sp>
+        <p:nvSpPr>
+          <p:cNvPr id="17" name="Rounded Rectangle 16"/>
           <p:cNvSpPr/>
           <p:nvPr/>
         </p:nvSpPr>
         <p:spPr>
           <a:xfrm>
-            <a:off x="7818120" y="2788919"/>
-            <a:ext cx="3657600" cy="3108960"/>
+            <a:off x="6766560" y="2514599"/>
+            <a:ext cx="4754880" cy="3566160"/>
+          </a:xfrm>
+          <a:prstGeom prst="roundRect">
+            <a:avLst/>
+          </a:prstGeom>
+          <a:solidFill>
+            <a:srgbClr val="F6F8FC"/>
+          </a:solidFill>
+          <a:ln w="19050">
+            <a:solidFill>
+              <a:srgbClr val="A7B1C4"/>
+            </a:solidFill>
+          </a:ln>
+          <a:effectLst/>
+        </p:spPr>
+        <p:style>
+          <a:lnRef idx="1">
+            <a:schemeClr val="accent1"/>
+          </a:lnRef>
+          <a:fillRef idx="3">
+            <a:schemeClr val="accent1"/>
+          </a:fillRef>
+          <a:effectRef idx="2">
+            <a:schemeClr val="accent1"/>
+          </a:effectRef>
+          <a:fontRef idx="minor">
+            <a:schemeClr val="lt1"/>
+          </a:fontRef>
+        </p:style>
+        <p:txBody>
+          <a:bodyPr rtlCol="0" anchor="ctr"/>
+          <a:lstStyle/>
+          <a:p>
+            <a:pPr algn="ctr"/>
+            <a:endParaRPr/>
+          </a:p>
+        </p:txBody>
+      </p:sp>
+      <p:sp>
+        <p:nvSpPr>
+          <p:cNvPr id="18" name="TextBox 17"/>
+          <p:cNvSpPr txBox="1"/>
+          <p:nvPr/>
+        </p:nvSpPr>
+        <p:spPr>
+          <a:xfrm>
+            <a:off x="6766560" y="3730751"/>
+            <a:ext cx="4754880" cy="548640"/>
+          </a:xfrm>
+          <a:prstGeom prst="rect">
+            <a:avLst/>
+          </a:prstGeom>
+          <a:noFill/>
+        </p:spPr>
+        <p:txBody>
+          <a:bodyPr wrap="square" lIns="25400" tIns="25400" rIns="25400" bIns="25400" anchor="t">
+            <a:spAutoFit/>
+          </a:bodyPr>
+          <a:lstStyle/>
+          <a:p>
+            <a:pPr algn="ctr">
+              <a:lnSpc>
+                <a:spcPct val="105000"/>
+              </a:lnSpc>
+              <a:spcBef>
+                <a:spcPts val="0"/>
+              </a:spcBef>
+              <a:spcAft>
+                <a:spcPts val="600"/>
+              </a:spcAft>
+            </a:pPr>
+            <a:r>
+              <a:rPr sz="3400" b="0">
+                <a:solidFill>
+                  <a:srgbClr val="64748B"/>
+                </a:solidFill>
+                <a:latin typeface="Segoe UI"/>
+              </a:rPr>
+              <a:t>🖼</a:t>
+            </a:r>
+          </a:p>
+        </p:txBody>
+      </p:sp>
+      <p:sp>
+        <p:nvSpPr>
+          <p:cNvPr id="19" name="TextBox 18"/>
+          <p:cNvSpPr txBox="1"/>
+          <p:nvPr/>
+        </p:nvSpPr>
+        <p:spPr>
+          <a:xfrm>
+            <a:off x="6766560" y="4315967"/>
+            <a:ext cx="4754880" cy="502920"/>
+          </a:xfrm>
+          <a:prstGeom prst="rect">
+            <a:avLst/>
+          </a:prstGeom>
+          <a:noFill/>
+        </p:spPr>
+        <p:txBody>
+          <a:bodyPr wrap="square" lIns="25400" tIns="25400" rIns="25400" bIns="25400" anchor="t">
+            <a:spAutoFit/>
+          </a:bodyPr>
+          <a:lstStyle/>
+          <a:p>
+            <a:pPr algn="ctr">
+              <a:lnSpc>
+                <a:spcPct val="105000"/>
+              </a:lnSpc>
+              <a:spcBef>
+                <a:spcPts val="0"/>
+              </a:spcBef>
+              <a:spcAft>
+                <a:spcPts val="600"/>
+              </a:spcAft>
+            </a:pPr>
+            <a:r>
+              <a:rPr sz="1400" b="1">
+                <a:solidFill>
+                  <a:srgbClr val="0F172A"/>
+                </a:solidFill>
+                <a:latin typeface="Segoe UI Semibold"/>
+              </a:rPr>
+              <a:t>Screenshot 3 — The chatbot (Ask AI)</a:t>
+            </a:r>
+          </a:p>
+        </p:txBody>
+      </p:sp>
+      <p:sp>
+        <p:nvSpPr>
+          <p:cNvPr id="20" name="TextBox 19"/>
+          <p:cNvSpPr txBox="1"/>
+          <p:nvPr/>
+        </p:nvSpPr>
+        <p:spPr>
+          <a:xfrm>
+            <a:off x="6766560" y="5696711"/>
+            <a:ext cx="4754880" cy="320040"/>
+          </a:xfrm>
+          <a:prstGeom prst="rect">
+            <a:avLst/>
+          </a:prstGeom>
+          <a:noFill/>
+        </p:spPr>
+        <p:txBody>
+          <a:bodyPr wrap="square" lIns="25400" tIns="25400" rIns="25400" bIns="25400" anchor="t">
+            <a:spAutoFit/>
+          </a:bodyPr>
+          <a:lstStyle/>
+          <a:p>
+            <a:pPr algn="ctr">
+              <a:lnSpc>
+                <a:spcPct val="105000"/>
+              </a:lnSpc>
+              <a:spcBef>
+                <a:spcPts val="0"/>
+              </a:spcBef>
+              <a:spcAft>
+                <a:spcPts val="600"/>
+              </a:spcAft>
+            </a:pPr>
+            <a:r>
+              <a:rPr sz="1100" b="0">
+                <a:solidFill>
+                  <a:srgbClr val="64748B"/>
+                </a:solidFill>
+                <a:latin typeface="Segoe UI"/>
+              </a:rPr>
+              <a:t>paste screenshot here</a:t>
+            </a:r>
+          </a:p>
+        </p:txBody>
+      </p:sp>
+      <p:pic>
+        <p:nvPicPr>
+          <p:cNvPr id="21" name="Picture 20" descr="logo_b94f5789.png"/>
+          <p:cNvPicPr>
+            <a:picLocks noChangeAspect="1"/>
+          </p:cNvPicPr>
+          <p:nvPr/>
+        </p:nvPicPr>
+        <p:blipFill>
+          <a:blip r:embed="rId2"/>
+          <a:stretch>
+            <a:fillRect/>
+          </a:stretch>
+        </p:blipFill>
+        <p:spPr>
+          <a:xfrm>
+            <a:off x="10408615" y="310896"/>
+            <a:ext cx="1417320" cy="516798"/>
+          </a:xfrm>
+          <a:prstGeom prst="rect">
+            <a:avLst/>
+          </a:prstGeom>
+        </p:spPr>
+      </p:pic>
+    </p:spTree>
+  </p:cSld>
+  <p:clrMapOvr>
+    <a:masterClrMapping/>
+  </p:clrMapOvr>
+</p:sld>
+</file>
+
+<file path=ppt/slides/slide11.xml><?xml version="1.0" encoding="utf-8"?>
+<p:sld xmlns:a="http://schemas.openxmlformats.org/drawingml/2006/main" xmlns:r="http://schemas.openxmlformats.org/officeDocument/2006/relationships" xmlns:p="http://schemas.openxmlformats.org/presentationml/2006/main">
+  <p:cSld>
+    <p:spTree>
+      <p:nvGrpSpPr>
+        <p:cNvPr id="1" name=""/>
+        <p:cNvGrpSpPr/>
+        <p:nvPr/>
+      </p:nvGrpSpPr>
+      <p:grpSpPr>
+        <a:xfrm>
+          <a:off x="0" y="0"/>
+          <a:ext cx="0" cy="0"/>
+          <a:chOff x="0" y="0"/>
+          <a:chExt cx="0" cy="0"/>
+        </a:xfrm>
+      </p:grpSpPr>
+      <p:sp>
+        <p:nvSpPr>
+          <p:cNvPr id="2" name="Rectangle 1"/>
+          <p:cNvSpPr/>
+          <p:nvPr/>
+        </p:nvSpPr>
+        <p:spPr>
+          <a:xfrm>
+            <a:off x="0" y="0"/>
+            <a:ext cx="12191695" cy="6858000"/>
+          </a:xfrm>
+          <a:prstGeom prst="rect">
+            <a:avLst/>
+          </a:prstGeom>
+          <a:solidFill>
+            <a:srgbClr val="EEF1F5"/>
+          </a:solidFill>
+          <a:ln>
+            <a:noFill/>
+          </a:ln>
+          <a:effectLst/>
+        </p:spPr>
+        <p:style>
+          <a:lnRef idx="1">
+            <a:schemeClr val="accent1"/>
+          </a:lnRef>
+          <a:fillRef idx="3">
+            <a:schemeClr val="accent1"/>
+          </a:fillRef>
+          <a:effectRef idx="2">
+            <a:schemeClr val="accent1"/>
+          </a:effectRef>
+          <a:fontRef idx="minor">
+            <a:schemeClr val="lt1"/>
+          </a:fontRef>
+        </p:style>
+        <p:txBody>
+          <a:bodyPr rtlCol="0" anchor="ctr"/>
+          <a:lstStyle/>
+          <a:p>
+            <a:pPr algn="ctr"/>
+            <a:endParaRPr/>
+          </a:p>
+        </p:txBody>
+      </p:sp>
+      <p:sp>
+        <p:nvSpPr>
+          <p:cNvPr id="3" name="Rectangle 2"/>
+          <p:cNvSpPr/>
+          <p:nvPr/>
+        </p:nvSpPr>
+        <p:spPr>
+          <a:xfrm>
+            <a:off x="0" y="0"/>
+            <a:ext cx="256032" cy="6858000"/>
+          </a:xfrm>
+          <a:prstGeom prst="rect">
+            <a:avLst/>
+          </a:prstGeom>
+          <a:solidFill>
+            <a:srgbClr val="2563EB"/>
+          </a:solidFill>
+          <a:ln>
+            <a:noFill/>
+          </a:ln>
+          <a:effectLst/>
+        </p:spPr>
+        <p:style>
+          <a:lnRef idx="1">
+            <a:schemeClr val="accent1"/>
+          </a:lnRef>
+          <a:fillRef idx="3">
+            <a:schemeClr val="accent1"/>
+          </a:fillRef>
+          <a:effectRef idx="2">
+            <a:schemeClr val="accent1"/>
+          </a:effectRef>
+          <a:fontRef idx="minor">
+            <a:schemeClr val="lt1"/>
+          </a:fontRef>
+        </p:style>
+        <p:txBody>
+          <a:bodyPr rtlCol="0" anchor="ctr"/>
+          <a:lstStyle/>
+          <a:p>
+            <a:pPr algn="ctr"/>
+            <a:endParaRPr/>
+          </a:p>
+        </p:txBody>
+      </p:sp>
+      <p:sp>
+        <p:nvSpPr>
+          <p:cNvPr id="4" name="TextBox 3"/>
+          <p:cNvSpPr txBox="1"/>
+          <p:nvPr/>
+        </p:nvSpPr>
+        <p:spPr>
+          <a:xfrm>
+            <a:off x="640080" y="457200"/>
+            <a:ext cx="10881360" cy="365760"/>
+          </a:xfrm>
+          <a:prstGeom prst="rect">
+            <a:avLst/>
+          </a:prstGeom>
+          <a:noFill/>
+        </p:spPr>
+        <p:txBody>
+          <a:bodyPr wrap="square" lIns="25400" tIns="25400" rIns="25400" bIns="25400" anchor="t">
+            <a:spAutoFit/>
+          </a:bodyPr>
+          <a:lstStyle/>
+          <a:p>
+            <a:pPr algn="l">
+              <a:lnSpc>
+                <a:spcPct val="105000"/>
+              </a:lnSpc>
+              <a:spcBef>
+                <a:spcPts val="0"/>
+              </a:spcBef>
+              <a:spcAft>
+                <a:spcPts val="600"/>
+              </a:spcAft>
+            </a:pPr>
+            <a:r>
+              <a:rPr sz="1300" b="1">
+                <a:solidFill>
+                  <a:srgbClr val="2563EB"/>
+                </a:solidFill>
+                <a:latin typeface="Segoe UI"/>
+              </a:rPr>
+              <a:t>BUILT WITH</a:t>
+            </a:r>
+          </a:p>
+        </p:txBody>
+      </p:sp>
+      <p:sp>
+        <p:nvSpPr>
+          <p:cNvPr id="5" name="TextBox 4"/>
+          <p:cNvSpPr txBox="1"/>
+          <p:nvPr/>
+        </p:nvSpPr>
+        <p:spPr>
+          <a:xfrm>
+            <a:off x="640080" y="786384"/>
+            <a:ext cx="10881360" cy="822960"/>
+          </a:xfrm>
+          <a:prstGeom prst="rect">
+            <a:avLst/>
+          </a:prstGeom>
+          <a:noFill/>
+        </p:spPr>
+        <p:txBody>
+          <a:bodyPr wrap="square" lIns="25400" tIns="25400" rIns="25400" bIns="25400" anchor="t">
+            <a:spAutoFit/>
+          </a:bodyPr>
+          <a:lstStyle/>
+          <a:p>
+            <a:pPr algn="l">
+              <a:lnSpc>
+                <a:spcPct val="105000"/>
+              </a:lnSpc>
+              <a:spcBef>
+                <a:spcPts val="0"/>
+              </a:spcBef>
+              <a:spcAft>
+                <a:spcPts val="600"/>
+              </a:spcAft>
+            </a:pPr>
+            <a:r>
+              <a:rPr sz="3200" b="1">
+                <a:solidFill>
+                  <a:srgbClr val="0F172A"/>
+                </a:solidFill>
+                <a:latin typeface="Segoe UI Semibold"/>
+              </a:rPr>
+              <a:t>A small, focused tech stack</a:t>
+            </a:r>
+          </a:p>
+        </p:txBody>
+      </p:sp>
+      <p:sp>
+        <p:nvSpPr>
+          <p:cNvPr id="6" name="Rectangle 5"/>
+          <p:cNvSpPr/>
+          <p:nvPr/>
+        </p:nvSpPr>
+        <p:spPr>
+          <a:xfrm>
+            <a:off x="658368" y="1536192"/>
+            <a:ext cx="1005840" cy="44450"/>
+          </a:xfrm>
+          <a:prstGeom prst="rect">
+            <a:avLst/>
+          </a:prstGeom>
+          <a:solidFill>
+            <a:srgbClr val="2563EB"/>
+          </a:solidFill>
+          <a:ln>
+            <a:noFill/>
+          </a:ln>
+          <a:effectLst/>
+        </p:spPr>
+        <p:style>
+          <a:lnRef idx="1">
+            <a:schemeClr val="accent1"/>
+          </a:lnRef>
+          <a:fillRef idx="3">
+            <a:schemeClr val="accent1"/>
+          </a:fillRef>
+          <a:effectRef idx="2">
+            <a:schemeClr val="accent1"/>
+          </a:effectRef>
+          <a:fontRef idx="minor">
+            <a:schemeClr val="lt1"/>
+          </a:fontRef>
+        </p:style>
+        <p:txBody>
+          <a:bodyPr rtlCol="0" anchor="ctr"/>
+          <a:lstStyle/>
+          <a:p>
+            <a:pPr algn="ctr"/>
+            <a:endParaRPr/>
+          </a:p>
+        </p:txBody>
+      </p:sp>
+      <p:sp>
+        <p:nvSpPr>
+          <p:cNvPr id="7" name="Rounded Rectangle 6"/>
+          <p:cNvSpPr/>
+          <p:nvPr/>
+        </p:nvSpPr>
+        <p:spPr>
+          <a:xfrm>
+            <a:off x="658368" y="1965959"/>
+            <a:ext cx="3520440" cy="1234440"/>
           </a:xfrm>
           <a:prstGeom prst="roundRect">
             <a:avLst/>
@@ -4257,19 +4812,20 @@
           <a:lstStyle/>
           <a:p>
             <a:pPr algn="ctr"/>
-          </a:p>
-        </p:txBody>
-      </p:sp>
-      <p:sp>
-        <p:nvSpPr>
-          <p:cNvPr id="17" name="Rectangle 16"/>
+            <a:endParaRPr/>
+          </a:p>
+        </p:txBody>
+      </p:sp>
+      <p:sp>
+        <p:nvSpPr>
+          <p:cNvPr id="8" name="Rectangle 7"/>
           <p:cNvSpPr/>
           <p:nvPr/>
         </p:nvSpPr>
         <p:spPr>
           <a:xfrm>
-            <a:off x="7818120" y="2788919"/>
-            <a:ext cx="109728" cy="3108960"/>
+            <a:off x="658368" y="1965959"/>
+            <a:ext cx="109728" cy="1234440"/>
           </a:xfrm>
           <a:prstGeom prst="rect">
             <a:avLst/>
@@ -4301,19 +4857,20 @@
           <a:lstStyle/>
           <a:p>
             <a:pPr algn="ctr"/>
-          </a:p>
-        </p:txBody>
-      </p:sp>
-      <p:sp>
-        <p:nvSpPr>
-          <p:cNvPr id="18" name="TextBox 17"/>
+            <a:endParaRPr/>
+          </a:p>
+        </p:txBody>
+      </p:sp>
+      <p:sp>
+        <p:nvSpPr>
+          <p:cNvPr id="9" name="TextBox 8"/>
           <p:cNvSpPr txBox="1"/>
           <p:nvPr/>
         </p:nvSpPr>
         <p:spPr>
           <a:xfrm>
-            <a:off x="8110728" y="2971799"/>
-            <a:ext cx="3200400" cy="457200"/>
+            <a:off x="950976" y="2167127"/>
+            <a:ext cx="3063240" cy="457200"/>
           </a:xfrm>
           <a:prstGeom prst="rect">
             <a:avLst/>
@@ -4321,7 +4878,7 @@
           <a:noFill/>
         </p:spPr>
         <p:txBody>
-          <a:bodyPr wrap="square" anchor="t" lIns="25400" rIns="25400" tIns="25400" bIns="25400">
+          <a:bodyPr wrap="square" lIns="25400" tIns="25400" rIns="25400" bIns="25400" anchor="t">
             <a:spAutoFit/>
           </a:bodyPr>
           <a:lstStyle/>
@@ -4344,21 +4901,21 @@
                 </a:solidFill>
                 <a:latin typeface="Segoe UI Semibold"/>
               </a:rPr>
-              <a:t>Why it’s accurate</a:t>
-            </a:r>
-          </a:p>
-        </p:txBody>
-      </p:sp>
-      <p:sp>
-        <p:nvSpPr>
-          <p:cNvPr id="19" name="TextBox 18"/>
+              <a:t>Streamlit</a:t>
+            </a:r>
+          </a:p>
+        </p:txBody>
+      </p:sp>
+      <p:sp>
+        <p:nvSpPr>
+          <p:cNvPr id="10" name="TextBox 9"/>
           <p:cNvSpPr txBox="1"/>
           <p:nvPr/>
         </p:nvSpPr>
         <p:spPr>
           <a:xfrm>
-            <a:off x="8110728" y="3447287"/>
-            <a:ext cx="3200400" cy="2331720"/>
+            <a:off x="950976" y="2624327"/>
+            <a:ext cx="3063240" cy="457200"/>
           </a:xfrm>
           <a:prstGeom prst="rect">
             <a:avLst/>
@@ -4366,14 +4923,14 @@
           <a:noFill/>
         </p:spPr>
         <p:txBody>
-          <a:bodyPr wrap="square" anchor="t" lIns="25400" rIns="25400" tIns="25400" bIns="25400">
+          <a:bodyPr wrap="square" lIns="25400" tIns="25400" rIns="25400" bIns="25400" anchor="t">
             <a:spAutoFit/>
           </a:bodyPr>
           <a:lstStyle/>
           <a:p>
             <a:pPr algn="l">
               <a:lnSpc>
-                <a:spcPct val="112000"/>
+                <a:spcPct val="105000"/>
               </a:lnSpc>
               <a:spcBef>
                 <a:spcPts val="0"/>
@@ -4389,260 +4946,20 @@
                 </a:solidFill>
                 <a:latin typeface="Segoe UI"/>
               </a:rPr>
-              <a:t>Data is fed to the model sorted newest-first with clear date rules, and filtered by author — so “latest” means latest. Billing comes straight from the rate card.</a:t>
-            </a:r>
-          </a:p>
-        </p:txBody>
-      </p:sp>
-    </p:spTree>
-  </p:cSld>
-  <p:clrMapOvr>
-    <a:masterClrMapping/>
-  </p:clrMapOvr>
-</p:sld>
-</file>
-
-<file path=ppt/slides/slide11.xml><?xml version="1.0" encoding="utf-8"?>
-<p:sld xmlns:a="http://schemas.openxmlformats.org/drawingml/2006/main" xmlns:p="http://schemas.openxmlformats.org/presentationml/2006/main" xmlns:r="http://schemas.openxmlformats.org/officeDocument/2006/relationships">
-  <p:cSld>
-    <p:spTree>
-      <p:nvGrpSpPr>
-        <p:cNvPr id="1" name=""/>
-        <p:cNvGrpSpPr/>
-        <p:nvPr/>
-      </p:nvGrpSpPr>
-      <p:grpSpPr/>
-      <p:sp>
-        <p:nvSpPr>
-          <p:cNvPr id="2" name="Rectangle 1"/>
+              <a:t>the whole web UI</a:t>
+            </a:r>
+          </a:p>
+        </p:txBody>
+      </p:sp>
+      <p:sp>
+        <p:nvSpPr>
+          <p:cNvPr id="11" name="Rounded Rectangle 10"/>
           <p:cNvSpPr/>
           <p:nvPr/>
         </p:nvSpPr>
         <p:spPr>
           <a:xfrm>
-            <a:off x="0" y="0"/>
-            <a:ext cx="12191695" cy="6858000"/>
-          </a:xfrm>
-          <a:prstGeom prst="rect">
-            <a:avLst/>
-          </a:prstGeom>
-          <a:solidFill>
-            <a:srgbClr val="EEF1F5"/>
-          </a:solidFill>
-          <a:ln>
-            <a:noFill/>
-          </a:ln>
-          <a:effectLst/>
-        </p:spPr>
-        <p:style>
-          <a:lnRef idx="1">
-            <a:schemeClr val="accent1"/>
-          </a:lnRef>
-          <a:fillRef idx="3">
-            <a:schemeClr val="accent1"/>
-          </a:fillRef>
-          <a:effectRef idx="2">
-            <a:schemeClr val="accent1"/>
-          </a:effectRef>
-          <a:fontRef idx="minor">
-            <a:schemeClr val="lt1"/>
-          </a:fontRef>
-        </p:style>
-        <p:txBody>
-          <a:bodyPr rtlCol="0" anchor="ctr"/>
-          <a:lstStyle/>
-          <a:p>
-            <a:pPr algn="ctr"/>
-          </a:p>
-        </p:txBody>
-      </p:sp>
-      <p:sp>
-        <p:nvSpPr>
-          <p:cNvPr id="3" name="Rectangle 2"/>
-          <p:cNvSpPr/>
-          <p:nvPr/>
-        </p:nvSpPr>
-        <p:spPr>
-          <a:xfrm>
-            <a:off x="0" y="0"/>
-            <a:ext cx="256032" cy="6858000"/>
-          </a:xfrm>
-          <a:prstGeom prst="rect">
-            <a:avLst/>
-          </a:prstGeom>
-          <a:solidFill>
-            <a:srgbClr val="2563EB"/>
-          </a:solidFill>
-          <a:ln>
-            <a:noFill/>
-          </a:ln>
-          <a:effectLst/>
-        </p:spPr>
-        <p:style>
-          <a:lnRef idx="1">
-            <a:schemeClr val="accent1"/>
-          </a:lnRef>
-          <a:fillRef idx="3">
-            <a:schemeClr val="accent1"/>
-          </a:fillRef>
-          <a:effectRef idx="2">
-            <a:schemeClr val="accent1"/>
-          </a:effectRef>
-          <a:fontRef idx="minor">
-            <a:schemeClr val="lt1"/>
-          </a:fontRef>
-        </p:style>
-        <p:txBody>
-          <a:bodyPr rtlCol="0" anchor="ctr"/>
-          <a:lstStyle/>
-          <a:p>
-            <a:pPr algn="ctr"/>
-          </a:p>
-        </p:txBody>
-      </p:sp>
-      <p:sp>
-        <p:nvSpPr>
-          <p:cNvPr id="4" name="TextBox 3"/>
-          <p:cNvSpPr txBox="1"/>
-          <p:nvPr/>
-        </p:nvSpPr>
-        <p:spPr>
-          <a:xfrm>
-            <a:off x="640080" y="457200"/>
-            <a:ext cx="10881360" cy="365760"/>
-          </a:xfrm>
-          <a:prstGeom prst="rect">
-            <a:avLst/>
-          </a:prstGeom>
-          <a:noFill/>
-        </p:spPr>
-        <p:txBody>
-          <a:bodyPr wrap="square" anchor="t" lIns="25400" rIns="25400" tIns="25400" bIns="25400">
-            <a:spAutoFit/>
-          </a:bodyPr>
-          <a:lstStyle/>
-          <a:p>
-            <a:pPr algn="l">
-              <a:lnSpc>
-                <a:spcPct val="105000"/>
-              </a:lnSpc>
-              <a:spcBef>
-                <a:spcPts val="0"/>
-              </a:spcBef>
-              <a:spcAft>
-                <a:spcPts val="600"/>
-              </a:spcAft>
-            </a:pPr>
-            <a:r>
-              <a:rPr sz="1300" b="1">
-                <a:solidFill>
-                  <a:srgbClr val="2563EB"/>
-                </a:solidFill>
-                <a:latin typeface="Segoe UI"/>
-              </a:rPr>
-              <a:t>BUILT WITH</a:t>
-            </a:r>
-          </a:p>
-        </p:txBody>
-      </p:sp>
-      <p:sp>
-        <p:nvSpPr>
-          <p:cNvPr id="5" name="TextBox 4"/>
-          <p:cNvSpPr txBox="1"/>
-          <p:nvPr/>
-        </p:nvSpPr>
-        <p:spPr>
-          <a:xfrm>
-            <a:off x="640080" y="786384"/>
-            <a:ext cx="10881360" cy="822960"/>
-          </a:xfrm>
-          <a:prstGeom prst="rect">
-            <a:avLst/>
-          </a:prstGeom>
-          <a:noFill/>
-        </p:spPr>
-        <p:txBody>
-          <a:bodyPr wrap="square" anchor="t" lIns="25400" rIns="25400" tIns="25400" bIns="25400">
-            <a:spAutoFit/>
-          </a:bodyPr>
-          <a:lstStyle/>
-          <a:p>
-            <a:pPr algn="l">
-              <a:lnSpc>
-                <a:spcPct val="105000"/>
-              </a:lnSpc>
-              <a:spcBef>
-                <a:spcPts val="0"/>
-              </a:spcBef>
-              <a:spcAft>
-                <a:spcPts val="600"/>
-              </a:spcAft>
-            </a:pPr>
-            <a:r>
-              <a:rPr sz="3200" b="1">
-                <a:solidFill>
-                  <a:srgbClr val="0F172A"/>
-                </a:solidFill>
-                <a:latin typeface="Segoe UI Semibold"/>
-              </a:rPr>
-              <a:t>A small, focused tech stack</a:t>
-            </a:r>
-          </a:p>
-        </p:txBody>
-      </p:sp>
-      <p:sp>
-        <p:nvSpPr>
-          <p:cNvPr id="6" name="Rectangle 5"/>
-          <p:cNvSpPr/>
-          <p:nvPr/>
-        </p:nvSpPr>
-        <p:spPr>
-          <a:xfrm>
-            <a:off x="658368" y="1536192"/>
-            <a:ext cx="1005840" cy="44450"/>
-          </a:xfrm>
-          <a:prstGeom prst="rect">
-            <a:avLst/>
-          </a:prstGeom>
-          <a:solidFill>
-            <a:srgbClr val="2563EB"/>
-          </a:solidFill>
-          <a:ln>
-            <a:noFill/>
-          </a:ln>
-          <a:effectLst/>
-        </p:spPr>
-        <p:style>
-          <a:lnRef idx="1">
-            <a:schemeClr val="accent1"/>
-          </a:lnRef>
-          <a:fillRef idx="3">
-            <a:schemeClr val="accent1"/>
-          </a:fillRef>
-          <a:effectRef idx="2">
-            <a:schemeClr val="accent1"/>
-          </a:effectRef>
-          <a:fontRef idx="minor">
-            <a:schemeClr val="lt1"/>
-          </a:fontRef>
-        </p:style>
-        <p:txBody>
-          <a:bodyPr rtlCol="0" anchor="ctr"/>
-          <a:lstStyle/>
-          <a:p>
-            <a:pPr algn="ctr"/>
-          </a:p>
-        </p:txBody>
-      </p:sp>
-      <p:sp>
-        <p:nvSpPr>
-          <p:cNvPr id="7" name="Rounded Rectangle 6"/>
-          <p:cNvSpPr/>
-          <p:nvPr/>
-        </p:nvSpPr>
-        <p:spPr>
-          <a:xfrm>
-            <a:off x="658368" y="1965959"/>
+            <a:off x="4361688" y="1965959"/>
             <a:ext cx="3520440" cy="1234440"/>
           </a:xfrm>
           <a:prstGeom prst="roundRect">
@@ -4677,25 +4994,26 @@
           <a:lstStyle/>
           <a:p>
             <a:pPr algn="ctr"/>
-          </a:p>
-        </p:txBody>
-      </p:sp>
-      <p:sp>
-        <p:nvSpPr>
-          <p:cNvPr id="8" name="Rectangle 7"/>
+            <a:endParaRPr/>
+          </a:p>
+        </p:txBody>
+      </p:sp>
+      <p:sp>
+        <p:nvSpPr>
+          <p:cNvPr id="12" name="Rectangle 11"/>
           <p:cNvSpPr/>
           <p:nvPr/>
         </p:nvSpPr>
         <p:spPr>
           <a:xfrm>
-            <a:off x="658368" y="1965959"/>
+            <a:off x="4361688" y="1965959"/>
             <a:ext cx="109728" cy="1234440"/>
           </a:xfrm>
           <a:prstGeom prst="rect">
             <a:avLst/>
           </a:prstGeom>
           <a:solidFill>
-            <a:srgbClr val="4F46E5"/>
+            <a:srgbClr val="2563EB"/>
           </a:solidFill>
           <a:ln>
             <a:noFill/>
@@ -4721,18 +5039,19 @@
           <a:lstStyle/>
           <a:p>
             <a:pPr algn="ctr"/>
-          </a:p>
-        </p:txBody>
-      </p:sp>
-      <p:sp>
-        <p:nvSpPr>
-          <p:cNvPr id="9" name="TextBox 8"/>
+            <a:endParaRPr/>
+          </a:p>
+        </p:txBody>
+      </p:sp>
+      <p:sp>
+        <p:nvSpPr>
+          <p:cNvPr id="13" name="TextBox 12"/>
           <p:cNvSpPr txBox="1"/>
           <p:nvPr/>
         </p:nvSpPr>
         <p:spPr>
           <a:xfrm>
-            <a:off x="950976" y="2167127"/>
+            <a:off x="4654296" y="2167127"/>
             <a:ext cx="3063240" cy="457200"/>
           </a:xfrm>
           <a:prstGeom prst="rect">
@@ -4741,7 +5060,7 @@
           <a:noFill/>
         </p:spPr>
         <p:txBody>
-          <a:bodyPr wrap="square" anchor="t" lIns="25400" rIns="25400" tIns="25400" bIns="25400">
+          <a:bodyPr wrap="square" lIns="25400" tIns="25400" rIns="25400" bIns="25400" anchor="t">
             <a:spAutoFit/>
           </a:bodyPr>
           <a:lstStyle/>
@@ -4764,20 +5083,20 @@
                 </a:solidFill>
                 <a:latin typeface="Segoe UI Semibold"/>
               </a:rPr>
-              <a:t>Streamlit</a:t>
-            </a:r>
-          </a:p>
-        </p:txBody>
-      </p:sp>
-      <p:sp>
-        <p:nvSpPr>
-          <p:cNvPr id="10" name="TextBox 9"/>
+              <a:t>Claude AI (Anthropic)</a:t>
+            </a:r>
+          </a:p>
+        </p:txBody>
+      </p:sp>
+      <p:sp>
+        <p:nvSpPr>
+          <p:cNvPr id="14" name="TextBox 13"/>
           <p:cNvSpPr txBox="1"/>
           <p:nvPr/>
         </p:nvSpPr>
         <p:spPr>
           <a:xfrm>
-            <a:off x="950976" y="2624327"/>
+            <a:off x="4654296" y="2624327"/>
             <a:ext cx="3063240" cy="457200"/>
           </a:xfrm>
           <a:prstGeom prst="rect">
@@ -4786,7 +5105,7 @@
           <a:noFill/>
         </p:spPr>
         <p:txBody>
-          <a:bodyPr wrap="square" anchor="t" lIns="25400" rIns="25400" tIns="25400" bIns="25400">
+          <a:bodyPr wrap="square" lIns="25400" tIns="25400" rIns="25400" bIns="25400" anchor="t">
             <a:spAutoFit/>
           </a:bodyPr>
           <a:lstStyle/>
@@ -4809,20 +5128,20 @@
                 </a:solidFill>
                 <a:latin typeface="Segoe UI"/>
               </a:rPr>
-              <a:t>the whole web UI</a:t>
-            </a:r>
-          </a:p>
-        </p:txBody>
-      </p:sp>
-      <p:sp>
-        <p:nvSpPr>
-          <p:cNvPr id="11" name="Rounded Rectangle 10"/>
+              <a:t>two models: fast + smart</a:t>
+            </a:r>
+          </a:p>
+        </p:txBody>
+      </p:sp>
+      <p:sp>
+        <p:nvSpPr>
+          <p:cNvPr id="15" name="Rounded Rectangle 14"/>
           <p:cNvSpPr/>
           <p:nvPr/>
         </p:nvSpPr>
         <p:spPr>
           <a:xfrm>
-            <a:off x="4361688" y="1965959"/>
+            <a:off x="8065008" y="1965959"/>
             <a:ext cx="3520440" cy="1234440"/>
           </a:xfrm>
           <a:prstGeom prst="roundRect">
@@ -4857,25 +5176,26 @@
           <a:lstStyle/>
           <a:p>
             <a:pPr algn="ctr"/>
-          </a:p>
-        </p:txBody>
-      </p:sp>
-      <p:sp>
-        <p:nvSpPr>
-          <p:cNvPr id="12" name="Rectangle 11"/>
+            <a:endParaRPr/>
+          </a:p>
+        </p:txBody>
+      </p:sp>
+      <p:sp>
+        <p:nvSpPr>
+          <p:cNvPr id="16" name="Rectangle 15"/>
           <p:cNvSpPr/>
           <p:nvPr/>
         </p:nvSpPr>
         <p:spPr>
           <a:xfrm>
-            <a:off x="4361688" y="1965959"/>
+            <a:off x="8065008" y="1965959"/>
             <a:ext cx="109728" cy="1234440"/>
           </a:xfrm>
           <a:prstGeom prst="rect">
             <a:avLst/>
           </a:prstGeom>
           <a:solidFill>
-            <a:srgbClr val="2563EB"/>
+            <a:srgbClr val="4F46E5"/>
           </a:solidFill>
           <a:ln>
             <a:noFill/>
@@ -4901,18 +5221,19 @@
           <a:lstStyle/>
           <a:p>
             <a:pPr algn="ctr"/>
-          </a:p>
-        </p:txBody>
-      </p:sp>
-      <p:sp>
-        <p:nvSpPr>
-          <p:cNvPr id="13" name="TextBox 12"/>
+            <a:endParaRPr/>
+          </a:p>
+        </p:txBody>
+      </p:sp>
+      <p:sp>
+        <p:nvSpPr>
+          <p:cNvPr id="17" name="TextBox 16"/>
           <p:cNvSpPr txBox="1"/>
           <p:nvPr/>
         </p:nvSpPr>
         <p:spPr>
           <a:xfrm>
-            <a:off x="4654296" y="2167127"/>
+            <a:off x="8357616" y="2167127"/>
             <a:ext cx="3063240" cy="457200"/>
           </a:xfrm>
           <a:prstGeom prst="rect">
@@ -4921,7 +5242,7 @@
           <a:noFill/>
         </p:spPr>
         <p:txBody>
-          <a:bodyPr wrap="square" anchor="t" lIns="25400" rIns="25400" tIns="25400" bIns="25400">
+          <a:bodyPr wrap="square" lIns="25400" tIns="25400" rIns="25400" bIns="25400" anchor="t">
             <a:spAutoFit/>
           </a:bodyPr>
           <a:lstStyle/>
@@ -4944,20 +5265,20 @@
                 </a:solidFill>
                 <a:latin typeface="Segoe UI Semibold"/>
               </a:rPr>
-              <a:t>Claude AI (Anthropic)</a:t>
-            </a:r>
-          </a:p>
-        </p:txBody>
-      </p:sp>
-      <p:sp>
-        <p:nvSpPr>
-          <p:cNvPr id="14" name="TextBox 13"/>
+              <a:t>gspread + Sheets API</a:t>
+            </a:r>
+          </a:p>
+        </p:txBody>
+      </p:sp>
+      <p:sp>
+        <p:nvSpPr>
+          <p:cNvPr id="18" name="TextBox 17"/>
           <p:cNvSpPr txBox="1"/>
           <p:nvPr/>
         </p:nvSpPr>
         <p:spPr>
           <a:xfrm>
-            <a:off x="4654296" y="2624327"/>
+            <a:off x="8357616" y="2624327"/>
             <a:ext cx="3063240" cy="457200"/>
           </a:xfrm>
           <a:prstGeom prst="rect">
@@ -4966,7 +5287,7 @@
           <a:noFill/>
         </p:spPr>
         <p:txBody>
-          <a:bodyPr wrap="square" anchor="t" lIns="25400" rIns="25400" tIns="25400" bIns="25400">
+          <a:bodyPr wrap="square" lIns="25400" tIns="25400" rIns="25400" bIns="25400" anchor="t">
             <a:spAutoFit/>
           </a:bodyPr>
           <a:lstStyle/>
@@ -4989,20 +5310,20 @@
                 </a:solidFill>
                 <a:latin typeface="Segoe UI"/>
               </a:rPr>
-              <a:t>two models: fast + smart</a:t>
-            </a:r>
-          </a:p>
-        </p:txBody>
-      </p:sp>
-      <p:sp>
-        <p:nvSpPr>
-          <p:cNvPr id="15" name="Rounded Rectangle 14"/>
+              <a:t>storage / database</a:t>
+            </a:r>
+          </a:p>
+        </p:txBody>
+      </p:sp>
+      <p:sp>
+        <p:nvSpPr>
+          <p:cNvPr id="19" name="Rounded Rectangle 18"/>
           <p:cNvSpPr/>
           <p:nvPr/>
         </p:nvSpPr>
         <p:spPr>
           <a:xfrm>
-            <a:off x="8065008" y="1965959"/>
+            <a:off x="658368" y="3428999"/>
             <a:ext cx="3520440" cy="1234440"/>
           </a:xfrm>
           <a:prstGeom prst="roundRect">
@@ -5037,25 +5358,26 @@
           <a:lstStyle/>
           <a:p>
             <a:pPr algn="ctr"/>
-          </a:p>
-        </p:txBody>
-      </p:sp>
-      <p:sp>
-        <p:nvSpPr>
-          <p:cNvPr id="16" name="Rectangle 15"/>
+            <a:endParaRPr/>
+          </a:p>
+        </p:txBody>
+      </p:sp>
+      <p:sp>
+        <p:nvSpPr>
+          <p:cNvPr id="20" name="Rectangle 19"/>
           <p:cNvSpPr/>
           <p:nvPr/>
         </p:nvSpPr>
         <p:spPr>
           <a:xfrm>
-            <a:off x="8065008" y="1965959"/>
+            <a:off x="658368" y="3428999"/>
             <a:ext cx="109728" cy="1234440"/>
           </a:xfrm>
           <a:prstGeom prst="rect">
             <a:avLst/>
           </a:prstGeom>
           <a:solidFill>
-            <a:srgbClr val="4F46E5"/>
+            <a:srgbClr val="2563EB"/>
           </a:solidFill>
           <a:ln>
             <a:noFill/>
@@ -5081,18 +5403,19 @@
           <a:lstStyle/>
           <a:p>
             <a:pPr algn="ctr"/>
-          </a:p>
-        </p:txBody>
-      </p:sp>
-      <p:sp>
-        <p:nvSpPr>
-          <p:cNvPr id="17" name="TextBox 16"/>
+            <a:endParaRPr/>
+          </a:p>
+        </p:txBody>
+      </p:sp>
+      <p:sp>
+        <p:nvSpPr>
+          <p:cNvPr id="21" name="TextBox 20"/>
           <p:cNvSpPr txBox="1"/>
           <p:nvPr/>
         </p:nvSpPr>
         <p:spPr>
           <a:xfrm>
-            <a:off x="8357616" y="2167127"/>
+            <a:off x="950976" y="3630167"/>
             <a:ext cx="3063240" cy="457200"/>
           </a:xfrm>
           <a:prstGeom prst="rect">
@@ -5101,7 +5424,7 @@
           <a:noFill/>
         </p:spPr>
         <p:txBody>
-          <a:bodyPr wrap="square" anchor="t" lIns="25400" rIns="25400" tIns="25400" bIns="25400">
+          <a:bodyPr wrap="square" lIns="25400" tIns="25400" rIns="25400" bIns="25400" anchor="t">
             <a:spAutoFit/>
           </a:bodyPr>
           <a:lstStyle/>
@@ -5124,20 +5447,20 @@
                 </a:solidFill>
                 <a:latin typeface="Segoe UI Semibold"/>
               </a:rPr>
-              <a:t>gspread + Sheets API</a:t>
-            </a:r>
-          </a:p>
-        </p:txBody>
-      </p:sp>
-      <p:sp>
-        <p:nvSpPr>
-          <p:cNvPr id="18" name="TextBox 17"/>
+              <a:t>pandas</a:t>
+            </a:r>
+          </a:p>
+        </p:txBody>
+      </p:sp>
+      <p:sp>
+        <p:nvSpPr>
+          <p:cNvPr id="22" name="TextBox 21"/>
           <p:cNvSpPr txBox="1"/>
           <p:nvPr/>
         </p:nvSpPr>
         <p:spPr>
           <a:xfrm>
-            <a:off x="8357616" y="2624327"/>
+            <a:off x="950976" y="4087367"/>
             <a:ext cx="3063240" cy="457200"/>
           </a:xfrm>
           <a:prstGeom prst="rect">
@@ -5146,7 +5469,7 @@
           <a:noFill/>
         </p:spPr>
         <p:txBody>
-          <a:bodyPr wrap="square" anchor="t" lIns="25400" rIns="25400" tIns="25400" bIns="25400">
+          <a:bodyPr wrap="square" lIns="25400" tIns="25400" rIns="25400" bIns="25400" anchor="t">
             <a:spAutoFit/>
           </a:bodyPr>
           <a:lstStyle/>
@@ -5169,20 +5492,20 @@
                 </a:solidFill>
                 <a:latin typeface="Segoe UI"/>
               </a:rPr>
-              <a:t>storage / database</a:t>
-            </a:r>
-          </a:p>
-        </p:txBody>
-      </p:sp>
-      <p:sp>
-        <p:nvSpPr>
-          <p:cNvPr id="19" name="Rounded Rectangle 18"/>
+              <a:t>data wrangling</a:t>
+            </a:r>
+          </a:p>
+        </p:txBody>
+      </p:sp>
+      <p:sp>
+        <p:nvSpPr>
+          <p:cNvPr id="23" name="Rounded Rectangle 22"/>
           <p:cNvSpPr/>
           <p:nvPr/>
         </p:nvSpPr>
         <p:spPr>
           <a:xfrm>
-            <a:off x="658368" y="3428999"/>
+            <a:off x="4361688" y="3428999"/>
             <a:ext cx="3520440" cy="1234440"/>
           </a:xfrm>
           <a:prstGeom prst="roundRect">
@@ -5217,25 +5540,26 @@
           <a:lstStyle/>
           <a:p>
             <a:pPr algn="ctr"/>
-          </a:p>
-        </p:txBody>
-      </p:sp>
-      <p:sp>
-        <p:nvSpPr>
-          <p:cNvPr id="20" name="Rectangle 19"/>
+            <a:endParaRPr/>
+          </a:p>
+        </p:txBody>
+      </p:sp>
+      <p:sp>
+        <p:nvSpPr>
+          <p:cNvPr id="24" name="Rectangle 23"/>
           <p:cNvSpPr/>
           <p:nvPr/>
         </p:nvSpPr>
         <p:spPr>
           <a:xfrm>
-            <a:off x="658368" y="3428999"/>
+            <a:off x="4361688" y="3428999"/>
             <a:ext cx="109728" cy="1234440"/>
           </a:xfrm>
           <a:prstGeom prst="rect">
             <a:avLst/>
           </a:prstGeom>
           <a:solidFill>
-            <a:srgbClr val="2563EB"/>
+            <a:srgbClr val="4F46E5"/>
           </a:solidFill>
           <a:ln>
             <a:noFill/>
@@ -5261,18 +5585,19 @@
           <a:lstStyle/>
           <a:p>
             <a:pPr algn="ctr"/>
-          </a:p>
-        </p:txBody>
-      </p:sp>
-      <p:sp>
-        <p:nvSpPr>
-          <p:cNvPr id="21" name="TextBox 20"/>
+            <a:endParaRPr/>
+          </a:p>
+        </p:txBody>
+      </p:sp>
+      <p:sp>
+        <p:nvSpPr>
+          <p:cNvPr id="25" name="TextBox 24"/>
           <p:cNvSpPr txBox="1"/>
           <p:nvPr/>
         </p:nvSpPr>
         <p:spPr>
           <a:xfrm>
-            <a:off x="950976" y="3630167"/>
+            <a:off x="4654296" y="3630167"/>
             <a:ext cx="3063240" cy="457200"/>
           </a:xfrm>
           <a:prstGeom prst="rect">
@@ -5281,7 +5606,7 @@
           <a:noFill/>
         </p:spPr>
         <p:txBody>
-          <a:bodyPr wrap="square" anchor="t" lIns="25400" rIns="25400" tIns="25400" bIns="25400">
+          <a:bodyPr wrap="square" lIns="25400" tIns="25400" rIns="25400" bIns="25400" anchor="t">
             <a:spAutoFit/>
           </a:bodyPr>
           <a:lstStyle/>
@@ -5304,20 +5629,20 @@
                 </a:solidFill>
                 <a:latin typeface="Segoe UI Semibold"/>
               </a:rPr>
-              <a:t>pandas</a:t>
-            </a:r>
-          </a:p>
-        </p:txBody>
-      </p:sp>
-      <p:sp>
-        <p:nvSpPr>
-          <p:cNvPr id="22" name="TextBox 21"/>
+              <a:t>git + subprocess</a:t>
+            </a:r>
+          </a:p>
+        </p:txBody>
+      </p:sp>
+      <p:sp>
+        <p:nvSpPr>
+          <p:cNvPr id="26" name="TextBox 25"/>
           <p:cNvSpPr txBox="1"/>
           <p:nvPr/>
         </p:nvSpPr>
         <p:spPr>
           <a:xfrm>
-            <a:off x="950976" y="4087367"/>
+            <a:off x="4654296" y="4087367"/>
             <a:ext cx="3063240" cy="457200"/>
           </a:xfrm>
           <a:prstGeom prst="rect">
@@ -5326,7 +5651,7 @@
           <a:noFill/>
         </p:spPr>
         <p:txBody>
-          <a:bodyPr wrap="square" anchor="t" lIns="25400" rIns="25400" tIns="25400" bIns="25400">
+          <a:bodyPr wrap="square" lIns="25400" tIns="25400" rIns="25400" bIns="25400" anchor="t">
             <a:spAutoFit/>
           </a:bodyPr>
           <a:lstStyle/>
@@ -5349,20 +5674,20 @@
                 </a:solidFill>
                 <a:latin typeface="Segoe UI"/>
               </a:rPr>
-              <a:t>data wrangling</a:t>
-            </a:r>
-          </a:p>
-        </p:txBody>
-      </p:sp>
-      <p:sp>
-        <p:nvSpPr>
-          <p:cNvPr id="23" name="Rounded Rectangle 22"/>
+              <a:t>the source data</a:t>
+            </a:r>
+          </a:p>
+        </p:txBody>
+      </p:sp>
+      <p:sp>
+        <p:nvSpPr>
+          <p:cNvPr id="27" name="Rounded Rectangle 26"/>
           <p:cNvSpPr/>
           <p:nvPr/>
         </p:nvSpPr>
         <p:spPr>
           <a:xfrm>
-            <a:off x="4361688" y="3428999"/>
+            <a:off x="8065008" y="3428999"/>
             <a:ext cx="3520440" cy="1234440"/>
           </a:xfrm>
           <a:prstGeom prst="roundRect">
@@ -5397,25 +5722,26 @@
           <a:lstStyle/>
           <a:p>
             <a:pPr algn="ctr"/>
-          </a:p>
-        </p:txBody>
-      </p:sp>
-      <p:sp>
-        <p:nvSpPr>
-          <p:cNvPr id="24" name="Rectangle 23"/>
+            <a:endParaRPr/>
+          </a:p>
+        </p:txBody>
+      </p:sp>
+      <p:sp>
+        <p:nvSpPr>
+          <p:cNvPr id="28" name="Rectangle 27"/>
           <p:cNvSpPr/>
           <p:nvPr/>
         </p:nvSpPr>
         <p:spPr>
           <a:xfrm>
-            <a:off x="4361688" y="3428999"/>
+            <a:off x="8065008" y="3428999"/>
             <a:ext cx="109728" cy="1234440"/>
           </a:xfrm>
           <a:prstGeom prst="rect">
             <a:avLst/>
           </a:prstGeom>
           <a:solidFill>
-            <a:srgbClr val="4F46E5"/>
+            <a:srgbClr val="2563EB"/>
           </a:solidFill>
           <a:ln>
             <a:noFill/>
@@ -5441,18 +5767,19 @@
           <a:lstStyle/>
           <a:p>
             <a:pPr algn="ctr"/>
-          </a:p>
-        </p:txBody>
-      </p:sp>
-      <p:sp>
-        <p:nvSpPr>
-          <p:cNvPr id="25" name="TextBox 24"/>
+            <a:endParaRPr/>
+          </a:p>
+        </p:txBody>
+      </p:sp>
+      <p:sp>
+        <p:nvSpPr>
+          <p:cNvPr id="29" name="TextBox 28"/>
           <p:cNvSpPr txBox="1"/>
           <p:nvPr/>
         </p:nvSpPr>
         <p:spPr>
           <a:xfrm>
-            <a:off x="4654296" y="3630167"/>
+            <a:off x="8357616" y="3630167"/>
             <a:ext cx="3063240" cy="457200"/>
           </a:xfrm>
           <a:prstGeom prst="rect">
@@ -5461,7 +5788,7 @@
           <a:noFill/>
         </p:spPr>
         <p:txBody>
-          <a:bodyPr wrap="square" anchor="t" lIns="25400" rIns="25400" tIns="25400" bIns="25400">
+          <a:bodyPr wrap="square" lIns="25400" tIns="25400" rIns="25400" bIns="25400" anchor="t">
             <a:spAutoFit/>
           </a:bodyPr>
           <a:lstStyle/>
@@ -5484,20 +5811,20 @@
                 </a:solidFill>
                 <a:latin typeface="Segoe UI Semibold"/>
               </a:rPr>
-              <a:t>git + subprocess</a:t>
-            </a:r>
-          </a:p>
-        </p:txBody>
-      </p:sp>
-      <p:sp>
-        <p:nvSpPr>
-          <p:cNvPr id="26" name="TextBox 25"/>
+              <a:t>python-dotenv</a:t>
+            </a:r>
+          </a:p>
+        </p:txBody>
+      </p:sp>
+      <p:sp>
+        <p:nvSpPr>
+          <p:cNvPr id="30" name="TextBox 29"/>
           <p:cNvSpPr txBox="1"/>
           <p:nvPr/>
         </p:nvSpPr>
         <p:spPr>
           <a:xfrm>
-            <a:off x="4654296" y="4087367"/>
+            <a:off x="8357616" y="4087367"/>
             <a:ext cx="3063240" cy="457200"/>
           </a:xfrm>
           <a:prstGeom prst="rect">
@@ -5506,7 +5833,7 @@
           <a:noFill/>
         </p:spPr>
         <p:txBody>
-          <a:bodyPr wrap="square" anchor="t" lIns="25400" rIns="25400" tIns="25400" bIns="25400">
+          <a:bodyPr wrap="square" lIns="25400" tIns="25400" rIns="25400" bIns="25400" anchor="t">
             <a:spAutoFit/>
           </a:bodyPr>
           <a:lstStyle/>
@@ -5529,21 +5856,295 @@
                 </a:solidFill>
                 <a:latin typeface="Segoe UI"/>
               </a:rPr>
-              <a:t>the source data</a:t>
-            </a:r>
-          </a:p>
-        </p:txBody>
-      </p:sp>
-      <p:sp>
-        <p:nvSpPr>
-          <p:cNvPr id="27" name="Rounded Rectangle 26"/>
+              <a:t>config &amp; secrets</a:t>
+            </a:r>
+          </a:p>
+        </p:txBody>
+      </p:sp>
+      <p:pic>
+        <p:nvPicPr>
+          <p:cNvPr id="31" name="Picture 30" descr="logo_b94f5789.png"/>
+          <p:cNvPicPr>
+            <a:picLocks noChangeAspect="1"/>
+          </p:cNvPicPr>
+          <p:nvPr/>
+        </p:nvPicPr>
+        <p:blipFill>
+          <a:blip r:embed="rId2"/>
+          <a:stretch>
+            <a:fillRect/>
+          </a:stretch>
+        </p:blipFill>
+        <p:spPr>
+          <a:xfrm>
+            <a:off x="10408615" y="310896"/>
+            <a:ext cx="1417320" cy="516798"/>
+          </a:xfrm>
+          <a:prstGeom prst="rect">
+            <a:avLst/>
+          </a:prstGeom>
+        </p:spPr>
+      </p:pic>
+    </p:spTree>
+  </p:cSld>
+  <p:clrMapOvr>
+    <a:masterClrMapping/>
+  </p:clrMapOvr>
+</p:sld>
+</file>
+
+<file path=ppt/slides/slide12.xml><?xml version="1.0" encoding="utf-8"?>
+<p:sld xmlns:a="http://schemas.openxmlformats.org/drawingml/2006/main" xmlns:r="http://schemas.openxmlformats.org/officeDocument/2006/relationships" xmlns:p="http://schemas.openxmlformats.org/presentationml/2006/main">
+  <p:cSld>
+    <p:spTree>
+      <p:nvGrpSpPr>
+        <p:cNvPr id="1" name=""/>
+        <p:cNvGrpSpPr/>
+        <p:nvPr/>
+      </p:nvGrpSpPr>
+      <p:grpSpPr>
+        <a:xfrm>
+          <a:off x="0" y="0"/>
+          <a:ext cx="0" cy="0"/>
+          <a:chOff x="0" y="0"/>
+          <a:chExt cx="0" cy="0"/>
+        </a:xfrm>
+      </p:grpSpPr>
+      <p:sp>
+        <p:nvSpPr>
+          <p:cNvPr id="2" name="Rectangle 1"/>
           <p:cNvSpPr/>
           <p:nvPr/>
         </p:nvSpPr>
         <p:spPr>
           <a:xfrm>
-            <a:off x="8065008" y="3428999"/>
-            <a:ext cx="3520440" cy="1234440"/>
+            <a:off x="0" y="0"/>
+            <a:ext cx="12191695" cy="6858000"/>
+          </a:xfrm>
+          <a:prstGeom prst="rect">
+            <a:avLst/>
+          </a:prstGeom>
+          <a:solidFill>
+            <a:srgbClr val="EEF1F5"/>
+          </a:solidFill>
+          <a:ln>
+            <a:noFill/>
+          </a:ln>
+          <a:effectLst/>
+        </p:spPr>
+        <p:style>
+          <a:lnRef idx="1">
+            <a:schemeClr val="accent1"/>
+          </a:lnRef>
+          <a:fillRef idx="3">
+            <a:schemeClr val="accent1"/>
+          </a:fillRef>
+          <a:effectRef idx="2">
+            <a:schemeClr val="accent1"/>
+          </a:effectRef>
+          <a:fontRef idx="minor">
+            <a:schemeClr val="lt1"/>
+          </a:fontRef>
+        </p:style>
+        <p:txBody>
+          <a:bodyPr rtlCol="0" anchor="ctr"/>
+          <a:lstStyle/>
+          <a:p>
+            <a:pPr algn="ctr"/>
+            <a:endParaRPr/>
+          </a:p>
+        </p:txBody>
+      </p:sp>
+      <p:sp>
+        <p:nvSpPr>
+          <p:cNvPr id="3" name="Rectangle 2"/>
+          <p:cNvSpPr/>
+          <p:nvPr/>
+        </p:nvSpPr>
+        <p:spPr>
+          <a:xfrm>
+            <a:off x="0" y="0"/>
+            <a:ext cx="256032" cy="6858000"/>
+          </a:xfrm>
+          <a:prstGeom prst="rect">
+            <a:avLst/>
+          </a:prstGeom>
+          <a:solidFill>
+            <a:srgbClr val="15803D"/>
+          </a:solidFill>
+          <a:ln>
+            <a:noFill/>
+          </a:ln>
+          <a:effectLst/>
+        </p:spPr>
+        <p:style>
+          <a:lnRef idx="1">
+            <a:schemeClr val="accent1"/>
+          </a:lnRef>
+          <a:fillRef idx="3">
+            <a:schemeClr val="accent1"/>
+          </a:fillRef>
+          <a:effectRef idx="2">
+            <a:schemeClr val="accent1"/>
+          </a:effectRef>
+          <a:fontRef idx="minor">
+            <a:schemeClr val="lt1"/>
+          </a:fontRef>
+        </p:style>
+        <p:txBody>
+          <a:bodyPr rtlCol="0" anchor="ctr"/>
+          <a:lstStyle/>
+          <a:p>
+            <a:pPr algn="ctr"/>
+            <a:endParaRPr/>
+          </a:p>
+        </p:txBody>
+      </p:sp>
+      <p:sp>
+        <p:nvSpPr>
+          <p:cNvPr id="4" name="TextBox 3"/>
+          <p:cNvSpPr txBox="1"/>
+          <p:nvPr/>
+        </p:nvSpPr>
+        <p:spPr>
+          <a:xfrm>
+            <a:off x="640080" y="457200"/>
+            <a:ext cx="10881360" cy="365760"/>
+          </a:xfrm>
+          <a:prstGeom prst="rect">
+            <a:avLst/>
+          </a:prstGeom>
+          <a:noFill/>
+        </p:spPr>
+        <p:txBody>
+          <a:bodyPr wrap="square" lIns="25400" tIns="25400" rIns="25400" bIns="25400" anchor="t">
+            <a:spAutoFit/>
+          </a:bodyPr>
+          <a:lstStyle/>
+          <a:p>
+            <a:pPr algn="l">
+              <a:lnSpc>
+                <a:spcPct val="105000"/>
+              </a:lnSpc>
+              <a:spcBef>
+                <a:spcPts val="0"/>
+              </a:spcBef>
+              <a:spcAft>
+                <a:spcPts val="600"/>
+              </a:spcAft>
+            </a:pPr>
+            <a:r>
+              <a:rPr sz="1300" b="1">
+                <a:solidFill>
+                  <a:srgbClr val="15803D"/>
+                </a:solidFill>
+                <a:latin typeface="Segoe UI"/>
+              </a:rPr>
+              <a:t>WHY IT MATTERS</a:t>
+            </a:r>
+          </a:p>
+        </p:txBody>
+      </p:sp>
+      <p:sp>
+        <p:nvSpPr>
+          <p:cNvPr id="5" name="TextBox 4"/>
+          <p:cNvSpPr txBox="1"/>
+          <p:nvPr/>
+        </p:nvSpPr>
+        <p:spPr>
+          <a:xfrm>
+            <a:off x="640080" y="786384"/>
+            <a:ext cx="10881360" cy="822960"/>
+          </a:xfrm>
+          <a:prstGeom prst="rect">
+            <a:avLst/>
+          </a:prstGeom>
+          <a:noFill/>
+        </p:spPr>
+        <p:txBody>
+          <a:bodyPr wrap="square" lIns="25400" tIns="25400" rIns="25400" bIns="25400" anchor="t">
+            <a:spAutoFit/>
+          </a:bodyPr>
+          <a:lstStyle/>
+          <a:p>
+            <a:pPr algn="l">
+              <a:lnSpc>
+                <a:spcPct val="105000"/>
+              </a:lnSpc>
+              <a:spcBef>
+                <a:spcPts val="0"/>
+              </a:spcBef>
+              <a:spcAft>
+                <a:spcPts val="600"/>
+              </a:spcAft>
+            </a:pPr>
+            <a:r>
+              <a:rPr sz="3200" b="1">
+                <a:solidFill>
+                  <a:srgbClr val="0F172A"/>
+                </a:solidFill>
+                <a:latin typeface="Segoe UI Semibold"/>
+              </a:rPr>
+              <a:t>The impact</a:t>
+            </a:r>
+          </a:p>
+        </p:txBody>
+      </p:sp>
+      <p:sp>
+        <p:nvSpPr>
+          <p:cNvPr id="6" name="Rectangle 5"/>
+          <p:cNvSpPr/>
+          <p:nvPr/>
+        </p:nvSpPr>
+        <p:spPr>
+          <a:xfrm>
+            <a:off x="658368" y="1536192"/>
+            <a:ext cx="1005840" cy="44450"/>
+          </a:xfrm>
+          <a:prstGeom prst="rect">
+            <a:avLst/>
+          </a:prstGeom>
+          <a:solidFill>
+            <a:srgbClr val="15803D"/>
+          </a:solidFill>
+          <a:ln>
+            <a:noFill/>
+          </a:ln>
+          <a:effectLst/>
+        </p:spPr>
+        <p:style>
+          <a:lnRef idx="1">
+            <a:schemeClr val="accent1"/>
+          </a:lnRef>
+          <a:fillRef idx="3">
+            <a:schemeClr val="accent1"/>
+          </a:fillRef>
+          <a:effectRef idx="2">
+            <a:schemeClr val="accent1"/>
+          </a:effectRef>
+          <a:fontRef idx="minor">
+            <a:schemeClr val="lt1"/>
+          </a:fontRef>
+        </p:style>
+        <p:txBody>
+          <a:bodyPr rtlCol="0" anchor="ctr"/>
+          <a:lstStyle/>
+          <a:p>
+            <a:pPr algn="ctr"/>
+            <a:endParaRPr/>
+          </a:p>
+        </p:txBody>
+      </p:sp>
+      <p:sp>
+        <p:nvSpPr>
+          <p:cNvPr id="7" name="Rounded Rectangle 6"/>
+          <p:cNvSpPr/>
+          <p:nvPr/>
+        </p:nvSpPr>
+        <p:spPr>
+          <a:xfrm>
+            <a:off x="658368" y="1965959"/>
+            <a:ext cx="3520440" cy="1828800"/>
           </a:xfrm>
           <a:prstGeom prst="roundRect">
             <a:avLst/>
@@ -5577,63 +6178,20 @@
           <a:lstStyle/>
           <a:p>
             <a:pPr algn="ctr"/>
-          </a:p>
-        </p:txBody>
-      </p:sp>
-      <p:sp>
-        <p:nvSpPr>
-          <p:cNvPr id="28" name="Rectangle 27"/>
-          <p:cNvSpPr/>
-          <p:nvPr/>
-        </p:nvSpPr>
-        <p:spPr>
-          <a:xfrm>
-            <a:off x="8065008" y="3428999"/>
-            <a:ext cx="109728" cy="1234440"/>
-          </a:xfrm>
-          <a:prstGeom prst="rect">
-            <a:avLst/>
-          </a:prstGeom>
-          <a:solidFill>
-            <a:srgbClr val="2563EB"/>
-          </a:solidFill>
-          <a:ln>
-            <a:noFill/>
-          </a:ln>
-          <a:effectLst/>
-        </p:spPr>
-        <p:style>
-          <a:lnRef idx="1">
-            <a:schemeClr val="accent1"/>
-          </a:lnRef>
-          <a:fillRef idx="3">
-            <a:schemeClr val="accent1"/>
-          </a:fillRef>
-          <a:effectRef idx="2">
-            <a:schemeClr val="accent1"/>
-          </a:effectRef>
-          <a:fontRef idx="minor">
-            <a:schemeClr val="lt1"/>
-          </a:fontRef>
-        </p:style>
-        <p:txBody>
-          <a:bodyPr rtlCol="0" anchor="ctr"/>
-          <a:lstStyle/>
-          <a:p>
-            <a:pPr algn="ctr"/>
-          </a:p>
-        </p:txBody>
-      </p:sp>
-      <p:sp>
-        <p:nvSpPr>
-          <p:cNvPr id="29" name="TextBox 28"/>
+            <a:endParaRPr/>
+          </a:p>
+        </p:txBody>
+      </p:sp>
+      <p:sp>
+        <p:nvSpPr>
+          <p:cNvPr id="8" name="TextBox 7"/>
           <p:cNvSpPr txBox="1"/>
           <p:nvPr/>
         </p:nvSpPr>
         <p:spPr>
           <a:xfrm>
-            <a:off x="8357616" y="3630167"/>
-            <a:ext cx="3063240" cy="457200"/>
+            <a:off x="658368" y="2285999"/>
+            <a:ext cx="3520440" cy="731520"/>
           </a:xfrm>
           <a:prstGeom prst="rect">
             <a:avLst/>
@@ -5641,12 +6199,12 @@
           <a:noFill/>
         </p:spPr>
         <p:txBody>
-          <a:bodyPr wrap="square" anchor="t" lIns="25400" rIns="25400" tIns="25400" bIns="25400">
+          <a:bodyPr wrap="square" lIns="25400" tIns="25400" rIns="25400" bIns="25400" anchor="t">
             <a:spAutoFit/>
           </a:bodyPr>
           <a:lstStyle/>
           <a:p>
-            <a:pPr algn="l">
+            <a:pPr algn="ctr">
               <a:lnSpc>
                 <a:spcPct val="105000"/>
               </a:lnSpc>
@@ -5658,27 +6216,27 @@
               </a:spcAft>
             </a:pPr>
             <a:r>
-              <a:rPr sz="1800" b="1">
-                <a:solidFill>
-                  <a:srgbClr val="0F172A"/>
+              <a:rPr sz="4000" b="1">
+                <a:solidFill>
+                  <a:srgbClr val="15803D"/>
                 </a:solidFill>
                 <a:latin typeface="Segoe UI Semibold"/>
               </a:rPr>
-              <a:t>python-dotenv</a:t>
-            </a:r>
-          </a:p>
-        </p:txBody>
-      </p:sp>
-      <p:sp>
-        <p:nvSpPr>
-          <p:cNvPr id="30" name="TextBox 29"/>
+              <a:t>~1–1.5 h</a:t>
+            </a:r>
+          </a:p>
+        </p:txBody>
+      </p:sp>
+      <p:sp>
+        <p:nvSpPr>
+          <p:cNvPr id="9" name="TextBox 8"/>
           <p:cNvSpPr txBox="1"/>
           <p:nvPr/>
         </p:nvSpPr>
         <p:spPr>
           <a:xfrm>
-            <a:off x="8357616" y="4087367"/>
-            <a:ext cx="3063240" cy="457200"/>
+            <a:off x="932688" y="3108959"/>
+            <a:ext cx="2971800" cy="640080"/>
           </a:xfrm>
           <a:prstGeom prst="rect">
             <a:avLst/>
@@ -5686,12 +6244,12 @@
           <a:noFill/>
         </p:spPr>
         <p:txBody>
-          <a:bodyPr wrap="square" anchor="t" lIns="25400" rIns="25400" tIns="25400" bIns="25400">
+          <a:bodyPr wrap="square" lIns="25400" tIns="25400" rIns="25400" bIns="25400" anchor="t">
             <a:spAutoFit/>
           </a:bodyPr>
           <a:lstStyle/>
           <a:p>
-            <a:pPr algn="l">
+            <a:pPr algn="ctr">
               <a:lnSpc>
                 <a:spcPct val="105000"/>
               </a:lnSpc>
@@ -5703,266 +6261,26 @@
               </a:spcAft>
             </a:pPr>
             <a:r>
-              <a:rPr sz="1400" b="0">
+              <a:rPr sz="1450" b="0">
                 <a:solidFill>
                   <a:srgbClr val="64748B"/>
                 </a:solidFill>
                 <a:latin typeface="Segoe UI"/>
               </a:rPr>
-              <a:t>config &amp; secrets</a:t>
-            </a:r>
-          </a:p>
-        </p:txBody>
-      </p:sp>
-    </p:spTree>
-  </p:cSld>
-  <p:clrMapOvr>
-    <a:masterClrMapping/>
-  </p:clrMapOvr>
-</p:sld>
-</file>
-
-<file path=ppt/slides/slide12.xml><?xml version="1.0" encoding="utf-8"?>
-<p:sld xmlns:a="http://schemas.openxmlformats.org/drawingml/2006/main" xmlns:p="http://schemas.openxmlformats.org/presentationml/2006/main" xmlns:r="http://schemas.openxmlformats.org/officeDocument/2006/relationships">
-  <p:cSld>
-    <p:spTree>
-      <p:nvGrpSpPr>
-        <p:cNvPr id="1" name=""/>
-        <p:cNvGrpSpPr/>
-        <p:nvPr/>
-      </p:nvGrpSpPr>
-      <p:grpSpPr/>
-      <p:sp>
-        <p:nvSpPr>
-          <p:cNvPr id="2" name="Rectangle 1"/>
+              <a:t>recovered per developer, every week</a:t>
+            </a:r>
+          </a:p>
+        </p:txBody>
+      </p:sp>
+      <p:sp>
+        <p:nvSpPr>
+          <p:cNvPr id="10" name="Rounded Rectangle 9"/>
           <p:cNvSpPr/>
           <p:nvPr/>
         </p:nvSpPr>
         <p:spPr>
           <a:xfrm>
-            <a:off x="0" y="0"/>
-            <a:ext cx="12191695" cy="6858000"/>
-          </a:xfrm>
-          <a:prstGeom prst="rect">
-            <a:avLst/>
-          </a:prstGeom>
-          <a:solidFill>
-            <a:srgbClr val="EEF1F5"/>
-          </a:solidFill>
-          <a:ln>
-            <a:noFill/>
-          </a:ln>
-          <a:effectLst/>
-        </p:spPr>
-        <p:style>
-          <a:lnRef idx="1">
-            <a:schemeClr val="accent1"/>
-          </a:lnRef>
-          <a:fillRef idx="3">
-            <a:schemeClr val="accent1"/>
-          </a:fillRef>
-          <a:effectRef idx="2">
-            <a:schemeClr val="accent1"/>
-          </a:effectRef>
-          <a:fontRef idx="minor">
-            <a:schemeClr val="lt1"/>
-          </a:fontRef>
-        </p:style>
-        <p:txBody>
-          <a:bodyPr rtlCol="0" anchor="ctr"/>
-          <a:lstStyle/>
-          <a:p>
-            <a:pPr algn="ctr"/>
-          </a:p>
-        </p:txBody>
-      </p:sp>
-      <p:sp>
-        <p:nvSpPr>
-          <p:cNvPr id="3" name="Rectangle 2"/>
-          <p:cNvSpPr/>
-          <p:nvPr/>
-        </p:nvSpPr>
-        <p:spPr>
-          <a:xfrm>
-            <a:off x="0" y="0"/>
-            <a:ext cx="256032" cy="6858000"/>
-          </a:xfrm>
-          <a:prstGeom prst="rect">
-            <a:avLst/>
-          </a:prstGeom>
-          <a:solidFill>
-            <a:srgbClr val="15803D"/>
-          </a:solidFill>
-          <a:ln>
-            <a:noFill/>
-          </a:ln>
-          <a:effectLst/>
-        </p:spPr>
-        <p:style>
-          <a:lnRef idx="1">
-            <a:schemeClr val="accent1"/>
-          </a:lnRef>
-          <a:fillRef idx="3">
-            <a:schemeClr val="accent1"/>
-          </a:fillRef>
-          <a:effectRef idx="2">
-            <a:schemeClr val="accent1"/>
-          </a:effectRef>
-          <a:fontRef idx="minor">
-            <a:schemeClr val="lt1"/>
-          </a:fontRef>
-        </p:style>
-        <p:txBody>
-          <a:bodyPr rtlCol="0" anchor="ctr"/>
-          <a:lstStyle/>
-          <a:p>
-            <a:pPr algn="ctr"/>
-          </a:p>
-        </p:txBody>
-      </p:sp>
-      <p:sp>
-        <p:nvSpPr>
-          <p:cNvPr id="4" name="TextBox 3"/>
-          <p:cNvSpPr txBox="1"/>
-          <p:nvPr/>
-        </p:nvSpPr>
-        <p:spPr>
-          <a:xfrm>
-            <a:off x="640080" y="457200"/>
-            <a:ext cx="10881360" cy="365760"/>
-          </a:xfrm>
-          <a:prstGeom prst="rect">
-            <a:avLst/>
-          </a:prstGeom>
-          <a:noFill/>
-        </p:spPr>
-        <p:txBody>
-          <a:bodyPr wrap="square" anchor="t" lIns="25400" rIns="25400" tIns="25400" bIns="25400">
-            <a:spAutoFit/>
-          </a:bodyPr>
-          <a:lstStyle/>
-          <a:p>
-            <a:pPr algn="l">
-              <a:lnSpc>
-                <a:spcPct val="105000"/>
-              </a:lnSpc>
-              <a:spcBef>
-                <a:spcPts val="0"/>
-              </a:spcBef>
-              <a:spcAft>
-                <a:spcPts val="600"/>
-              </a:spcAft>
-            </a:pPr>
-            <a:r>
-              <a:rPr sz="1300" b="1">
-                <a:solidFill>
-                  <a:srgbClr val="15803D"/>
-                </a:solidFill>
-                <a:latin typeface="Segoe UI"/>
-              </a:rPr>
-              <a:t>WHY IT MATTERS</a:t>
-            </a:r>
-          </a:p>
-        </p:txBody>
-      </p:sp>
-      <p:sp>
-        <p:nvSpPr>
-          <p:cNvPr id="5" name="TextBox 4"/>
-          <p:cNvSpPr txBox="1"/>
-          <p:nvPr/>
-        </p:nvSpPr>
-        <p:spPr>
-          <a:xfrm>
-            <a:off x="640080" y="786384"/>
-            <a:ext cx="10881360" cy="822960"/>
-          </a:xfrm>
-          <a:prstGeom prst="rect">
-            <a:avLst/>
-          </a:prstGeom>
-          <a:noFill/>
-        </p:spPr>
-        <p:txBody>
-          <a:bodyPr wrap="square" anchor="t" lIns="25400" rIns="25400" tIns="25400" bIns="25400">
-            <a:spAutoFit/>
-          </a:bodyPr>
-          <a:lstStyle/>
-          <a:p>
-            <a:pPr algn="l">
-              <a:lnSpc>
-                <a:spcPct val="105000"/>
-              </a:lnSpc>
-              <a:spcBef>
-                <a:spcPts val="0"/>
-              </a:spcBef>
-              <a:spcAft>
-                <a:spcPts val="600"/>
-              </a:spcAft>
-            </a:pPr>
-            <a:r>
-              <a:rPr sz="3200" b="1">
-                <a:solidFill>
-                  <a:srgbClr val="0F172A"/>
-                </a:solidFill>
-                <a:latin typeface="Segoe UI Semibold"/>
-              </a:rPr>
-              <a:t>The impact</a:t>
-            </a:r>
-          </a:p>
-        </p:txBody>
-      </p:sp>
-      <p:sp>
-        <p:nvSpPr>
-          <p:cNvPr id="6" name="Rectangle 5"/>
-          <p:cNvSpPr/>
-          <p:nvPr/>
-        </p:nvSpPr>
-        <p:spPr>
-          <a:xfrm>
-            <a:off x="658368" y="1536192"/>
-            <a:ext cx="1005840" cy="44450"/>
-          </a:xfrm>
-          <a:prstGeom prst="rect">
-            <a:avLst/>
-          </a:prstGeom>
-          <a:solidFill>
-            <a:srgbClr val="15803D"/>
-          </a:solidFill>
-          <a:ln>
-            <a:noFill/>
-          </a:ln>
-          <a:effectLst/>
-        </p:spPr>
-        <p:style>
-          <a:lnRef idx="1">
-            <a:schemeClr val="accent1"/>
-          </a:lnRef>
-          <a:fillRef idx="3">
-            <a:schemeClr val="accent1"/>
-          </a:fillRef>
-          <a:effectRef idx="2">
-            <a:schemeClr val="accent1"/>
-          </a:effectRef>
-          <a:fontRef idx="minor">
-            <a:schemeClr val="lt1"/>
-          </a:fontRef>
-        </p:style>
-        <p:txBody>
-          <a:bodyPr rtlCol="0" anchor="ctr"/>
-          <a:lstStyle/>
-          <a:p>
-            <a:pPr algn="ctr"/>
-          </a:p>
-        </p:txBody>
-      </p:sp>
-      <p:sp>
-        <p:nvSpPr>
-          <p:cNvPr id="7" name="Rounded Rectangle 6"/>
-          <p:cNvSpPr/>
-          <p:nvPr/>
-        </p:nvSpPr>
-        <p:spPr>
-          <a:xfrm>
-            <a:off x="658368" y="1965959"/>
+            <a:off x="4361688" y="1965959"/>
             <a:ext cx="3520440" cy="1828800"/>
           </a:xfrm>
           <a:prstGeom prst="roundRect">
@@ -5997,18 +6315,19 @@
           <a:lstStyle/>
           <a:p>
             <a:pPr algn="ctr"/>
-          </a:p>
-        </p:txBody>
-      </p:sp>
-      <p:sp>
-        <p:nvSpPr>
-          <p:cNvPr id="8" name="TextBox 7"/>
+            <a:endParaRPr/>
+          </a:p>
+        </p:txBody>
+      </p:sp>
+      <p:sp>
+        <p:nvSpPr>
+          <p:cNvPr id="11" name="TextBox 10"/>
           <p:cNvSpPr txBox="1"/>
           <p:nvPr/>
         </p:nvSpPr>
         <p:spPr>
           <a:xfrm>
-            <a:off x="658368" y="2285999"/>
+            <a:off x="4361688" y="2285999"/>
             <a:ext cx="3520440" cy="731520"/>
           </a:xfrm>
           <a:prstGeom prst="rect">
@@ -6017,7 +6336,7 @@
           <a:noFill/>
         </p:spPr>
         <p:txBody>
-          <a:bodyPr wrap="square" anchor="t" lIns="25400" rIns="25400" tIns="25400" bIns="25400">
+          <a:bodyPr wrap="square" lIns="25400" tIns="25400" rIns="25400" bIns="25400" anchor="t">
             <a:spAutoFit/>
           </a:bodyPr>
           <a:lstStyle/>
@@ -6036,24 +6355,24 @@
             <a:r>
               <a:rPr sz="4000" b="1">
                 <a:solidFill>
-                  <a:srgbClr val="15803D"/>
+                  <a:srgbClr val="4F46E5"/>
                 </a:solidFill>
                 <a:latin typeface="Segoe UI Semibold"/>
               </a:rPr>
-              <a:t>~1–1.5 h</a:t>
-            </a:r>
-          </a:p>
-        </p:txBody>
-      </p:sp>
-      <p:sp>
-        <p:nvSpPr>
-          <p:cNvPr id="9" name="TextBox 8"/>
+              <a:t>0 min</a:t>
+            </a:r>
+          </a:p>
+        </p:txBody>
+      </p:sp>
+      <p:sp>
+        <p:nvSpPr>
+          <p:cNvPr id="12" name="TextBox 11"/>
           <p:cNvSpPr txBox="1"/>
           <p:nvPr/>
         </p:nvSpPr>
         <p:spPr>
           <a:xfrm>
-            <a:off x="932688" y="3108959"/>
+            <a:off x="4636008" y="3108959"/>
             <a:ext cx="2971800" cy="640080"/>
           </a:xfrm>
           <a:prstGeom prst="rect">
@@ -6062,7 +6381,7 @@
           <a:noFill/>
         </p:spPr>
         <p:txBody>
-          <a:bodyPr wrap="square" anchor="t" lIns="25400" rIns="25400" tIns="25400" bIns="25400">
+          <a:bodyPr wrap="square" lIns="25400" tIns="25400" rIns="25400" bIns="25400" anchor="t">
             <a:spAutoFit/>
           </a:bodyPr>
           <a:lstStyle/>
@@ -6085,20 +6404,20 @@
                 </a:solidFill>
                 <a:latin typeface="Segoe UI"/>
               </a:rPr>
-              <a:t>recovered per developer, every week</a:t>
-            </a:r>
-          </a:p>
-        </p:txBody>
-      </p:sp>
-      <p:sp>
-        <p:nvSpPr>
-          <p:cNvPr id="10" name="Rounded Rectangle 9"/>
+              <a:t>spent staring at a blank status box</a:t>
+            </a:r>
+          </a:p>
+        </p:txBody>
+      </p:sp>
+      <p:sp>
+        <p:nvSpPr>
+          <p:cNvPr id="13" name="Rounded Rectangle 12"/>
           <p:cNvSpPr/>
           <p:nvPr/>
         </p:nvSpPr>
         <p:spPr>
           <a:xfrm>
-            <a:off x="4361688" y="1965959"/>
+            <a:off x="8065008" y="1965959"/>
             <a:ext cx="3520440" cy="1828800"/>
           </a:xfrm>
           <a:prstGeom prst="roundRect">
@@ -6133,18 +6452,19 @@
           <a:lstStyle/>
           <a:p>
             <a:pPr algn="ctr"/>
-          </a:p>
-        </p:txBody>
-      </p:sp>
-      <p:sp>
-        <p:nvSpPr>
-          <p:cNvPr id="11" name="TextBox 10"/>
+            <a:endParaRPr/>
+          </a:p>
+        </p:txBody>
+      </p:sp>
+      <p:sp>
+        <p:nvSpPr>
+          <p:cNvPr id="14" name="TextBox 13"/>
           <p:cNvSpPr txBox="1"/>
           <p:nvPr/>
         </p:nvSpPr>
         <p:spPr>
           <a:xfrm>
-            <a:off x="4361688" y="2285999"/>
+            <a:off x="8065008" y="2285999"/>
             <a:ext cx="3520440" cy="731520"/>
           </a:xfrm>
           <a:prstGeom prst="rect">
@@ -6153,7 +6473,7 @@
           <a:noFill/>
         </p:spPr>
         <p:txBody>
-          <a:bodyPr wrap="square" anchor="t" lIns="25400" rIns="25400" tIns="25400" bIns="25400">
+          <a:bodyPr wrap="square" lIns="25400" tIns="25400" rIns="25400" bIns="25400" anchor="t">
             <a:spAutoFit/>
           </a:bodyPr>
           <a:lstStyle/>
@@ -6172,24 +6492,24 @@
             <a:r>
               <a:rPr sz="4000" b="1">
                 <a:solidFill>
-                  <a:srgbClr val="4F46E5"/>
+                  <a:srgbClr val="2563EB"/>
                 </a:solidFill>
                 <a:latin typeface="Segoe UI Semibold"/>
               </a:rPr>
-              <a:t>0 min</a:t>
-            </a:r>
-          </a:p>
-        </p:txBody>
-      </p:sp>
-      <p:sp>
-        <p:nvSpPr>
-          <p:cNvPr id="12" name="TextBox 11"/>
+              <a:t>100%</a:t>
+            </a:r>
+          </a:p>
+        </p:txBody>
+      </p:sp>
+      <p:sp>
+        <p:nvSpPr>
+          <p:cNvPr id="15" name="TextBox 14"/>
           <p:cNvSpPr txBox="1"/>
           <p:nvPr/>
         </p:nvSpPr>
         <p:spPr>
           <a:xfrm>
-            <a:off x="4636008" y="3108959"/>
+            <a:off x="8339328" y="3108959"/>
             <a:ext cx="2971800" cy="640080"/>
           </a:xfrm>
           <a:prstGeom prst="rect">
@@ -6198,7 +6518,7 @@
           <a:noFill/>
         </p:spPr>
         <p:txBody>
-          <a:bodyPr wrap="square" anchor="t" lIns="25400" rIns="25400" tIns="25400" bIns="25400">
+          <a:bodyPr wrap="square" lIns="25400" tIns="25400" rIns="25400" bIns="25400" anchor="t">
             <a:spAutoFit/>
           </a:bodyPr>
           <a:lstStyle/>
@@ -6221,21 +6541,1046 @@
                 </a:solidFill>
                 <a:latin typeface="Segoe UI"/>
               </a:rPr>
-              <a:t>spent staring at a blank status box</a:t>
-            </a:r>
-          </a:p>
-        </p:txBody>
-      </p:sp>
-      <p:sp>
-        <p:nvSpPr>
-          <p:cNvPr id="13" name="Rounded Rectangle 12"/>
+              <a:t>of entries backed by real commits</a:t>
+            </a:r>
+          </a:p>
+        </p:txBody>
+      </p:sp>
+      <p:sp>
+        <p:nvSpPr>
+          <p:cNvPr id="16" name="TextBox 15"/>
+          <p:cNvSpPr txBox="1"/>
+          <p:nvPr/>
+        </p:nvSpPr>
+        <p:spPr>
+          <a:xfrm>
+            <a:off x="658368" y="4114799"/>
+            <a:ext cx="10881360" cy="2286001"/>
+          </a:xfrm>
+          <a:prstGeom prst="rect">
+            <a:avLst/>
+          </a:prstGeom>
+          <a:noFill/>
+        </p:spPr>
+        <p:txBody>
+          <a:bodyPr wrap="square">
+            <a:spAutoFit/>
+          </a:bodyPr>
+          <a:lstStyle/>
+          <a:p>
+            <a:pPr>
+              <a:lnSpc>
+                <a:spcPct val="108000"/>
+              </a:lnSpc>
+              <a:spcAft>
+                <a:spcPts val="1100"/>
+              </a:spcAft>
+            </a:pPr>
+            <a:r>
+              <a:rPr sz="1100">
+                <a:solidFill>
+                  <a:srgbClr val="15803D"/>
+                </a:solidFill>
+                <a:latin typeface="Segoe UI"/>
+              </a:rPr>
+              <a:t>●  </a:t>
+            </a:r>
+            <a:r>
+              <a:rPr sz="1700" b="1">
+                <a:solidFill>
+                  <a:srgbClr val="475569"/>
+                </a:solidFill>
+                <a:latin typeface="Segoe UI"/>
+              </a:rPr>
+              <a:t>More accurate &amp; consistent reporting</a:t>
+            </a:r>
+            <a:r>
+              <a:rPr sz="1700">
+                <a:solidFill>
+                  <a:srgbClr val="64748B"/>
+                </a:solidFill>
+                <a:latin typeface="Segoe UI"/>
+              </a:rPr>
+              <a:t>  —  for the whole team</a:t>
+            </a:r>
+          </a:p>
+          <a:p>
+            <a:pPr>
+              <a:lnSpc>
+                <a:spcPct val="108000"/>
+              </a:lnSpc>
+              <a:spcAft>
+                <a:spcPts val="1100"/>
+              </a:spcAft>
+            </a:pPr>
+            <a:r>
+              <a:rPr sz="1100">
+                <a:solidFill>
+                  <a:srgbClr val="15803D"/>
+                </a:solidFill>
+                <a:latin typeface="Segoe UI"/>
+              </a:rPr>
+              <a:t>●  </a:t>
+            </a:r>
+            <a:r>
+              <a:rPr sz="1700" b="1">
+                <a:solidFill>
+                  <a:srgbClr val="475569"/>
+                </a:solidFill>
+                <a:latin typeface="Segoe UI"/>
+              </a:rPr>
+              <a:t>Better data for managers</a:t>
+            </a:r>
+            <a:r>
+              <a:rPr sz="1700">
+                <a:solidFill>
+                  <a:srgbClr val="64748B"/>
+                </a:solidFill>
+                <a:latin typeface="Segoe UI"/>
+              </a:rPr>
+              <a:t>  —  cleaner project tracking and effort visibility</a:t>
+            </a:r>
+          </a:p>
+          <a:p>
+            <a:pPr>
+              <a:lnSpc>
+                <a:spcPct val="108000"/>
+              </a:lnSpc>
+              <a:spcAft>
+                <a:spcPts val="1100"/>
+              </a:spcAft>
+            </a:pPr>
+            <a:r>
+              <a:rPr sz="1100">
+                <a:solidFill>
+                  <a:srgbClr val="15803D"/>
+                </a:solidFill>
+                <a:latin typeface="Segoe UI"/>
+              </a:rPr>
+              <a:t>●  </a:t>
+            </a:r>
+            <a:r>
+              <a:rPr sz="1700" b="1">
+                <a:solidFill>
+                  <a:srgbClr val="475569"/>
+                </a:solidFill>
+                <a:latin typeface="Segoe UI"/>
+              </a:rPr>
+              <a:t>Removes the most disliked chore</a:t>
+            </a:r>
+            <a:r>
+              <a:rPr sz="1700">
+                <a:solidFill>
+                  <a:srgbClr val="64748B"/>
+                </a:solidFill>
+                <a:latin typeface="Segoe UI"/>
+              </a:rPr>
+              <a:t>  —  so developers focus on real engineering</a:t>
+            </a:r>
+          </a:p>
+        </p:txBody>
+      </p:sp>
+      <p:pic>
+        <p:nvPicPr>
+          <p:cNvPr id="17" name="Picture 16" descr="logo_b94f5789.png"/>
+          <p:cNvPicPr>
+            <a:picLocks noChangeAspect="1"/>
+          </p:cNvPicPr>
+          <p:nvPr/>
+        </p:nvPicPr>
+        <p:blipFill>
+          <a:blip r:embed="rId2"/>
+          <a:stretch>
+            <a:fillRect/>
+          </a:stretch>
+        </p:blipFill>
+        <p:spPr>
+          <a:xfrm>
+            <a:off x="10408615" y="310896"/>
+            <a:ext cx="1417320" cy="516798"/>
+          </a:xfrm>
+          <a:prstGeom prst="rect">
+            <a:avLst/>
+          </a:prstGeom>
+        </p:spPr>
+      </p:pic>
+    </p:spTree>
+  </p:cSld>
+  <p:clrMapOvr>
+    <a:masterClrMapping/>
+  </p:clrMapOvr>
+</p:sld>
+</file>
+
+<file path=ppt/slides/slide13.xml><?xml version="1.0" encoding="utf-8"?>
+<p:sld xmlns:a="http://schemas.openxmlformats.org/drawingml/2006/main" xmlns:r="http://schemas.openxmlformats.org/officeDocument/2006/relationships" xmlns:p="http://schemas.openxmlformats.org/presentationml/2006/main">
+  <p:cSld>
+    <p:spTree>
+      <p:nvGrpSpPr>
+        <p:cNvPr id="1" name=""/>
+        <p:cNvGrpSpPr/>
+        <p:nvPr/>
+      </p:nvGrpSpPr>
+      <p:grpSpPr>
+        <a:xfrm>
+          <a:off x="0" y="0"/>
+          <a:ext cx="0" cy="0"/>
+          <a:chOff x="0" y="0"/>
+          <a:chExt cx="0" cy="0"/>
+        </a:xfrm>
+      </p:grpSpPr>
+      <p:sp>
+        <p:nvSpPr>
+          <p:cNvPr id="2" name="Rectangle 1"/>
           <p:cNvSpPr/>
           <p:nvPr/>
         </p:nvSpPr>
         <p:spPr>
           <a:xfrm>
-            <a:off x="8065008" y="1965959"/>
-            <a:ext cx="3520440" cy="1828800"/>
+            <a:off x="0" y="0"/>
+            <a:ext cx="12191695" cy="6858000"/>
+          </a:xfrm>
+          <a:prstGeom prst="rect">
+            <a:avLst/>
+          </a:prstGeom>
+          <a:solidFill>
+            <a:srgbClr val="EEF1F5"/>
+          </a:solidFill>
+          <a:ln>
+            <a:noFill/>
+          </a:ln>
+          <a:effectLst/>
+        </p:spPr>
+        <p:style>
+          <a:lnRef idx="1">
+            <a:schemeClr val="accent1"/>
+          </a:lnRef>
+          <a:fillRef idx="3">
+            <a:schemeClr val="accent1"/>
+          </a:fillRef>
+          <a:effectRef idx="2">
+            <a:schemeClr val="accent1"/>
+          </a:effectRef>
+          <a:fontRef idx="minor">
+            <a:schemeClr val="lt1"/>
+          </a:fontRef>
+        </p:style>
+        <p:txBody>
+          <a:bodyPr rtlCol="0" anchor="ctr"/>
+          <a:lstStyle/>
+          <a:p>
+            <a:pPr algn="ctr"/>
+            <a:endParaRPr/>
+          </a:p>
+        </p:txBody>
+      </p:sp>
+      <p:sp>
+        <p:nvSpPr>
+          <p:cNvPr id="3" name="Rectangle 2"/>
+          <p:cNvSpPr/>
+          <p:nvPr/>
+        </p:nvSpPr>
+        <p:spPr>
+          <a:xfrm>
+            <a:off x="0" y="0"/>
+            <a:ext cx="256032" cy="6858000"/>
+          </a:xfrm>
+          <a:prstGeom prst="rect">
+            <a:avLst/>
+          </a:prstGeom>
+          <a:solidFill>
+            <a:srgbClr val="4F46E5"/>
+          </a:solidFill>
+          <a:ln>
+            <a:noFill/>
+          </a:ln>
+          <a:effectLst/>
+        </p:spPr>
+        <p:style>
+          <a:lnRef idx="1">
+            <a:schemeClr val="accent1"/>
+          </a:lnRef>
+          <a:fillRef idx="3">
+            <a:schemeClr val="accent1"/>
+          </a:fillRef>
+          <a:effectRef idx="2">
+            <a:schemeClr val="accent1"/>
+          </a:effectRef>
+          <a:fontRef idx="minor">
+            <a:schemeClr val="lt1"/>
+          </a:fontRef>
+        </p:style>
+        <p:txBody>
+          <a:bodyPr rtlCol="0" anchor="ctr"/>
+          <a:lstStyle/>
+          <a:p>
+            <a:pPr algn="ctr"/>
+            <a:endParaRPr/>
+          </a:p>
+        </p:txBody>
+      </p:sp>
+      <p:sp>
+        <p:nvSpPr>
+          <p:cNvPr id="4" name="TextBox 3"/>
+          <p:cNvSpPr txBox="1"/>
+          <p:nvPr/>
+        </p:nvSpPr>
+        <p:spPr>
+          <a:xfrm>
+            <a:off x="640080" y="457200"/>
+            <a:ext cx="10881360" cy="365760"/>
+          </a:xfrm>
+          <a:prstGeom prst="rect">
+            <a:avLst/>
+          </a:prstGeom>
+          <a:noFill/>
+        </p:spPr>
+        <p:txBody>
+          <a:bodyPr wrap="square" lIns="25400" tIns="25400" rIns="25400" bIns="25400" anchor="t">
+            <a:spAutoFit/>
+          </a:bodyPr>
+          <a:lstStyle/>
+          <a:p>
+            <a:pPr algn="l">
+              <a:lnSpc>
+                <a:spcPct val="105000"/>
+              </a:lnSpc>
+              <a:spcBef>
+                <a:spcPts val="0"/>
+              </a:spcBef>
+              <a:spcAft>
+                <a:spcPts val="600"/>
+              </a:spcAft>
+            </a:pPr>
+            <a:r>
+              <a:rPr sz="1300" b="1">
+                <a:solidFill>
+                  <a:srgbClr val="4F46E5"/>
+                </a:solidFill>
+                <a:latin typeface="Segoe UI"/>
+              </a:rPr>
+              <a:t>WHAT'S NEXT</a:t>
+            </a:r>
+          </a:p>
+        </p:txBody>
+      </p:sp>
+      <p:sp>
+        <p:nvSpPr>
+          <p:cNvPr id="5" name="TextBox 4"/>
+          <p:cNvSpPr txBox="1"/>
+          <p:nvPr/>
+        </p:nvSpPr>
+        <p:spPr>
+          <a:xfrm>
+            <a:off x="640080" y="786384"/>
+            <a:ext cx="10881360" cy="822960"/>
+          </a:xfrm>
+          <a:prstGeom prst="rect">
+            <a:avLst/>
+          </a:prstGeom>
+          <a:noFill/>
+        </p:spPr>
+        <p:txBody>
+          <a:bodyPr wrap="square" lIns="25400" tIns="25400" rIns="25400" bIns="25400" anchor="t">
+            <a:spAutoFit/>
+          </a:bodyPr>
+          <a:lstStyle/>
+          <a:p>
+            <a:pPr algn="l">
+              <a:lnSpc>
+                <a:spcPct val="105000"/>
+              </a:lnSpc>
+              <a:spcBef>
+                <a:spcPts val="0"/>
+              </a:spcBef>
+              <a:spcAft>
+                <a:spcPts val="600"/>
+              </a:spcAft>
+            </a:pPr>
+            <a:r>
+              <a:rPr sz="3200" b="1">
+                <a:solidFill>
+                  <a:srgbClr val="0F172A"/>
+                </a:solidFill>
+                <a:latin typeface="Segoe UI Semibold"/>
+              </a:rPr>
+              <a:t>Roadmap</a:t>
+            </a:r>
+          </a:p>
+        </p:txBody>
+      </p:sp>
+      <p:sp>
+        <p:nvSpPr>
+          <p:cNvPr id="6" name="Rectangle 5"/>
+          <p:cNvSpPr/>
+          <p:nvPr/>
+        </p:nvSpPr>
+        <p:spPr>
+          <a:xfrm>
+            <a:off x="658368" y="1536192"/>
+            <a:ext cx="1005840" cy="44450"/>
+          </a:xfrm>
+          <a:prstGeom prst="rect">
+            <a:avLst/>
+          </a:prstGeom>
+          <a:solidFill>
+            <a:srgbClr val="4F46E5"/>
+          </a:solidFill>
+          <a:ln>
+            <a:noFill/>
+          </a:ln>
+          <a:effectLst/>
+        </p:spPr>
+        <p:style>
+          <a:lnRef idx="1">
+            <a:schemeClr val="accent1"/>
+          </a:lnRef>
+          <a:fillRef idx="3">
+            <a:schemeClr val="accent1"/>
+          </a:fillRef>
+          <a:effectRef idx="2">
+            <a:schemeClr val="accent1"/>
+          </a:effectRef>
+          <a:fontRef idx="minor">
+            <a:schemeClr val="lt1"/>
+          </a:fontRef>
+        </p:style>
+        <p:txBody>
+          <a:bodyPr rtlCol="0" anchor="ctr"/>
+          <a:lstStyle/>
+          <a:p>
+            <a:pPr algn="ctr"/>
+            <a:endParaRPr/>
+          </a:p>
+        </p:txBody>
+      </p:sp>
+      <p:sp>
+        <p:nvSpPr>
+          <p:cNvPr id="7" name="TextBox 6"/>
+          <p:cNvSpPr txBox="1"/>
+          <p:nvPr/>
+        </p:nvSpPr>
+        <p:spPr>
+          <a:xfrm>
+            <a:off x="658368" y="1874519"/>
+            <a:ext cx="10789920" cy="4526281"/>
+          </a:xfrm>
+          <a:prstGeom prst="rect">
+            <a:avLst/>
+          </a:prstGeom>
+          <a:noFill/>
+        </p:spPr>
+        <p:txBody>
+          <a:bodyPr wrap="square">
+            <a:spAutoFit/>
+          </a:bodyPr>
+          <a:lstStyle/>
+          <a:p>
+            <a:pPr>
+              <a:lnSpc>
+                <a:spcPct val="108000"/>
+              </a:lnSpc>
+              <a:spcAft>
+                <a:spcPts val="1500"/>
+              </a:spcAft>
+            </a:pPr>
+            <a:r>
+              <a:rPr sz="1200">
+                <a:solidFill>
+                  <a:srgbClr val="4F46E5"/>
+                </a:solidFill>
+                <a:latin typeface="Segoe UI"/>
+              </a:rPr>
+              <a:t>●  </a:t>
+            </a:r>
+            <a:r>
+              <a:rPr sz="1800" b="1">
+                <a:solidFill>
+                  <a:srgbClr val="475569"/>
+                </a:solidFill>
+                <a:latin typeface="Segoe UI"/>
+              </a:rPr>
+              <a:t>Pull PRs, branches &amp; ticket references</a:t>
+            </a:r>
+            <a:r>
+              <a:rPr sz="1800">
+                <a:solidFill>
+                  <a:srgbClr val="64748B"/>
+                </a:solidFill>
+                <a:latin typeface="Segoe UI"/>
+              </a:rPr>
+              <a:t>  —  map work to Jira / Azure DevOps tickets</a:t>
+            </a:r>
+          </a:p>
+          <a:p>
+            <a:pPr>
+              <a:lnSpc>
+                <a:spcPct val="108000"/>
+              </a:lnSpc>
+              <a:spcAft>
+                <a:spcPts val="1500"/>
+              </a:spcAft>
+            </a:pPr>
+            <a:r>
+              <a:rPr sz="1200">
+                <a:solidFill>
+                  <a:srgbClr val="4F46E5"/>
+                </a:solidFill>
+                <a:latin typeface="Segoe UI"/>
+              </a:rPr>
+              <a:t>●  </a:t>
+            </a:r>
+            <a:r>
+              <a:rPr sz="1800" b="1">
+                <a:solidFill>
+                  <a:srgbClr val="475569"/>
+                </a:solidFill>
+                <a:latin typeface="Segoe UI"/>
+              </a:rPr>
+              <a:t>Auto-post standups to Slack / Teams</a:t>
+            </a:r>
+            <a:r>
+              <a:rPr sz="1800">
+                <a:solidFill>
+                  <a:srgbClr val="64748B"/>
+                </a:solidFill>
+                <a:latin typeface="Segoe UI"/>
+              </a:rPr>
+              <a:t>  —  zero copy-paste</a:t>
+            </a:r>
+          </a:p>
+          <a:p>
+            <a:pPr>
+              <a:lnSpc>
+                <a:spcPct val="108000"/>
+              </a:lnSpc>
+              <a:spcAft>
+                <a:spcPts val="1500"/>
+              </a:spcAft>
+            </a:pPr>
+            <a:r>
+              <a:rPr sz="1200">
+                <a:solidFill>
+                  <a:srgbClr val="4F46E5"/>
+                </a:solidFill>
+                <a:latin typeface="Segoe UI"/>
+              </a:rPr>
+              <a:t>●  </a:t>
+            </a:r>
+            <a:r>
+              <a:rPr sz="1800" b="1">
+                <a:solidFill>
+                  <a:srgbClr val="475569"/>
+                </a:solidFill>
+                <a:latin typeface="Segoe UI"/>
+              </a:rPr>
+              <a:t>More export formats</a:t>
+            </a:r>
+            <a:r>
+              <a:rPr sz="1800">
+                <a:solidFill>
+                  <a:srgbClr val="64748B"/>
+                </a:solidFill>
+                <a:latin typeface="Segoe UI"/>
+              </a:rPr>
+              <a:t>  —  Markdown status, CSV, PDF timesheets</a:t>
+            </a:r>
+          </a:p>
+          <a:p>
+            <a:pPr>
+              <a:lnSpc>
+                <a:spcPct val="108000"/>
+              </a:lnSpc>
+              <a:spcAft>
+                <a:spcPts val="1500"/>
+              </a:spcAft>
+            </a:pPr>
+            <a:r>
+              <a:rPr sz="1200">
+                <a:solidFill>
+                  <a:srgbClr val="4F46E5"/>
+                </a:solidFill>
+                <a:latin typeface="Segoe UI"/>
+              </a:rPr>
+              <a:t>●  </a:t>
+            </a:r>
+            <a:r>
+              <a:rPr sz="1800" b="1">
+                <a:solidFill>
+                  <a:srgbClr val="475569"/>
+                </a:solidFill>
+                <a:latin typeface="Segoe UI"/>
+              </a:rPr>
+              <a:t>Scheduled generation</a:t>
+            </a:r>
+            <a:r>
+              <a:rPr sz="1800">
+                <a:solidFill>
+                  <a:srgbClr val="64748B"/>
+                </a:solidFill>
+                <a:latin typeface="Segoe UI"/>
+              </a:rPr>
+              <a:t>  —  a daily/weekly draft waiting in your inbox</a:t>
+            </a:r>
+          </a:p>
+          <a:p>
+            <a:pPr>
+              <a:lnSpc>
+                <a:spcPct val="108000"/>
+              </a:lnSpc>
+              <a:spcAft>
+                <a:spcPts val="1500"/>
+              </a:spcAft>
+            </a:pPr>
+            <a:r>
+              <a:rPr sz="1200">
+                <a:solidFill>
+                  <a:srgbClr val="4F46E5"/>
+                </a:solidFill>
+                <a:latin typeface="Segoe UI"/>
+              </a:rPr>
+              <a:t>●  </a:t>
+            </a:r>
+            <a:r>
+              <a:rPr sz="1800" b="1">
+                <a:solidFill>
+                  <a:srgbClr val="475569"/>
+                </a:solidFill>
+                <a:latin typeface="Segoe UI"/>
+              </a:rPr>
+              <a:t>Team dashboards</a:t>
+            </a:r>
+            <a:r>
+              <a:rPr sz="1800">
+                <a:solidFill>
+                  <a:srgbClr val="64748B"/>
+                </a:solidFill>
+                <a:latin typeface="Segoe UI"/>
+              </a:rPr>
+              <a:t>  —  roll-ups across everyone, not just one developer</a:t>
+            </a:r>
+          </a:p>
+        </p:txBody>
+      </p:sp>
+      <p:pic>
+        <p:nvPicPr>
+          <p:cNvPr id="8" name="Picture 7" descr="logo_b94f5789.png"/>
+          <p:cNvPicPr>
+            <a:picLocks noChangeAspect="1"/>
+          </p:cNvPicPr>
+          <p:nvPr/>
+        </p:nvPicPr>
+        <p:blipFill>
+          <a:blip r:embed="rId2"/>
+          <a:stretch>
+            <a:fillRect/>
+          </a:stretch>
+        </p:blipFill>
+        <p:spPr>
+          <a:xfrm>
+            <a:off x="10408615" y="310896"/>
+            <a:ext cx="1417320" cy="516798"/>
+          </a:xfrm>
+          <a:prstGeom prst="rect">
+            <a:avLst/>
+          </a:prstGeom>
+        </p:spPr>
+      </p:pic>
+    </p:spTree>
+  </p:cSld>
+  <p:clrMapOvr>
+    <a:masterClrMapping/>
+  </p:clrMapOvr>
+</p:sld>
+</file>
+
+<file path=ppt/slides/slide14.xml><?xml version="1.0" encoding="utf-8"?>
+<p:sld xmlns:a="http://schemas.openxmlformats.org/drawingml/2006/main" xmlns:r="http://schemas.openxmlformats.org/officeDocument/2006/relationships" xmlns:p="http://schemas.openxmlformats.org/presentationml/2006/main">
+  <p:cSld>
+    <p:spTree>
+      <p:nvGrpSpPr>
+        <p:cNvPr id="1" name=""/>
+        <p:cNvGrpSpPr/>
+        <p:nvPr/>
+      </p:nvGrpSpPr>
+      <p:grpSpPr>
+        <a:xfrm>
+          <a:off x="0" y="0"/>
+          <a:ext cx="0" cy="0"/>
+          <a:chOff x="0" y="0"/>
+          <a:chExt cx="0" cy="0"/>
+        </a:xfrm>
+      </p:grpSpPr>
+      <p:sp>
+        <p:nvSpPr>
+          <p:cNvPr id="2" name="Rectangle 1"/>
+          <p:cNvSpPr/>
+          <p:nvPr/>
+        </p:nvSpPr>
+        <p:spPr>
+          <a:xfrm>
+            <a:off x="0" y="0"/>
+            <a:ext cx="12191695" cy="6858000"/>
+          </a:xfrm>
+          <a:prstGeom prst="rect">
+            <a:avLst/>
+          </a:prstGeom>
+          <a:solidFill>
+            <a:srgbClr val="EEF1F5"/>
+          </a:solidFill>
+          <a:ln>
+            <a:noFill/>
+          </a:ln>
+          <a:effectLst/>
+        </p:spPr>
+        <p:style>
+          <a:lnRef idx="1">
+            <a:schemeClr val="accent1"/>
+          </a:lnRef>
+          <a:fillRef idx="3">
+            <a:schemeClr val="accent1"/>
+          </a:fillRef>
+          <a:effectRef idx="2">
+            <a:schemeClr val="accent1"/>
+          </a:effectRef>
+          <a:fontRef idx="minor">
+            <a:schemeClr val="lt1"/>
+          </a:fontRef>
+        </p:style>
+        <p:txBody>
+          <a:bodyPr rtlCol="0" anchor="ctr"/>
+          <a:lstStyle/>
+          <a:p>
+            <a:pPr algn="ctr"/>
+            <a:endParaRPr/>
+          </a:p>
+        </p:txBody>
+      </p:sp>
+      <p:sp>
+        <p:nvSpPr>
+          <p:cNvPr id="3" name="Rectangle 2"/>
+          <p:cNvSpPr/>
+          <p:nvPr/>
+        </p:nvSpPr>
+        <p:spPr>
+          <a:xfrm>
+            <a:off x="0" y="0"/>
+            <a:ext cx="256032" cy="6858000"/>
+          </a:xfrm>
+          <a:prstGeom prst="rect">
+            <a:avLst/>
+          </a:prstGeom>
+          <a:solidFill>
+            <a:srgbClr val="4F46E5"/>
+          </a:solidFill>
+          <a:ln>
+            <a:noFill/>
+          </a:ln>
+          <a:effectLst/>
+        </p:spPr>
+        <p:style>
+          <a:lnRef idx="1">
+            <a:schemeClr val="accent1"/>
+          </a:lnRef>
+          <a:fillRef idx="3">
+            <a:schemeClr val="accent1"/>
+          </a:fillRef>
+          <a:effectRef idx="2">
+            <a:schemeClr val="accent1"/>
+          </a:effectRef>
+          <a:fontRef idx="minor">
+            <a:schemeClr val="lt1"/>
+          </a:fontRef>
+        </p:style>
+        <p:txBody>
+          <a:bodyPr rtlCol="0" anchor="ctr"/>
+          <a:lstStyle/>
+          <a:p>
+            <a:pPr algn="ctr"/>
+            <a:endParaRPr/>
+          </a:p>
+        </p:txBody>
+      </p:sp>
+      <p:sp>
+        <p:nvSpPr>
+          <p:cNvPr id="4" name="TextBox 3"/>
+          <p:cNvSpPr txBox="1"/>
+          <p:nvPr/>
+        </p:nvSpPr>
+        <p:spPr>
+          <a:xfrm>
+            <a:off x="640080" y="457200"/>
+            <a:ext cx="10881360" cy="365760"/>
+          </a:xfrm>
+          <a:prstGeom prst="rect">
+            <a:avLst/>
+          </a:prstGeom>
+          <a:noFill/>
+        </p:spPr>
+        <p:txBody>
+          <a:bodyPr wrap="square" lIns="25400" tIns="25400" rIns="25400" bIns="25400" anchor="t">
+            <a:spAutoFit/>
+          </a:bodyPr>
+          <a:lstStyle/>
+          <a:p>
+            <a:pPr algn="l">
+              <a:lnSpc>
+                <a:spcPct val="105000"/>
+              </a:lnSpc>
+              <a:spcBef>
+                <a:spcPts val="0"/>
+              </a:spcBef>
+              <a:spcAft>
+                <a:spcPts val="600"/>
+              </a:spcAft>
+            </a:pPr>
+            <a:r>
+              <a:rPr sz="1300" b="1">
+                <a:solidFill>
+                  <a:srgbClr val="4F46E5"/>
+                </a:solidFill>
+                <a:latin typeface="Segoe UI"/>
+              </a:rPr>
+              <a:t>THE VISION</a:t>
+            </a:r>
+          </a:p>
+        </p:txBody>
+      </p:sp>
+      <p:sp>
+        <p:nvSpPr>
+          <p:cNvPr id="5" name="TextBox 4"/>
+          <p:cNvSpPr txBox="1"/>
+          <p:nvPr/>
+        </p:nvSpPr>
+        <p:spPr>
+          <a:xfrm>
+            <a:off x="640080" y="786384"/>
+            <a:ext cx="10881360" cy="822960"/>
+          </a:xfrm>
+          <a:prstGeom prst="rect">
+            <a:avLst/>
+          </a:prstGeom>
+          <a:noFill/>
+        </p:spPr>
+        <p:txBody>
+          <a:bodyPr wrap="square" lIns="25400" tIns="25400" rIns="25400" bIns="25400" anchor="t">
+            <a:spAutoFit/>
+          </a:bodyPr>
+          <a:lstStyle/>
+          <a:p>
+            <a:pPr algn="l">
+              <a:lnSpc>
+                <a:spcPct val="105000"/>
+              </a:lnSpc>
+              <a:spcBef>
+                <a:spcPts val="0"/>
+              </a:spcBef>
+              <a:spcAft>
+                <a:spcPts val="600"/>
+              </a:spcAft>
+            </a:pPr>
+            <a:r>
+              <a:rPr sz="3200" b="1">
+                <a:solidFill>
+                  <a:srgbClr val="0F172A"/>
+                </a:solidFill>
+                <a:latin typeface="Segoe UI Semibold"/>
+              </a:rPr>
+              <a:t>Smarter &amp; automated: calendar-aware timesheets</a:t>
+            </a:r>
+          </a:p>
+        </p:txBody>
+      </p:sp>
+      <p:sp>
+        <p:nvSpPr>
+          <p:cNvPr id="6" name="Rectangle 5"/>
+          <p:cNvSpPr/>
+          <p:nvPr/>
+        </p:nvSpPr>
+        <p:spPr>
+          <a:xfrm>
+            <a:off x="658368" y="1536192"/>
+            <a:ext cx="1005840" cy="44450"/>
+          </a:xfrm>
+          <a:prstGeom prst="rect">
+            <a:avLst/>
+          </a:prstGeom>
+          <a:solidFill>
+            <a:srgbClr val="4F46E5"/>
+          </a:solidFill>
+          <a:ln>
+            <a:noFill/>
+          </a:ln>
+          <a:effectLst/>
+        </p:spPr>
+        <p:style>
+          <a:lnRef idx="1">
+            <a:schemeClr val="accent1"/>
+          </a:lnRef>
+          <a:fillRef idx="3">
+            <a:schemeClr val="accent1"/>
+          </a:fillRef>
+          <a:effectRef idx="2">
+            <a:schemeClr val="accent1"/>
+          </a:effectRef>
+          <a:fontRef idx="minor">
+            <a:schemeClr val="lt1"/>
+          </a:fontRef>
+        </p:style>
+        <p:txBody>
+          <a:bodyPr rtlCol="0" anchor="ctr"/>
+          <a:lstStyle/>
+          <a:p>
+            <a:pPr algn="ctr"/>
+            <a:endParaRPr/>
+          </a:p>
+        </p:txBody>
+      </p:sp>
+      <p:sp>
+        <p:nvSpPr>
+          <p:cNvPr id="7" name="Rounded Rectangle 6"/>
+          <p:cNvSpPr/>
+          <p:nvPr/>
+        </p:nvSpPr>
+        <p:spPr>
+          <a:xfrm>
+            <a:off x="658368" y="1874519"/>
+            <a:ext cx="10835640" cy="1051560"/>
+          </a:xfrm>
+          <a:prstGeom prst="roundRect">
+            <a:avLst/>
+          </a:prstGeom>
+          <a:solidFill>
+            <a:srgbClr val="4F46E5"/>
+          </a:solidFill>
+          <a:ln>
+            <a:noFill/>
+          </a:ln>
+          <a:effectLst/>
+        </p:spPr>
+        <p:style>
+          <a:lnRef idx="1">
+            <a:schemeClr val="accent1"/>
+          </a:lnRef>
+          <a:fillRef idx="3">
+            <a:schemeClr val="accent1"/>
+          </a:fillRef>
+          <a:effectRef idx="2">
+            <a:schemeClr val="accent1"/>
+          </a:effectRef>
+          <a:fontRef idx="minor">
+            <a:schemeClr val="lt1"/>
+          </a:fontRef>
+        </p:style>
+        <p:txBody>
+          <a:bodyPr rtlCol="0" anchor="ctr"/>
+          <a:lstStyle/>
+          <a:p>
+            <a:pPr algn="ctr"/>
+            <a:endParaRPr/>
+          </a:p>
+        </p:txBody>
+      </p:sp>
+      <p:sp>
+        <p:nvSpPr>
+          <p:cNvPr id="8" name="TextBox 7"/>
+          <p:cNvSpPr txBox="1"/>
+          <p:nvPr/>
+        </p:nvSpPr>
+        <p:spPr>
+          <a:xfrm>
+            <a:off x="960120" y="2039111"/>
+            <a:ext cx="10332720" cy="457200"/>
+          </a:xfrm>
+          <a:prstGeom prst="rect">
+            <a:avLst/>
+          </a:prstGeom>
+          <a:noFill/>
+        </p:spPr>
+        <p:txBody>
+          <a:bodyPr wrap="square" lIns="25400" tIns="25400" rIns="25400" bIns="25400" anchor="t">
+            <a:spAutoFit/>
+          </a:bodyPr>
+          <a:lstStyle/>
+          <a:p>
+            <a:pPr algn="l">
+              <a:lnSpc>
+                <a:spcPct val="105000"/>
+              </a:lnSpc>
+              <a:spcBef>
+                <a:spcPts val="0"/>
+              </a:spcBef>
+              <a:spcAft>
+                <a:spcPts val="600"/>
+              </a:spcAft>
+            </a:pPr>
+            <a:r>
+              <a:rPr sz="2100" b="1">
+                <a:solidFill>
+                  <a:srgbClr val="FFFFFF"/>
+                </a:solidFill>
+                <a:latin typeface="Segoe UI Semibold"/>
+              </a:rPr>
+              <a:t>📅  Connect your calendar — count only real work time</a:t>
+            </a:r>
+          </a:p>
+        </p:txBody>
+      </p:sp>
+      <p:sp>
+        <p:nvSpPr>
+          <p:cNvPr id="9" name="TextBox 8"/>
+          <p:cNvSpPr txBox="1"/>
+          <p:nvPr/>
+        </p:nvSpPr>
+        <p:spPr>
+          <a:xfrm>
+            <a:off x="960120" y="2478023"/>
+            <a:ext cx="10241280" cy="457200"/>
+          </a:xfrm>
+          <a:prstGeom prst="rect">
+            <a:avLst/>
+          </a:prstGeom>
+          <a:noFill/>
+        </p:spPr>
+        <p:txBody>
+          <a:bodyPr wrap="square" lIns="25400" tIns="25400" rIns="25400" bIns="25400" anchor="t">
+            <a:spAutoFit/>
+          </a:bodyPr>
+          <a:lstStyle/>
+          <a:p>
+            <a:pPr algn="l">
+              <a:lnSpc>
+                <a:spcPct val="105000"/>
+              </a:lnSpc>
+              <a:spcBef>
+                <a:spcPts val="0"/>
+              </a:spcBef>
+              <a:spcAft>
+                <a:spcPts val="600"/>
+              </a:spcAft>
+            </a:pPr>
+            <a:r>
+              <a:rPr sz="1450" b="0">
+                <a:solidFill>
+                  <a:srgbClr val="E0E7FF"/>
+                </a:solidFill>
+                <a:latin typeface="Segoe UI"/>
+              </a:rPr>
+              <a:t>The app cross-checks your calendar so it never logs hours when you weren’t actually coding.</a:t>
+            </a:r>
+          </a:p>
+        </p:txBody>
+      </p:sp>
+      <p:sp>
+        <p:nvSpPr>
+          <p:cNvPr id="10" name="Rounded Rectangle 9"/>
+          <p:cNvSpPr/>
+          <p:nvPr/>
+        </p:nvSpPr>
+        <p:spPr>
+          <a:xfrm>
+            <a:off x="658368" y="3200399"/>
+            <a:ext cx="3520440" cy="1965960"/>
           </a:xfrm>
           <a:prstGeom prst="roundRect">
             <a:avLst/>
@@ -6269,19 +7614,65 @@
           <a:lstStyle/>
           <a:p>
             <a:pPr algn="ctr"/>
-          </a:p>
-        </p:txBody>
-      </p:sp>
-      <p:sp>
-        <p:nvSpPr>
-          <p:cNvPr id="14" name="TextBox 13"/>
+            <a:endParaRPr/>
+          </a:p>
+        </p:txBody>
+      </p:sp>
+      <p:sp>
+        <p:nvSpPr>
+          <p:cNvPr id="11" name="Rectangle 10"/>
+          <p:cNvSpPr/>
+          <p:nvPr/>
+        </p:nvSpPr>
+        <p:spPr>
+          <a:xfrm>
+            <a:off x="658368" y="3200399"/>
+            <a:ext cx="3520440" cy="91440"/>
+          </a:xfrm>
+          <a:prstGeom prst="rect">
+            <a:avLst/>
+          </a:prstGeom>
+          <a:solidFill>
+            <a:srgbClr val="2563EB"/>
+          </a:solidFill>
+          <a:ln>
+            <a:noFill/>
+          </a:ln>
+          <a:effectLst/>
+        </p:spPr>
+        <p:style>
+          <a:lnRef idx="1">
+            <a:schemeClr val="accent1"/>
+          </a:lnRef>
+          <a:fillRef idx="3">
+            <a:schemeClr val="accent1"/>
+          </a:fillRef>
+          <a:effectRef idx="2">
+            <a:schemeClr val="accent1"/>
+          </a:effectRef>
+          <a:fontRef idx="minor">
+            <a:schemeClr val="lt1"/>
+          </a:fontRef>
+        </p:style>
+        <p:txBody>
+          <a:bodyPr rtlCol="0" anchor="ctr"/>
+          <a:lstStyle/>
+          <a:p>
+            <a:pPr algn="ctr"/>
+            <a:endParaRPr/>
+          </a:p>
+        </p:txBody>
+      </p:sp>
+      <p:sp>
+        <p:nvSpPr>
+          <p:cNvPr id="12" name="TextBox 11"/>
           <p:cNvSpPr txBox="1"/>
           <p:nvPr/>
         </p:nvSpPr>
         <p:spPr>
           <a:xfrm>
-            <a:off x="8065008" y="2285999"/>
-            <a:ext cx="3520440" cy="731520"/>
+            <a:off x="914400" y="3456431"/>
+            <a:ext cx="3063240" cy="548640"/>
           </a:xfrm>
           <a:prstGeom prst="rect">
             <a:avLst/>
@@ -6289,12 +7680,12 @@
           <a:noFill/>
         </p:spPr>
         <p:txBody>
-          <a:bodyPr wrap="square" anchor="t" lIns="25400" rIns="25400" tIns="25400" bIns="25400">
+          <a:bodyPr wrap="square" lIns="25400" tIns="25400" rIns="25400" bIns="25400" anchor="t">
             <a:spAutoFit/>
           </a:bodyPr>
           <a:lstStyle/>
           <a:p>
-            <a:pPr algn="ctr">
+            <a:pPr algn="l">
               <a:lnSpc>
                 <a:spcPct val="105000"/>
               </a:lnSpc>
@@ -6306,27 +7697,27 @@
               </a:spcAft>
             </a:pPr>
             <a:r>
-              <a:rPr sz="4000" b="1">
+              <a:rPr sz="3000" b="0">
                 <a:solidFill>
                   <a:srgbClr val="2563EB"/>
                 </a:solidFill>
-                <a:latin typeface="Segoe UI Semibold"/>
-              </a:rPr>
-              <a:t>100%</a:t>
-            </a:r>
-          </a:p>
-        </p:txBody>
-      </p:sp>
-      <p:sp>
-        <p:nvSpPr>
-          <p:cNvPr id="15" name="TextBox 14"/>
+                <a:latin typeface="Segoe UI"/>
+              </a:rPr>
+              <a:t>🏖</a:t>
+            </a:r>
+          </a:p>
+        </p:txBody>
+      </p:sp>
+      <p:sp>
+        <p:nvSpPr>
+          <p:cNvPr id="13" name="TextBox 12"/>
           <p:cNvSpPr txBox="1"/>
           <p:nvPr/>
         </p:nvSpPr>
         <p:spPr>
           <a:xfrm>
-            <a:off x="8339328" y="3108959"/>
-            <a:ext cx="2971800" cy="640080"/>
+            <a:off x="914400" y="4041647"/>
+            <a:ext cx="3063240" cy="365760"/>
           </a:xfrm>
           <a:prstGeom prst="rect">
             <a:avLst/>
@@ -6334,12 +7725,12 @@
           <a:noFill/>
         </p:spPr>
         <p:txBody>
-          <a:bodyPr wrap="square" anchor="t" lIns="25400" rIns="25400" tIns="25400" bIns="25400">
+          <a:bodyPr wrap="square" lIns="25400" tIns="25400" rIns="25400" bIns="25400" anchor="t">
             <a:spAutoFit/>
           </a:bodyPr>
           <a:lstStyle/>
           <a:p>
-            <a:pPr algn="ctr">
+            <a:pPr algn="l">
               <a:lnSpc>
                 <a:spcPct val="105000"/>
               </a:lnSpc>
@@ -6351,27 +7742,27 @@
               </a:spcAft>
             </a:pPr>
             <a:r>
-              <a:rPr sz="1450" b="0">
-                <a:solidFill>
-                  <a:srgbClr val="64748B"/>
-                </a:solidFill>
-                <a:latin typeface="Segoe UI"/>
-              </a:rPr>
-              <a:t>of entries backed by real commits</a:t>
-            </a:r>
-          </a:p>
-        </p:txBody>
-      </p:sp>
-      <p:sp>
-        <p:nvSpPr>
-          <p:cNvPr id="16" name="TextBox 15"/>
+              <a:rPr sz="1700" b="1">
+                <a:solidFill>
+                  <a:srgbClr val="0F172A"/>
+                </a:solidFill>
+                <a:latin typeface="Segoe UI Semibold"/>
+              </a:rPr>
+              <a:t>Holidays &amp; PTO</a:t>
+            </a:r>
+          </a:p>
+        </p:txBody>
+      </p:sp>
+      <p:sp>
+        <p:nvSpPr>
+          <p:cNvPr id="14" name="TextBox 13"/>
           <p:cNvSpPr txBox="1"/>
           <p:nvPr/>
         </p:nvSpPr>
         <p:spPr>
           <a:xfrm>
-            <a:off x="658368" y="4114799"/>
-            <a:ext cx="10881360" cy="2286001"/>
+            <a:off x="914400" y="4407407"/>
+            <a:ext cx="3063240" cy="731520"/>
           </a:xfrm>
           <a:prstGeom prst="rect">
             <a:avLst/>
@@ -6379,123 +7770,566 @@
           <a:noFill/>
         </p:spPr>
         <p:txBody>
-          <a:bodyPr wrap="square">
+          <a:bodyPr wrap="square" lIns="25400" tIns="25400" rIns="25400" bIns="25400" anchor="t">
             <a:spAutoFit/>
           </a:bodyPr>
           <a:lstStyle/>
           <a:p>
-            <a:pPr>
-              <a:lnSpc>
-                <a:spcPct val="108000"/>
-              </a:lnSpc>
-              <a:spcAft>
-                <a:spcPts val="1100"/>
-              </a:spcAft>
-            </a:pPr>
-            <a:r>
-              <a:rPr sz="1100">
+            <a:pPr algn="l">
+              <a:lnSpc>
+                <a:spcPct val="112000"/>
+              </a:lnSpc>
+              <a:spcBef>
+                <a:spcPts val="0"/>
+              </a:spcBef>
+              <a:spcAft>
+                <a:spcPts val="600"/>
+              </a:spcAft>
+            </a:pPr>
+            <a:r>
+              <a:rPr sz="1300" b="0">
+                <a:solidFill>
+                  <a:srgbClr val="64748B"/>
+                </a:solidFill>
+                <a:latin typeface="Segoe UI"/>
+              </a:rPr>
+              <a:t>Auto-skip public holidays and days off — no timesheet when you’re not working.</a:t>
+            </a:r>
+          </a:p>
+        </p:txBody>
+      </p:sp>
+      <p:sp>
+        <p:nvSpPr>
+          <p:cNvPr id="15" name="Rounded Rectangle 14"/>
+          <p:cNvSpPr/>
+          <p:nvPr/>
+        </p:nvSpPr>
+        <p:spPr>
+          <a:xfrm>
+            <a:off x="4361688" y="3200399"/>
+            <a:ext cx="3520440" cy="1965960"/>
+          </a:xfrm>
+          <a:prstGeom prst="roundRect">
+            <a:avLst/>
+          </a:prstGeom>
+          <a:solidFill>
+            <a:srgbClr val="FFFFFF"/>
+          </a:solidFill>
+          <a:ln w="12700">
+            <a:solidFill>
+              <a:srgbClr val="E2E6EE"/>
+            </a:solidFill>
+          </a:ln>
+          <a:effectLst/>
+        </p:spPr>
+        <p:style>
+          <a:lnRef idx="1">
+            <a:schemeClr val="accent1"/>
+          </a:lnRef>
+          <a:fillRef idx="3">
+            <a:schemeClr val="accent1"/>
+          </a:fillRef>
+          <a:effectRef idx="2">
+            <a:schemeClr val="accent1"/>
+          </a:effectRef>
+          <a:fontRef idx="minor">
+            <a:schemeClr val="lt1"/>
+          </a:fontRef>
+        </p:style>
+        <p:txBody>
+          <a:bodyPr rtlCol="0" anchor="ctr"/>
+          <a:lstStyle/>
+          <a:p>
+            <a:pPr algn="ctr"/>
+            <a:endParaRPr/>
+          </a:p>
+        </p:txBody>
+      </p:sp>
+      <p:sp>
+        <p:nvSpPr>
+          <p:cNvPr id="16" name="Rectangle 15"/>
+          <p:cNvSpPr/>
+          <p:nvPr/>
+        </p:nvSpPr>
+        <p:spPr>
+          <a:xfrm>
+            <a:off x="4361688" y="3200399"/>
+            <a:ext cx="3520440" cy="91440"/>
+          </a:xfrm>
+          <a:prstGeom prst="rect">
+            <a:avLst/>
+          </a:prstGeom>
+          <a:solidFill>
+            <a:srgbClr val="15803D"/>
+          </a:solidFill>
+          <a:ln>
+            <a:noFill/>
+          </a:ln>
+          <a:effectLst/>
+        </p:spPr>
+        <p:style>
+          <a:lnRef idx="1">
+            <a:schemeClr val="accent1"/>
+          </a:lnRef>
+          <a:fillRef idx="3">
+            <a:schemeClr val="accent1"/>
+          </a:fillRef>
+          <a:effectRef idx="2">
+            <a:schemeClr val="accent1"/>
+          </a:effectRef>
+          <a:fontRef idx="minor">
+            <a:schemeClr val="lt1"/>
+          </a:fontRef>
+        </p:style>
+        <p:txBody>
+          <a:bodyPr rtlCol="0" anchor="ctr"/>
+          <a:lstStyle/>
+          <a:p>
+            <a:pPr algn="ctr"/>
+            <a:endParaRPr/>
+          </a:p>
+        </p:txBody>
+      </p:sp>
+      <p:sp>
+        <p:nvSpPr>
+          <p:cNvPr id="17" name="TextBox 16"/>
+          <p:cNvSpPr txBox="1"/>
+          <p:nvPr/>
+        </p:nvSpPr>
+        <p:spPr>
+          <a:xfrm>
+            <a:off x="4617720" y="3456431"/>
+            <a:ext cx="3063240" cy="548640"/>
+          </a:xfrm>
+          <a:prstGeom prst="rect">
+            <a:avLst/>
+          </a:prstGeom>
+          <a:noFill/>
+        </p:spPr>
+        <p:txBody>
+          <a:bodyPr wrap="square" lIns="25400" tIns="25400" rIns="25400" bIns="25400" anchor="t">
+            <a:spAutoFit/>
+          </a:bodyPr>
+          <a:lstStyle/>
+          <a:p>
+            <a:pPr algn="l">
+              <a:lnSpc>
+                <a:spcPct val="105000"/>
+              </a:lnSpc>
+              <a:spcBef>
+                <a:spcPts val="0"/>
+              </a:spcBef>
+              <a:spcAft>
+                <a:spcPts val="600"/>
+              </a:spcAft>
+            </a:pPr>
+            <a:r>
+              <a:rPr sz="3000" b="0">
                 <a:solidFill>
                   <a:srgbClr val="15803D"/>
                 </a:solidFill>
                 <a:latin typeface="Segoe UI"/>
               </a:rPr>
-              <a:t>●  </a:t>
-            </a:r>
+              <a:t>✈</a:t>
+            </a:r>
+          </a:p>
+        </p:txBody>
+      </p:sp>
+      <p:sp>
+        <p:nvSpPr>
+          <p:cNvPr id="18" name="TextBox 17"/>
+          <p:cNvSpPr txBox="1"/>
+          <p:nvPr/>
+        </p:nvSpPr>
+        <p:spPr>
+          <a:xfrm>
+            <a:off x="4617720" y="4041647"/>
+            <a:ext cx="3063240" cy="365760"/>
+          </a:xfrm>
+          <a:prstGeom prst="rect">
+            <a:avLst/>
+          </a:prstGeom>
+          <a:noFill/>
+        </p:spPr>
+        <p:txBody>
+          <a:bodyPr wrap="square" lIns="25400" tIns="25400" rIns="25400" bIns="25400" anchor="t">
+            <a:spAutoFit/>
+          </a:bodyPr>
+          <a:lstStyle/>
+          <a:p>
+            <a:pPr algn="l">
+              <a:lnSpc>
+                <a:spcPct val="105000"/>
+              </a:lnSpc>
+              <a:spcBef>
+                <a:spcPts val="0"/>
+              </a:spcBef>
+              <a:spcAft>
+                <a:spcPts val="600"/>
+              </a:spcAft>
+            </a:pPr>
             <a:r>
               <a:rPr sz="1700" b="1">
                 <a:solidFill>
-                  <a:srgbClr val="475569"/>
-                </a:solidFill>
-                <a:latin typeface="Segoe UI"/>
-              </a:rPr>
-              <a:t>More accurate &amp; consistent reporting</a:t>
-            </a:r>
-            <a:r>
-              <a:rPr sz="1700">
+                  <a:srgbClr val="0F172A"/>
+                </a:solidFill>
+                <a:latin typeface="Segoe UI Semibold"/>
+              </a:rPr>
+              <a:t>Trips &amp; travel</a:t>
+            </a:r>
+          </a:p>
+        </p:txBody>
+      </p:sp>
+      <p:sp>
+        <p:nvSpPr>
+          <p:cNvPr id="19" name="TextBox 18"/>
+          <p:cNvSpPr txBox="1"/>
+          <p:nvPr/>
+        </p:nvSpPr>
+        <p:spPr>
+          <a:xfrm>
+            <a:off x="4617720" y="4407407"/>
+            <a:ext cx="3063240" cy="731520"/>
+          </a:xfrm>
+          <a:prstGeom prst="rect">
+            <a:avLst/>
+          </a:prstGeom>
+          <a:noFill/>
+        </p:spPr>
+        <p:txBody>
+          <a:bodyPr wrap="square" lIns="25400" tIns="25400" rIns="25400" bIns="25400" anchor="t">
+            <a:spAutoFit/>
+          </a:bodyPr>
+          <a:lstStyle/>
+          <a:p>
+            <a:pPr algn="l">
+              <a:lnSpc>
+                <a:spcPct val="112000"/>
+              </a:lnSpc>
+              <a:spcBef>
+                <a:spcPts val="0"/>
+              </a:spcBef>
+              <a:spcAft>
+                <a:spcPts val="600"/>
+              </a:spcAft>
+            </a:pPr>
+            <a:r>
+              <a:rPr sz="1300" b="0">
                 <a:solidFill>
                   <a:srgbClr val="64748B"/>
                 </a:solidFill>
                 <a:latin typeface="Segoe UI"/>
               </a:rPr>
-              <a:t>  —  for the whole team</a:t>
-            </a:r>
-          </a:p>
-          <a:p>
-            <a:pPr>
-              <a:lnSpc>
-                <a:spcPct val="108000"/>
-              </a:lnSpc>
-              <a:spcAft>
-                <a:spcPts val="1100"/>
-              </a:spcAft>
-            </a:pPr>
-            <a:r>
-              <a:rPr sz="1100">
-                <a:solidFill>
-                  <a:srgbClr val="15803D"/>
-                </a:solidFill>
-                <a:latin typeface="Segoe UI"/>
-              </a:rPr>
-              <a:t>●  </a:t>
-            </a:r>
+              <a:t>If the calendar shows a trip, those days aren’t counted as coding time.</a:t>
+            </a:r>
+          </a:p>
+        </p:txBody>
+      </p:sp>
+      <p:sp>
+        <p:nvSpPr>
+          <p:cNvPr id="20" name="Rounded Rectangle 19"/>
+          <p:cNvSpPr/>
+          <p:nvPr/>
+        </p:nvSpPr>
+        <p:spPr>
+          <a:xfrm>
+            <a:off x="8065008" y="3200399"/>
+            <a:ext cx="3520440" cy="1965960"/>
+          </a:xfrm>
+          <a:prstGeom prst="roundRect">
+            <a:avLst/>
+          </a:prstGeom>
+          <a:solidFill>
+            <a:srgbClr val="FFFFFF"/>
+          </a:solidFill>
+          <a:ln w="12700">
+            <a:solidFill>
+              <a:srgbClr val="E2E6EE"/>
+            </a:solidFill>
+          </a:ln>
+          <a:effectLst/>
+        </p:spPr>
+        <p:style>
+          <a:lnRef idx="1">
+            <a:schemeClr val="accent1"/>
+          </a:lnRef>
+          <a:fillRef idx="3">
+            <a:schemeClr val="accent1"/>
+          </a:fillRef>
+          <a:effectRef idx="2">
+            <a:schemeClr val="accent1"/>
+          </a:effectRef>
+          <a:fontRef idx="minor">
+            <a:schemeClr val="lt1"/>
+          </a:fontRef>
+        </p:style>
+        <p:txBody>
+          <a:bodyPr rtlCol="0" anchor="ctr"/>
+          <a:lstStyle/>
+          <a:p>
+            <a:pPr algn="ctr"/>
+            <a:endParaRPr/>
+          </a:p>
+        </p:txBody>
+      </p:sp>
+      <p:sp>
+        <p:nvSpPr>
+          <p:cNvPr id="21" name="Rectangle 20"/>
+          <p:cNvSpPr/>
+          <p:nvPr/>
+        </p:nvSpPr>
+        <p:spPr>
+          <a:xfrm>
+            <a:off x="8065008" y="3200399"/>
+            <a:ext cx="3520440" cy="91440"/>
+          </a:xfrm>
+          <a:prstGeom prst="rect">
+            <a:avLst/>
+          </a:prstGeom>
+          <a:solidFill>
+            <a:srgbClr val="B45309"/>
+          </a:solidFill>
+          <a:ln>
+            <a:noFill/>
+          </a:ln>
+          <a:effectLst/>
+        </p:spPr>
+        <p:style>
+          <a:lnRef idx="1">
+            <a:schemeClr val="accent1"/>
+          </a:lnRef>
+          <a:fillRef idx="3">
+            <a:schemeClr val="accent1"/>
+          </a:fillRef>
+          <a:effectRef idx="2">
+            <a:schemeClr val="accent1"/>
+          </a:effectRef>
+          <a:fontRef idx="minor">
+            <a:schemeClr val="lt1"/>
+          </a:fontRef>
+        </p:style>
+        <p:txBody>
+          <a:bodyPr rtlCol="0" anchor="ctr"/>
+          <a:lstStyle/>
+          <a:p>
+            <a:pPr algn="ctr"/>
+            <a:endParaRPr/>
+          </a:p>
+        </p:txBody>
+      </p:sp>
+      <p:sp>
+        <p:nvSpPr>
+          <p:cNvPr id="22" name="TextBox 21"/>
+          <p:cNvSpPr txBox="1"/>
+          <p:nvPr/>
+        </p:nvSpPr>
+        <p:spPr>
+          <a:xfrm>
+            <a:off x="8321040" y="3456431"/>
+            <a:ext cx="3063240" cy="548640"/>
+          </a:xfrm>
+          <a:prstGeom prst="rect">
+            <a:avLst/>
+          </a:prstGeom>
+          <a:noFill/>
+        </p:spPr>
+        <p:txBody>
+          <a:bodyPr wrap="square" lIns="25400" tIns="25400" rIns="25400" bIns="25400" anchor="t">
+            <a:spAutoFit/>
+          </a:bodyPr>
+          <a:lstStyle/>
+          <a:p>
+            <a:pPr algn="l">
+              <a:lnSpc>
+                <a:spcPct val="105000"/>
+              </a:lnSpc>
+              <a:spcBef>
+                <a:spcPts val="0"/>
+              </a:spcBef>
+              <a:spcAft>
+                <a:spcPts val="600"/>
+              </a:spcAft>
+            </a:pPr>
+            <a:r>
+              <a:rPr sz="3000" b="0">
+                <a:solidFill>
+                  <a:srgbClr val="B45309"/>
+                </a:solidFill>
+                <a:latin typeface="Segoe UI"/>
+              </a:rPr>
+              <a:t>🗓</a:t>
+            </a:r>
+          </a:p>
+        </p:txBody>
+      </p:sp>
+      <p:sp>
+        <p:nvSpPr>
+          <p:cNvPr id="23" name="TextBox 22"/>
+          <p:cNvSpPr txBox="1"/>
+          <p:nvPr/>
+        </p:nvSpPr>
+        <p:spPr>
+          <a:xfrm>
+            <a:off x="8321040" y="4041647"/>
+            <a:ext cx="3063240" cy="365760"/>
+          </a:xfrm>
+          <a:prstGeom prst="rect">
+            <a:avLst/>
+          </a:prstGeom>
+          <a:noFill/>
+        </p:spPr>
+        <p:txBody>
+          <a:bodyPr wrap="square" lIns="25400" tIns="25400" rIns="25400" bIns="25400" anchor="t">
+            <a:spAutoFit/>
+          </a:bodyPr>
+          <a:lstStyle/>
+          <a:p>
+            <a:pPr algn="l">
+              <a:lnSpc>
+                <a:spcPct val="105000"/>
+              </a:lnSpc>
+              <a:spcBef>
+                <a:spcPts val="0"/>
+              </a:spcBef>
+              <a:spcAft>
+                <a:spcPts val="600"/>
+              </a:spcAft>
+            </a:pPr>
             <a:r>
               <a:rPr sz="1700" b="1">
                 <a:solidFill>
-                  <a:srgbClr val="475569"/>
-                </a:solidFill>
-                <a:latin typeface="Segoe UI"/>
-              </a:rPr>
-              <a:t>Better data for managers</a:t>
-            </a:r>
-            <a:r>
-              <a:rPr sz="1700">
+                  <a:srgbClr val="0F172A"/>
+                </a:solidFill>
+                <a:latin typeface="Segoe UI Semibold"/>
+              </a:rPr>
+              <a:t>Meeting-heavy days</a:t>
+            </a:r>
+          </a:p>
+        </p:txBody>
+      </p:sp>
+      <p:sp>
+        <p:nvSpPr>
+          <p:cNvPr id="24" name="TextBox 23"/>
+          <p:cNvSpPr txBox="1"/>
+          <p:nvPr/>
+        </p:nvSpPr>
+        <p:spPr>
+          <a:xfrm>
+            <a:off x="8321040" y="4407407"/>
+            <a:ext cx="3063240" cy="731520"/>
+          </a:xfrm>
+          <a:prstGeom prst="rect">
+            <a:avLst/>
+          </a:prstGeom>
+          <a:noFill/>
+        </p:spPr>
+        <p:txBody>
+          <a:bodyPr wrap="square" lIns="25400" tIns="25400" rIns="25400" bIns="25400" anchor="t">
+            <a:spAutoFit/>
+          </a:bodyPr>
+          <a:lstStyle/>
+          <a:p>
+            <a:pPr algn="l">
+              <a:lnSpc>
+                <a:spcPct val="112000"/>
+              </a:lnSpc>
+              <a:spcBef>
+                <a:spcPts val="0"/>
+              </a:spcBef>
+              <a:spcAft>
+                <a:spcPts val="600"/>
+              </a:spcAft>
+            </a:pPr>
+            <a:r>
+              <a:rPr sz="1300" b="0">
                 <a:solidFill>
                   <a:srgbClr val="64748B"/>
                 </a:solidFill>
                 <a:latin typeface="Segoe UI"/>
               </a:rPr>
-              <a:t>  —  cleaner project tracking and effort visibility</a:t>
-            </a:r>
-          </a:p>
-          <a:p>
-            <a:pPr>
-              <a:lnSpc>
-                <a:spcPct val="108000"/>
-              </a:lnSpc>
-              <a:spcAft>
-                <a:spcPts val="1100"/>
-              </a:spcAft>
-            </a:pPr>
-            <a:r>
-              <a:rPr sz="1100">
-                <a:solidFill>
-                  <a:srgbClr val="15803D"/>
-                </a:solidFill>
-                <a:latin typeface="Segoe UI"/>
-              </a:rPr>
-              <a:t>●  </a:t>
-            </a:r>
-            <a:r>
-              <a:rPr sz="1700" b="1">
-                <a:solidFill>
-                  <a:srgbClr val="475569"/>
-                </a:solidFill>
-                <a:latin typeface="Segoe UI"/>
-              </a:rPr>
-              <a:t>Removes the most disliked chore</a:t>
-            </a:r>
-            <a:r>
-              <a:rPr sz="1700">
-                <a:solidFill>
-                  <a:srgbClr val="64748B"/>
-                </a:solidFill>
-                <a:latin typeface="Segoe UI"/>
-              </a:rPr>
-              <a:t>  —  so developers focus on real engineering</a:t>
-            </a:r>
-          </a:p>
-        </p:txBody>
-      </p:sp>
+              <a:t>A day full of meetings won’t be over-counted as hours of development.</a:t>
+            </a:r>
+          </a:p>
+        </p:txBody>
+      </p:sp>
+      <p:sp>
+        <p:nvSpPr>
+          <p:cNvPr id="25" name="TextBox 24"/>
+          <p:cNvSpPr txBox="1"/>
+          <p:nvPr/>
+        </p:nvSpPr>
+        <p:spPr>
+          <a:xfrm>
+            <a:off x="658368" y="5349239"/>
+            <a:ext cx="10881360" cy="457200"/>
+          </a:xfrm>
+          <a:prstGeom prst="rect">
+            <a:avLst/>
+          </a:prstGeom>
+          <a:noFill/>
+        </p:spPr>
+        <p:txBody>
+          <a:bodyPr wrap="square" lIns="25400" tIns="25400" rIns="25400" bIns="25400" anchor="t">
+            <a:spAutoFit/>
+          </a:bodyPr>
+          <a:lstStyle/>
+          <a:p>
+            <a:pPr algn="l">
+              <a:lnSpc>
+                <a:spcPct val="105000"/>
+              </a:lnSpc>
+              <a:spcBef>
+                <a:spcPts val="0"/>
+              </a:spcBef>
+              <a:spcAft>
+                <a:spcPts val="600"/>
+              </a:spcAft>
+            </a:pPr>
+            <a:r>
+              <a:rPr sz="1600" b="1">
+                <a:solidFill>
+                  <a:srgbClr val="0F172A"/>
+                </a:solidFill>
+                <a:latin typeface="Segoe UI"/>
+              </a:rPr>
+              <a:t>The goal:  </a:t>
+            </a:r>
+            <a:r>
+              <a:rPr sz="1600" b="1">
+                <a:solidFill>
+                  <a:srgbClr val="4F46E5"/>
+                </a:solidFill>
+                <a:latin typeface="Segoe UI"/>
+              </a:rPr>
+              <a:t>a timesheet that fills itself — accurately — with almost no edits.</a:t>
+            </a:r>
+          </a:p>
+        </p:txBody>
+      </p:sp>
+      <p:pic>
+        <p:nvPicPr>
+          <p:cNvPr id="26" name="Picture 25" descr="logo_b94f5789.png"/>
+          <p:cNvPicPr>
+            <a:picLocks noChangeAspect="1"/>
+          </p:cNvPicPr>
+          <p:nvPr/>
+        </p:nvPicPr>
+        <p:blipFill>
+          <a:blip r:embed="rId2"/>
+          <a:stretch>
+            <a:fillRect/>
+          </a:stretch>
+        </p:blipFill>
+        <p:spPr>
+          <a:xfrm>
+            <a:off x="10408615" y="310896"/>
+            <a:ext cx="1417320" cy="516798"/>
+          </a:xfrm>
+          <a:prstGeom prst="rect">
+            <a:avLst/>
+          </a:prstGeom>
+        </p:spPr>
+      </p:pic>
     </p:spTree>
   </p:cSld>
   <p:clrMapOvr>
@@ -6504,8 +8338,8 @@
 </p:sld>
 </file>
 
-<file path=ppt/slides/slide13.xml><?xml version="1.0" encoding="utf-8"?>
-<p:sld xmlns:a="http://schemas.openxmlformats.org/drawingml/2006/main" xmlns:p="http://schemas.openxmlformats.org/presentationml/2006/main" xmlns:r="http://schemas.openxmlformats.org/officeDocument/2006/relationships">
+<file path=ppt/slides/slide15.xml><?xml version="1.0" encoding="utf-8"?>
+<p:sld xmlns:a="http://schemas.openxmlformats.org/drawingml/2006/main" xmlns:r="http://schemas.openxmlformats.org/officeDocument/2006/relationships" xmlns:p="http://schemas.openxmlformats.org/presentationml/2006/main">
   <p:cSld>
     <p:spTree>
       <p:nvGrpSpPr>
@@ -6513,7 +8347,14 @@
         <p:cNvGrpSpPr/>
         <p:nvPr/>
       </p:nvGrpSpPr>
-      <p:grpSpPr/>
+      <p:grpSpPr>
+        <a:xfrm>
+          <a:off x="0" y="0"/>
+          <a:ext cx="0" cy="0"/>
+          <a:chOff x="0" y="0"/>
+          <a:chExt cx="0" cy="0"/>
+        </a:xfrm>
+      </p:grpSpPr>
       <p:sp>
         <p:nvSpPr>
           <p:cNvPr id="2" name="Rectangle 1"/>
@@ -6555,6 +8396,7 @@
           <a:lstStyle/>
           <a:p>
             <a:pPr algn="ctr"/>
+            <a:endParaRPr/>
           </a:p>
         </p:txBody>
       </p:sp>
@@ -6567,7 +8409,7 @@
         <p:spPr>
           <a:xfrm>
             <a:off x="0" y="0"/>
-            <a:ext cx="256032" cy="6858000"/>
+            <a:ext cx="12191695" cy="6858000"/>
           </a:xfrm>
           <a:prstGeom prst="rect">
             <a:avLst/>
@@ -6599,454 +8441,7 @@
           <a:lstStyle/>
           <a:p>
             <a:pPr algn="ctr"/>
-          </a:p>
-        </p:txBody>
-      </p:sp>
-      <p:sp>
-        <p:nvSpPr>
-          <p:cNvPr id="4" name="TextBox 3"/>
-          <p:cNvSpPr txBox="1"/>
-          <p:nvPr/>
-        </p:nvSpPr>
-        <p:spPr>
-          <a:xfrm>
-            <a:off x="640080" y="457200"/>
-            <a:ext cx="10881360" cy="365760"/>
-          </a:xfrm>
-          <a:prstGeom prst="rect">
-            <a:avLst/>
-          </a:prstGeom>
-          <a:noFill/>
-        </p:spPr>
-        <p:txBody>
-          <a:bodyPr wrap="square" anchor="t" lIns="25400" rIns="25400" tIns="25400" bIns="25400">
-            <a:spAutoFit/>
-          </a:bodyPr>
-          <a:lstStyle/>
-          <a:p>
-            <a:pPr algn="l">
-              <a:lnSpc>
-                <a:spcPct val="105000"/>
-              </a:lnSpc>
-              <a:spcBef>
-                <a:spcPts val="0"/>
-              </a:spcBef>
-              <a:spcAft>
-                <a:spcPts val="600"/>
-              </a:spcAft>
-            </a:pPr>
-            <a:r>
-              <a:rPr sz="1300" b="1">
-                <a:solidFill>
-                  <a:srgbClr val="4F46E5"/>
-                </a:solidFill>
-                <a:latin typeface="Segoe UI"/>
-              </a:rPr>
-              <a:t>WHAT'S NEXT</a:t>
-            </a:r>
-          </a:p>
-        </p:txBody>
-      </p:sp>
-      <p:sp>
-        <p:nvSpPr>
-          <p:cNvPr id="5" name="TextBox 4"/>
-          <p:cNvSpPr txBox="1"/>
-          <p:nvPr/>
-        </p:nvSpPr>
-        <p:spPr>
-          <a:xfrm>
-            <a:off x="640080" y="786384"/>
-            <a:ext cx="10881360" cy="822960"/>
-          </a:xfrm>
-          <a:prstGeom prst="rect">
-            <a:avLst/>
-          </a:prstGeom>
-          <a:noFill/>
-        </p:spPr>
-        <p:txBody>
-          <a:bodyPr wrap="square" anchor="t" lIns="25400" rIns="25400" tIns="25400" bIns="25400">
-            <a:spAutoFit/>
-          </a:bodyPr>
-          <a:lstStyle/>
-          <a:p>
-            <a:pPr algn="l">
-              <a:lnSpc>
-                <a:spcPct val="105000"/>
-              </a:lnSpc>
-              <a:spcBef>
-                <a:spcPts val="0"/>
-              </a:spcBef>
-              <a:spcAft>
-                <a:spcPts val="600"/>
-              </a:spcAft>
-            </a:pPr>
-            <a:r>
-              <a:rPr sz="3200" b="1">
-                <a:solidFill>
-                  <a:srgbClr val="0F172A"/>
-                </a:solidFill>
-                <a:latin typeface="Segoe UI Semibold"/>
-              </a:rPr>
-              <a:t>Roadmap</a:t>
-            </a:r>
-          </a:p>
-        </p:txBody>
-      </p:sp>
-      <p:sp>
-        <p:nvSpPr>
-          <p:cNvPr id="6" name="Rectangle 5"/>
-          <p:cNvSpPr/>
-          <p:nvPr/>
-        </p:nvSpPr>
-        <p:spPr>
-          <a:xfrm>
-            <a:off x="658368" y="1536192"/>
-            <a:ext cx="1005840" cy="44450"/>
-          </a:xfrm>
-          <a:prstGeom prst="rect">
-            <a:avLst/>
-          </a:prstGeom>
-          <a:solidFill>
-            <a:srgbClr val="4F46E5"/>
-          </a:solidFill>
-          <a:ln>
-            <a:noFill/>
-          </a:ln>
-          <a:effectLst/>
-        </p:spPr>
-        <p:style>
-          <a:lnRef idx="1">
-            <a:schemeClr val="accent1"/>
-          </a:lnRef>
-          <a:fillRef idx="3">
-            <a:schemeClr val="accent1"/>
-          </a:fillRef>
-          <a:effectRef idx="2">
-            <a:schemeClr val="accent1"/>
-          </a:effectRef>
-          <a:fontRef idx="minor">
-            <a:schemeClr val="lt1"/>
-          </a:fontRef>
-        </p:style>
-        <p:txBody>
-          <a:bodyPr rtlCol="0" anchor="ctr"/>
-          <a:lstStyle/>
-          <a:p>
-            <a:pPr algn="ctr"/>
-          </a:p>
-        </p:txBody>
-      </p:sp>
-      <p:sp>
-        <p:nvSpPr>
-          <p:cNvPr id="7" name="TextBox 6"/>
-          <p:cNvSpPr txBox="1"/>
-          <p:nvPr/>
-        </p:nvSpPr>
-        <p:spPr>
-          <a:xfrm>
-            <a:off x="658368" y="1874519"/>
-            <a:ext cx="10789920" cy="4526281"/>
-          </a:xfrm>
-          <a:prstGeom prst="rect">
-            <a:avLst/>
-          </a:prstGeom>
-          <a:noFill/>
-        </p:spPr>
-        <p:txBody>
-          <a:bodyPr wrap="square">
-            <a:spAutoFit/>
-          </a:bodyPr>
-          <a:lstStyle/>
-          <a:p>
-            <a:pPr>
-              <a:lnSpc>
-                <a:spcPct val="108000"/>
-              </a:lnSpc>
-              <a:spcAft>
-                <a:spcPts val="1500"/>
-              </a:spcAft>
-            </a:pPr>
-            <a:r>
-              <a:rPr sz="1200">
-                <a:solidFill>
-                  <a:srgbClr val="4F46E5"/>
-                </a:solidFill>
-                <a:latin typeface="Segoe UI"/>
-              </a:rPr>
-              <a:t>●  </a:t>
-            </a:r>
-            <a:r>
-              <a:rPr sz="1800" b="1">
-                <a:solidFill>
-                  <a:srgbClr val="475569"/>
-                </a:solidFill>
-                <a:latin typeface="Segoe UI"/>
-              </a:rPr>
-              <a:t>Pull PRs, branches &amp; ticket references</a:t>
-            </a:r>
-            <a:r>
-              <a:rPr sz="1800">
-                <a:solidFill>
-                  <a:srgbClr val="64748B"/>
-                </a:solidFill>
-                <a:latin typeface="Segoe UI"/>
-              </a:rPr>
-              <a:t>  —  map work to Jira / Azure DevOps tickets</a:t>
-            </a:r>
-          </a:p>
-          <a:p>
-            <a:pPr>
-              <a:lnSpc>
-                <a:spcPct val="108000"/>
-              </a:lnSpc>
-              <a:spcAft>
-                <a:spcPts val="1500"/>
-              </a:spcAft>
-            </a:pPr>
-            <a:r>
-              <a:rPr sz="1200">
-                <a:solidFill>
-                  <a:srgbClr val="4F46E5"/>
-                </a:solidFill>
-                <a:latin typeface="Segoe UI"/>
-              </a:rPr>
-              <a:t>●  </a:t>
-            </a:r>
-            <a:r>
-              <a:rPr sz="1800" b="1">
-                <a:solidFill>
-                  <a:srgbClr val="475569"/>
-                </a:solidFill>
-                <a:latin typeface="Segoe UI"/>
-              </a:rPr>
-              <a:t>Auto-post standups to Slack / Teams</a:t>
-            </a:r>
-            <a:r>
-              <a:rPr sz="1800">
-                <a:solidFill>
-                  <a:srgbClr val="64748B"/>
-                </a:solidFill>
-                <a:latin typeface="Segoe UI"/>
-              </a:rPr>
-              <a:t>  —  zero copy-paste</a:t>
-            </a:r>
-          </a:p>
-          <a:p>
-            <a:pPr>
-              <a:lnSpc>
-                <a:spcPct val="108000"/>
-              </a:lnSpc>
-              <a:spcAft>
-                <a:spcPts val="1500"/>
-              </a:spcAft>
-            </a:pPr>
-            <a:r>
-              <a:rPr sz="1200">
-                <a:solidFill>
-                  <a:srgbClr val="4F46E5"/>
-                </a:solidFill>
-                <a:latin typeface="Segoe UI"/>
-              </a:rPr>
-              <a:t>●  </a:t>
-            </a:r>
-            <a:r>
-              <a:rPr sz="1800" b="1">
-                <a:solidFill>
-                  <a:srgbClr val="475569"/>
-                </a:solidFill>
-                <a:latin typeface="Segoe UI"/>
-              </a:rPr>
-              <a:t>More export formats</a:t>
-            </a:r>
-            <a:r>
-              <a:rPr sz="1800">
-                <a:solidFill>
-                  <a:srgbClr val="64748B"/>
-                </a:solidFill>
-                <a:latin typeface="Segoe UI"/>
-              </a:rPr>
-              <a:t>  —  Markdown status, CSV, PDF timesheets</a:t>
-            </a:r>
-          </a:p>
-          <a:p>
-            <a:pPr>
-              <a:lnSpc>
-                <a:spcPct val="108000"/>
-              </a:lnSpc>
-              <a:spcAft>
-                <a:spcPts val="1500"/>
-              </a:spcAft>
-            </a:pPr>
-            <a:r>
-              <a:rPr sz="1200">
-                <a:solidFill>
-                  <a:srgbClr val="4F46E5"/>
-                </a:solidFill>
-                <a:latin typeface="Segoe UI"/>
-              </a:rPr>
-              <a:t>●  </a:t>
-            </a:r>
-            <a:r>
-              <a:rPr sz="1800" b="1">
-                <a:solidFill>
-                  <a:srgbClr val="475569"/>
-                </a:solidFill>
-                <a:latin typeface="Segoe UI"/>
-              </a:rPr>
-              <a:t>Scheduled generation</a:t>
-            </a:r>
-            <a:r>
-              <a:rPr sz="1800">
-                <a:solidFill>
-                  <a:srgbClr val="64748B"/>
-                </a:solidFill>
-                <a:latin typeface="Segoe UI"/>
-              </a:rPr>
-              <a:t>  —  a daily/weekly draft waiting in your inbox</a:t>
-            </a:r>
-          </a:p>
-          <a:p>
-            <a:pPr>
-              <a:lnSpc>
-                <a:spcPct val="108000"/>
-              </a:lnSpc>
-              <a:spcAft>
-                <a:spcPts val="1500"/>
-              </a:spcAft>
-            </a:pPr>
-            <a:r>
-              <a:rPr sz="1200">
-                <a:solidFill>
-                  <a:srgbClr val="4F46E5"/>
-                </a:solidFill>
-                <a:latin typeface="Segoe UI"/>
-              </a:rPr>
-              <a:t>●  </a:t>
-            </a:r>
-            <a:r>
-              <a:rPr sz="1800" b="1">
-                <a:solidFill>
-                  <a:srgbClr val="475569"/>
-                </a:solidFill>
-                <a:latin typeface="Segoe UI"/>
-              </a:rPr>
-              <a:t>Team dashboards</a:t>
-            </a:r>
-            <a:r>
-              <a:rPr sz="1800">
-                <a:solidFill>
-                  <a:srgbClr val="64748B"/>
-                </a:solidFill>
-                <a:latin typeface="Segoe UI"/>
-              </a:rPr>
-              <a:t>  —  roll-ups across everyone, not just one developer</a:t>
-            </a:r>
-          </a:p>
-        </p:txBody>
-      </p:sp>
-    </p:spTree>
-  </p:cSld>
-  <p:clrMapOvr>
-    <a:masterClrMapping/>
-  </p:clrMapOvr>
-</p:sld>
-</file>
-
-<file path=ppt/slides/slide14.xml><?xml version="1.0" encoding="utf-8"?>
-<p:sld xmlns:a="http://schemas.openxmlformats.org/drawingml/2006/main" xmlns:p="http://schemas.openxmlformats.org/presentationml/2006/main" xmlns:r="http://schemas.openxmlformats.org/officeDocument/2006/relationships">
-  <p:cSld>
-    <p:spTree>
-      <p:nvGrpSpPr>
-        <p:cNvPr id="1" name=""/>
-        <p:cNvGrpSpPr/>
-        <p:nvPr/>
-      </p:nvGrpSpPr>
-      <p:grpSpPr/>
-      <p:sp>
-        <p:nvSpPr>
-          <p:cNvPr id="2" name="Rectangle 1"/>
-          <p:cNvSpPr/>
-          <p:nvPr/>
-        </p:nvSpPr>
-        <p:spPr>
-          <a:xfrm>
-            <a:off x="0" y="0"/>
-            <a:ext cx="12191695" cy="6858000"/>
-          </a:xfrm>
-          <a:prstGeom prst="rect">
-            <a:avLst/>
-          </a:prstGeom>
-          <a:solidFill>
-            <a:srgbClr val="EEF1F5"/>
-          </a:solidFill>
-          <a:ln>
-            <a:noFill/>
-          </a:ln>
-          <a:effectLst/>
-        </p:spPr>
-        <p:style>
-          <a:lnRef idx="1">
-            <a:schemeClr val="accent1"/>
-          </a:lnRef>
-          <a:fillRef idx="3">
-            <a:schemeClr val="accent1"/>
-          </a:fillRef>
-          <a:effectRef idx="2">
-            <a:schemeClr val="accent1"/>
-          </a:effectRef>
-          <a:fontRef idx="minor">
-            <a:schemeClr val="lt1"/>
-          </a:fontRef>
-        </p:style>
-        <p:txBody>
-          <a:bodyPr rtlCol="0" anchor="ctr"/>
-          <a:lstStyle/>
-          <a:p>
-            <a:pPr algn="ctr"/>
-          </a:p>
-        </p:txBody>
-      </p:sp>
-      <p:sp>
-        <p:nvSpPr>
-          <p:cNvPr id="3" name="Rectangle 2"/>
-          <p:cNvSpPr/>
-          <p:nvPr/>
-        </p:nvSpPr>
-        <p:spPr>
-          <a:xfrm>
-            <a:off x="0" y="0"/>
-            <a:ext cx="12191695" cy="6858000"/>
-          </a:xfrm>
-          <a:prstGeom prst="rect">
-            <a:avLst/>
-          </a:prstGeom>
-          <a:solidFill>
-            <a:srgbClr val="4F46E5"/>
-          </a:solidFill>
-          <a:ln>
-            <a:noFill/>
-          </a:ln>
-          <a:effectLst/>
-        </p:spPr>
-        <p:style>
-          <a:lnRef idx="1">
-            <a:schemeClr val="accent1"/>
-          </a:lnRef>
-          <a:fillRef idx="3">
-            <a:schemeClr val="accent1"/>
-          </a:fillRef>
-          <a:effectRef idx="2">
-            <a:schemeClr val="accent1"/>
-          </a:effectRef>
-          <a:fontRef idx="minor">
-            <a:schemeClr val="lt1"/>
-          </a:fontRef>
-        </p:style>
-        <p:txBody>
-          <a:bodyPr rtlCol="0" anchor="ctr"/>
-          <a:lstStyle/>
-          <a:p>
-            <a:pPr algn="ctr"/>
+            <a:endParaRPr/>
           </a:p>
         </p:txBody>
       </p:sp>
@@ -7091,6 +8486,7 @@
           <a:lstStyle/>
           <a:p>
             <a:pPr algn="ctr"/>
+            <a:endParaRPr/>
           </a:p>
         </p:txBody>
       </p:sp>
@@ -7111,7 +8507,7 @@
           <a:noFill/>
         </p:spPr>
         <p:txBody>
-          <a:bodyPr wrap="square" anchor="t" lIns="25400" rIns="25400" tIns="25400" bIns="25400">
+          <a:bodyPr wrap="square" lIns="25400" tIns="25400" rIns="25400" bIns="25400" anchor="t">
             <a:spAutoFit/>
           </a:bodyPr>
           <a:lstStyle/>
@@ -7156,7 +8552,7 @@
           <a:noFill/>
         </p:spPr>
         <p:txBody>
-          <a:bodyPr wrap="square" anchor="t" lIns="25400" rIns="25400" tIns="25400" bIns="25400">
+          <a:bodyPr wrap="square" lIns="25400" tIns="25400" rIns="25400" bIns="25400" anchor="t">
             <a:spAutoFit/>
           </a:bodyPr>
           <a:lstStyle/>
@@ -7201,7 +8597,7 @@
           <a:noFill/>
         </p:spPr>
         <p:txBody>
-          <a:bodyPr wrap="square" anchor="t" lIns="25400" rIns="25400" tIns="25400" bIns="25400">
+          <a:bodyPr wrap="square" lIns="25400" tIns="25400" rIns="25400" bIns="25400" anchor="t">
             <a:spAutoFit/>
           </a:bodyPr>
           <a:lstStyle/>
@@ -7229,51 +8625,30 @@
           </a:p>
         </p:txBody>
       </p:sp>
-      <p:sp>
-        <p:nvSpPr>
-          <p:cNvPr id="8" name="TextBox 7"/>
-          <p:cNvSpPr txBox="1"/>
-          <p:nvPr/>
-        </p:nvSpPr>
-        <p:spPr>
-          <a:xfrm>
-            <a:off x="822960" y="6035040"/>
-            <a:ext cx="10515600" cy="365760"/>
-          </a:xfrm>
-          <a:prstGeom prst="rect">
-            <a:avLst/>
-          </a:prstGeom>
-          <a:noFill/>
-        </p:spPr>
-        <p:txBody>
-          <a:bodyPr wrap="square" anchor="t" lIns="25400" rIns="25400" tIns="25400" bIns="25400">
-            <a:spAutoFit/>
-          </a:bodyPr>
-          <a:lstStyle/>
-          <a:p>
-            <a:pPr algn="ctr">
-              <a:lnSpc>
-                <a:spcPct val="105000"/>
-              </a:lnSpc>
-              <a:spcBef>
-                <a:spcPts val="0"/>
-              </a:spcBef>
-              <a:spcAft>
-                <a:spcPts val="600"/>
-              </a:spcAft>
-            </a:pPr>
-            <a:r>
-              <a:rPr sz="1400" b="1">
-                <a:solidFill>
-                  <a:srgbClr val="FFFFFF"/>
-                </a:solidFill>
-                <a:latin typeface="Segoe UI"/>
-              </a:rPr>
-              <a:t>bp55994@ubt-uni.net</a:t>
-            </a:r>
-          </a:p>
-        </p:txBody>
-      </p:sp>
+      <p:pic>
+        <p:nvPicPr>
+          <p:cNvPr id="9" name="Picture 8" descr="logo_acc4c792.png"/>
+          <p:cNvPicPr>
+            <a:picLocks noChangeAspect="1"/>
+          </p:cNvPicPr>
+          <p:nvPr/>
+        </p:nvPicPr>
+        <p:blipFill>
+          <a:blip r:embed="rId2"/>
+          <a:stretch>
+            <a:fillRect/>
+          </a:stretch>
+        </p:blipFill>
+        <p:spPr>
+          <a:xfrm>
+            <a:off x="10408615" y="310896"/>
+            <a:ext cx="1417320" cy="516798"/>
+          </a:xfrm>
+          <a:prstGeom prst="rect">
+            <a:avLst/>
+          </a:prstGeom>
+        </p:spPr>
+      </p:pic>
     </p:spTree>
   </p:cSld>
   <p:clrMapOvr>
@@ -7283,7 +8658,7 @@
 </file>
 
 <file path=ppt/slides/slide2.xml><?xml version="1.0" encoding="utf-8"?>
-<p:sld xmlns:a="http://schemas.openxmlformats.org/drawingml/2006/main" xmlns:p="http://schemas.openxmlformats.org/presentationml/2006/main" xmlns:r="http://schemas.openxmlformats.org/officeDocument/2006/relationships">
+<p:sld xmlns:a="http://schemas.openxmlformats.org/drawingml/2006/main" xmlns:r="http://schemas.openxmlformats.org/officeDocument/2006/relationships" xmlns:p="http://schemas.openxmlformats.org/presentationml/2006/main">
   <p:cSld>
     <p:spTree>
       <p:nvGrpSpPr>
@@ -7291,7 +8666,14 @@
         <p:cNvGrpSpPr/>
         <p:nvPr/>
       </p:nvGrpSpPr>
-      <p:grpSpPr/>
+      <p:grpSpPr>
+        <a:xfrm>
+          <a:off x="0" y="0"/>
+          <a:ext cx="0" cy="0"/>
+          <a:chOff x="0" y="0"/>
+          <a:chExt cx="0" cy="0"/>
+        </a:xfrm>
+      </p:grpSpPr>
       <p:sp>
         <p:nvSpPr>
           <p:cNvPr id="2" name="Rectangle 1"/>
@@ -7333,6 +8715,7 @@
           <a:lstStyle/>
           <a:p>
             <a:pPr algn="ctr"/>
+            <a:endParaRPr/>
           </a:p>
         </p:txBody>
       </p:sp>
@@ -7377,6 +8760,7 @@
           <a:lstStyle/>
           <a:p>
             <a:pPr algn="ctr"/>
+            <a:endParaRPr/>
           </a:p>
         </p:txBody>
       </p:sp>
@@ -7397,7 +8781,7 @@
           <a:noFill/>
         </p:spPr>
         <p:txBody>
-          <a:bodyPr wrap="square" anchor="t" lIns="25400" rIns="25400" tIns="25400" bIns="25400">
+          <a:bodyPr wrap="square" lIns="25400" tIns="25400" rIns="25400" bIns="25400" anchor="t">
             <a:spAutoFit/>
           </a:bodyPr>
           <a:lstStyle/>
@@ -7442,7 +8826,7 @@
           <a:noFill/>
         </p:spPr>
         <p:txBody>
-          <a:bodyPr wrap="square" anchor="t" lIns="25400" rIns="25400" tIns="25400" bIns="25400">
+          <a:bodyPr wrap="square" lIns="25400" tIns="25400" rIns="25400" bIns="25400" anchor="t">
             <a:spAutoFit/>
           </a:bodyPr>
           <a:lstStyle/>
@@ -7511,6 +8895,7 @@
           <a:lstStyle/>
           <a:p>
             <a:pPr algn="ctr"/>
+            <a:endParaRPr/>
           </a:p>
         </p:txBody>
       </p:sp>
@@ -7545,6 +8930,43 @@
               </a:spcAft>
             </a:pPr>
             <a:r>
+              <a:rPr sz="1200" dirty="0">
+                <a:solidFill>
+                  <a:srgbClr val="4F46E5"/>
+                </a:solidFill>
+                <a:latin typeface="Segoe UI"/>
+              </a:rPr>
+              <a:t>●  </a:t>
+            </a:r>
+            <a:r>
+              <a:rPr sz="1800" b="1" dirty="0">
+                <a:solidFill>
+                  <a:srgbClr val="475569"/>
+                </a:solidFill>
+                <a:latin typeface="Segoe UI"/>
+              </a:rPr>
+              <a:t>Every developer answers the same question</a:t>
+            </a:r>
+            <a:r>
+              <a:rPr sz="1800" dirty="0">
+                <a:solidFill>
+                  <a:srgbClr val="64748B"/>
+                </a:solidFill>
+                <a:latin typeface="Segoe UI"/>
+              </a:rPr>
+              <a:t>  —  “What did you work on?”</a:t>
+            </a:r>
+          </a:p>
+          <a:p>
+            <a:pPr>
+              <a:lnSpc>
+                <a:spcPct val="108000"/>
+              </a:lnSpc>
+              <a:spcAft>
+                <a:spcPts val="1500"/>
+              </a:spcAft>
+            </a:pPr>
+            <a:r>
               <a:rPr sz="1200">
                 <a:solidFill>
                   <a:srgbClr val="4F46E5"/>
@@ -7560,7 +8982,7 @@
                 </a:solidFill>
                 <a:latin typeface="Segoe UI"/>
               </a:rPr>
-              <a:t>Every developer answers the same question</a:t>
+              <a:t>Standups, weekly status reports and timesheets</a:t>
             </a:r>
             <a:r>
               <a:rPr sz="1800">
@@ -7569,7 +8991,7 @@
                 </a:solidFill>
                 <a:latin typeface="Segoe UI"/>
               </a:rPr>
-              <a:t>  —  “What did you work on?”</a:t>
+              <a:t>  —  all ask for it, separately</a:t>
             </a:r>
           </a:p>
           <a:p>
@@ -7582,7 +9004,7 @@
               </a:spcAft>
             </a:pPr>
             <a:r>
-              <a:rPr sz="1200">
+              <a:rPr sz="1200" dirty="0">
                 <a:solidFill>
                   <a:srgbClr val="4F46E5"/>
                 </a:solidFill>
@@ -7591,22 +9013,22 @@
               <a:t>●  </a:t>
             </a:r>
             <a:r>
-              <a:rPr sz="1800" b="1">
+              <a:rPr sz="1800" b="1" dirty="0">
                 <a:solidFill>
                   <a:srgbClr val="475569"/>
                 </a:solidFill>
                 <a:latin typeface="Segoe UI"/>
               </a:rPr>
-              <a:t>Standups, weekly status reports and timesheets</a:t>
-            </a:r>
-            <a:r>
-              <a:rPr sz="1800">
+              <a:t>We rebuild the answer by hand</a:t>
+            </a:r>
+            <a:r>
+              <a:rPr sz="1800" dirty="0">
                 <a:solidFill>
                   <a:srgbClr val="64748B"/>
                 </a:solidFill>
                 <a:latin typeface="Segoe UI"/>
               </a:rPr>
-              <a:t>  —  all ask for it, separately</a:t>
+              <a:t>  —  hours or days later, guessing the details</a:t>
             </a:r>
           </a:p>
           <a:p>
@@ -7619,7 +9041,7 @@
               </a:spcAft>
             </a:pPr>
             <a:r>
-              <a:rPr sz="1200">
+              <a:rPr sz="1200" dirty="0">
                 <a:solidFill>
                   <a:srgbClr val="4F46E5"/>
                 </a:solidFill>
@@ -7628,22 +9050,22 @@
               <a:t>●  </a:t>
             </a:r>
             <a:r>
-              <a:rPr sz="1800" b="1">
+              <a:rPr sz="1800" b="1" dirty="0">
                 <a:solidFill>
                   <a:srgbClr val="475569"/>
                 </a:solidFill>
                 <a:latin typeface="Segoe UI"/>
               </a:rPr>
-              <a:t>We rebuild the answer by hand</a:t>
-            </a:r>
-            <a:r>
-              <a:rPr sz="1800">
+              <a:t>The result</a:t>
+            </a:r>
+            <a:r>
+              <a:rPr sz="1800" dirty="0">
                 <a:solidFill>
                   <a:srgbClr val="64748B"/>
                 </a:solidFill>
                 <a:latin typeface="Segoe UI"/>
               </a:rPr>
-              <a:t>  —  hours or days later, guessing the details</a:t>
+              <a:t>  —  repetitive, error-prone, and it under-reports real effort</a:t>
             </a:r>
           </a:p>
           <a:p>
@@ -7656,7 +9078,7 @@
               </a:spcAft>
             </a:pPr>
             <a:r>
-              <a:rPr sz="1200">
+              <a:rPr sz="1200" dirty="0">
                 <a:solidFill>
                   <a:srgbClr val="4F46E5"/>
                 </a:solidFill>
@@ -7665,53 +9087,16 @@
               <a:t>●  </a:t>
             </a:r>
             <a:r>
-              <a:rPr sz="1800" b="1">
+              <a:rPr sz="1800" b="1" dirty="0">
                 <a:solidFill>
                   <a:srgbClr val="475569"/>
                 </a:solidFill>
                 <a:latin typeface="Segoe UI"/>
               </a:rPr>
-              <a:t>The result</a:t>
-            </a:r>
-            <a:r>
-              <a:rPr sz="1800">
-                <a:solidFill>
-                  <a:srgbClr val="64748B"/>
-                </a:solidFill>
-                <a:latin typeface="Segoe UI"/>
-              </a:rPr>
-              <a:t>  —  repetitive, error-prone, and it under-reports real effort</a:t>
-            </a:r>
-          </a:p>
-          <a:p>
-            <a:pPr>
-              <a:lnSpc>
-                <a:spcPct val="108000"/>
-              </a:lnSpc>
-              <a:spcAft>
-                <a:spcPts val="1500"/>
-              </a:spcAft>
-            </a:pPr>
-            <a:r>
-              <a:rPr sz="1200">
-                <a:solidFill>
-                  <a:srgbClr val="4F46E5"/>
-                </a:solidFill>
-                <a:latin typeface="Segoe UI"/>
-              </a:rPr>
-              <a:t>●  </a:t>
-            </a:r>
-            <a:r>
-              <a:rPr sz="1800" b="1">
-                <a:solidFill>
-                  <a:srgbClr val="475569"/>
-                </a:solidFill>
-                <a:latin typeface="Segoe UI"/>
-              </a:rPr>
               <a:t>Nobody enjoys it</a:t>
             </a:r>
             <a:r>
-              <a:rPr sz="1800">
+              <a:rPr sz="1800" dirty="0">
                 <a:solidFill>
                   <a:srgbClr val="64748B"/>
                 </a:solidFill>
@@ -7765,6 +9150,7 @@
           <a:lstStyle/>
           <a:p>
             <a:pPr algn="ctr"/>
+            <a:endParaRPr/>
           </a:p>
         </p:txBody>
       </p:sp>
@@ -7809,6 +9195,7 @@
           <a:lstStyle/>
           <a:p>
             <a:pPr algn="ctr"/>
+            <a:endParaRPr/>
           </a:p>
         </p:txBody>
       </p:sp>
@@ -7829,7 +9216,7 @@
           <a:noFill/>
         </p:spPr>
         <p:txBody>
-          <a:bodyPr wrap="square" anchor="t" lIns="25400" rIns="25400" tIns="25400" bIns="25400">
+          <a:bodyPr wrap="square" lIns="25400" tIns="25400" rIns="25400" bIns="25400" anchor="t">
             <a:spAutoFit/>
           </a:bodyPr>
           <a:lstStyle/>
@@ -7874,7 +9261,7 @@
           <a:noFill/>
         </p:spPr>
         <p:txBody>
-          <a:bodyPr wrap="square" anchor="t" lIns="25400" rIns="25400" tIns="25400" bIns="25400">
+          <a:bodyPr wrap="square" lIns="25400" tIns="25400" rIns="25400" bIns="25400" anchor="t">
             <a:spAutoFit/>
           </a:bodyPr>
           <a:lstStyle/>
@@ -7945,6 +9332,7 @@
           <a:lstStyle/>
           <a:p>
             <a:pPr algn="ctr"/>
+            <a:endParaRPr/>
           </a:p>
         </p:txBody>
       </p:sp>
@@ -7989,6 +9377,7 @@
           <a:lstStyle/>
           <a:p>
             <a:pPr algn="ctr"/>
+            <a:endParaRPr/>
           </a:p>
         </p:txBody>
       </p:sp>
@@ -8009,7 +9398,7 @@
           <a:noFill/>
         </p:spPr>
         <p:txBody>
-          <a:bodyPr wrap="square" anchor="t" lIns="25400" rIns="25400" tIns="25400" bIns="25400">
+          <a:bodyPr wrap="square" lIns="25400" tIns="25400" rIns="25400" bIns="25400" anchor="t">
             <a:spAutoFit/>
           </a:bodyPr>
           <a:lstStyle/>
@@ -8054,7 +9443,7 @@
           <a:noFill/>
         </p:spPr>
         <p:txBody>
-          <a:bodyPr wrap="square" anchor="t" lIns="25400" rIns="25400" tIns="25400" bIns="25400">
+          <a:bodyPr wrap="square" lIns="25400" tIns="25400" rIns="25400" bIns="25400" anchor="t">
             <a:spAutoFit/>
           </a:bodyPr>
           <a:lstStyle/>
@@ -8077,11 +9466,35 @@
                 </a:solidFill>
                 <a:latin typeface="Segoe UI"/>
               </a:rPr>
-              <a:t>written from memory, so effort is under-counted and reports drift out of sync with what actually happened.</a:t>
-            </a:r>
-          </a:p>
-        </p:txBody>
-      </p:sp>
+              <a:t>written from memory, so effort is under-counted and reports drift out of sync with reality.</a:t>
+            </a:r>
+          </a:p>
+        </p:txBody>
+      </p:sp>
+      <p:pic>
+        <p:nvPicPr>
+          <p:cNvPr id="16" name="Picture 15" descr="logo_b94f5789.png"/>
+          <p:cNvPicPr>
+            <a:picLocks noChangeAspect="1"/>
+          </p:cNvPicPr>
+          <p:nvPr/>
+        </p:nvPicPr>
+        <p:blipFill>
+          <a:blip r:embed="rId2"/>
+          <a:stretch>
+            <a:fillRect/>
+          </a:stretch>
+        </p:blipFill>
+        <p:spPr>
+          <a:xfrm>
+            <a:off x="10408615" y="310896"/>
+            <a:ext cx="1417320" cy="516798"/>
+          </a:xfrm>
+          <a:prstGeom prst="rect">
+            <a:avLst/>
+          </a:prstGeom>
+        </p:spPr>
+      </p:pic>
     </p:spTree>
   </p:cSld>
   <p:clrMapOvr>
@@ -8091,7 +9504,7 @@
 </file>
 
 <file path=ppt/slides/slide3.xml><?xml version="1.0" encoding="utf-8"?>
-<p:sld xmlns:a="http://schemas.openxmlformats.org/drawingml/2006/main" xmlns:p="http://schemas.openxmlformats.org/presentationml/2006/main" xmlns:r="http://schemas.openxmlformats.org/officeDocument/2006/relationships">
+<p:sld xmlns:a="http://schemas.openxmlformats.org/drawingml/2006/main" xmlns:r="http://schemas.openxmlformats.org/officeDocument/2006/relationships" xmlns:p="http://schemas.openxmlformats.org/presentationml/2006/main">
   <p:cSld>
     <p:spTree>
       <p:nvGrpSpPr>
@@ -8099,7 +9512,14 @@
         <p:cNvGrpSpPr/>
         <p:nvPr/>
       </p:nvGrpSpPr>
-      <p:grpSpPr/>
+      <p:grpSpPr>
+        <a:xfrm>
+          <a:off x="0" y="0"/>
+          <a:ext cx="0" cy="0"/>
+          <a:chOff x="0" y="0"/>
+          <a:chExt cx="0" cy="0"/>
+        </a:xfrm>
+      </p:grpSpPr>
       <p:sp>
         <p:nvSpPr>
           <p:cNvPr id="2" name="Rectangle 1"/>
@@ -8141,6 +9561,7 @@
           <a:lstStyle/>
           <a:p>
             <a:pPr algn="ctr"/>
+            <a:endParaRPr/>
           </a:p>
         </p:txBody>
       </p:sp>
@@ -8185,6 +9606,7 @@
           <a:lstStyle/>
           <a:p>
             <a:pPr algn="ctr"/>
+            <a:endParaRPr/>
           </a:p>
         </p:txBody>
       </p:sp>
@@ -8205,7 +9627,7 @@
           <a:noFill/>
         </p:spPr>
         <p:txBody>
-          <a:bodyPr wrap="square" anchor="t" lIns="25400" rIns="25400" tIns="25400" bIns="25400">
+          <a:bodyPr wrap="square" lIns="25400" tIns="25400" rIns="25400" bIns="25400" anchor="t">
             <a:spAutoFit/>
           </a:bodyPr>
           <a:lstStyle/>
@@ -8250,7 +9672,7 @@
           <a:noFill/>
         </p:spPr>
         <p:txBody>
-          <a:bodyPr wrap="square" anchor="t" lIns="25400" rIns="25400" tIns="25400" bIns="25400">
+          <a:bodyPr wrap="square" lIns="25400" tIns="25400" rIns="25400" bIns="25400" anchor="t">
             <a:spAutoFit/>
           </a:bodyPr>
           <a:lstStyle/>
@@ -8319,6 +9741,7 @@
           <a:lstStyle/>
           <a:p>
             <a:pPr algn="ctr"/>
+            <a:endParaRPr/>
           </a:p>
         </p:txBody>
       </p:sp>
@@ -8339,7 +9762,7 @@
           <a:noFill/>
         </p:spPr>
         <p:txBody>
-          <a:bodyPr wrap="square" anchor="t" lIns="25400" rIns="25400" tIns="25400" bIns="25400">
+          <a:bodyPr wrap="square" lIns="25400" tIns="25400" rIns="25400" bIns="25400" anchor="t">
             <a:spAutoFit/>
           </a:bodyPr>
           <a:lstStyle/>
@@ -8410,6 +9833,7 @@
           <a:lstStyle/>
           <a:p>
             <a:pPr algn="ctr"/>
+            <a:endParaRPr/>
           </a:p>
         </p:txBody>
       </p:sp>
@@ -8430,7 +9854,7 @@
           <a:noFill/>
         </p:spPr>
         <p:txBody>
-          <a:bodyPr wrap="square" anchor="t" lIns="25400" rIns="25400" tIns="25400" bIns="25400">
+          <a:bodyPr wrap="square" lIns="25400" tIns="25400" rIns="25400" bIns="25400" anchor="t">
             <a:spAutoFit/>
           </a:bodyPr>
           <a:lstStyle/>
@@ -8475,7 +9899,7 @@
           <a:noFill/>
         </p:spPr>
         <p:txBody>
-          <a:bodyPr wrap="square" anchor="t" lIns="25400" rIns="25400" tIns="25400" bIns="25400">
+          <a:bodyPr wrap="square" lIns="25400" tIns="25400" rIns="25400" bIns="25400" anchor="t">
             <a:spAutoFit/>
           </a:bodyPr>
           <a:lstStyle/>
@@ -8520,7 +9944,7 @@
           <a:noFill/>
         </p:spPr>
         <p:txBody>
-          <a:bodyPr wrap="square" anchor="t" lIns="25400" rIns="25400" tIns="25400" bIns="25400">
+          <a:bodyPr wrap="square" lIns="25400" tIns="25400" rIns="25400" bIns="25400" anchor="t">
             <a:spAutoFit/>
           </a:bodyPr>
           <a:lstStyle/>
@@ -8591,6 +10015,7 @@
           <a:lstStyle/>
           <a:p>
             <a:pPr algn="ctr"/>
+            <a:endParaRPr/>
           </a:p>
         </p:txBody>
       </p:sp>
@@ -8611,7 +10036,7 @@
           <a:noFill/>
         </p:spPr>
         <p:txBody>
-          <a:bodyPr wrap="square" anchor="t" lIns="25400" rIns="25400" tIns="25400" bIns="25400">
+          <a:bodyPr wrap="square" lIns="25400" tIns="25400" rIns="25400" bIns="25400" anchor="t">
             <a:spAutoFit/>
           </a:bodyPr>
           <a:lstStyle/>
@@ -8656,7 +10081,7 @@
           <a:noFill/>
         </p:spPr>
         <p:txBody>
-          <a:bodyPr wrap="square" anchor="t" lIns="25400" rIns="25400" tIns="25400" bIns="25400">
+          <a:bodyPr wrap="square" lIns="25400" tIns="25400" rIns="25400" bIns="25400" anchor="t">
             <a:spAutoFit/>
           </a:bodyPr>
           <a:lstStyle/>
@@ -8701,7 +10126,7 @@
           <a:noFill/>
         </p:spPr>
         <p:txBody>
-          <a:bodyPr wrap="square" anchor="t" lIns="25400" rIns="25400" tIns="25400" bIns="25400">
+          <a:bodyPr wrap="square" lIns="25400" tIns="25400" rIns="25400" bIns="25400" anchor="t">
             <a:spAutoFit/>
           </a:bodyPr>
           <a:lstStyle/>
@@ -8772,6 +10197,7 @@
           <a:lstStyle/>
           <a:p>
             <a:pPr algn="ctr"/>
+            <a:endParaRPr/>
           </a:p>
         </p:txBody>
       </p:sp>
@@ -8792,7 +10218,7 @@
           <a:noFill/>
         </p:spPr>
         <p:txBody>
-          <a:bodyPr wrap="square" anchor="t" lIns="25400" rIns="25400" tIns="25400" bIns="25400">
+          <a:bodyPr wrap="square" lIns="25400" tIns="25400" rIns="25400" bIns="25400" anchor="t">
             <a:spAutoFit/>
           </a:bodyPr>
           <a:lstStyle/>
@@ -8837,7 +10263,7 @@
           <a:noFill/>
         </p:spPr>
         <p:txBody>
-          <a:bodyPr wrap="square" anchor="t" lIns="25400" rIns="25400" tIns="25400" bIns="25400">
+          <a:bodyPr wrap="square" lIns="25400" tIns="25400" rIns="25400" bIns="25400" anchor="t">
             <a:spAutoFit/>
           </a:bodyPr>
           <a:lstStyle/>
@@ -8882,7 +10308,7 @@
           <a:noFill/>
         </p:spPr>
         <p:txBody>
-          <a:bodyPr wrap="square" anchor="t" lIns="25400" rIns="25400" tIns="25400" bIns="25400">
+          <a:bodyPr wrap="square" lIns="25400" tIns="25400" rIns="25400" bIns="25400" anchor="t">
             <a:spAutoFit/>
           </a:bodyPr>
           <a:lstStyle/>
@@ -8953,6 +10379,7 @@
           <a:lstStyle/>
           <a:p>
             <a:pPr algn="ctr"/>
+            <a:endParaRPr/>
           </a:p>
         </p:txBody>
       </p:sp>
@@ -8973,7 +10400,7 @@
           <a:noFill/>
         </p:spPr>
         <p:txBody>
-          <a:bodyPr wrap="square" anchor="t" lIns="25400" rIns="25400" tIns="25400" bIns="25400">
+          <a:bodyPr wrap="square" lIns="25400" tIns="25400" rIns="25400" bIns="25400" anchor="t">
             <a:spAutoFit/>
           </a:bodyPr>
           <a:lstStyle/>
@@ -9018,7 +10445,7 @@
           <a:noFill/>
         </p:spPr>
         <p:txBody>
-          <a:bodyPr wrap="square" anchor="t" lIns="25400" rIns="25400" tIns="25400" bIns="25400">
+          <a:bodyPr wrap="square" lIns="25400" tIns="25400" rIns="25400" bIns="25400" anchor="t">
             <a:spAutoFit/>
           </a:bodyPr>
           <a:lstStyle/>
@@ -9063,7 +10490,7 @@
           <a:noFill/>
         </p:spPr>
         <p:txBody>
-          <a:bodyPr wrap="square" anchor="t" lIns="25400" rIns="25400" tIns="25400" bIns="25400">
+          <a:bodyPr wrap="square" lIns="25400" tIns="25400" rIns="25400" bIns="25400" anchor="t">
             <a:spAutoFit/>
           </a:bodyPr>
           <a:lstStyle/>
@@ -9132,6 +10559,7 @@
           <a:lstStyle/>
           <a:p>
             <a:pPr algn="ctr"/>
+            <a:endParaRPr/>
           </a:p>
         </p:txBody>
       </p:sp>
@@ -9152,7 +10580,7 @@
           <a:noFill/>
         </p:spPr>
         <p:txBody>
-          <a:bodyPr wrap="square" anchor="t" lIns="25400" rIns="25400" tIns="25400" bIns="25400">
+          <a:bodyPr wrap="square" lIns="25400" tIns="25400" rIns="25400" bIns="25400" anchor="t">
             <a:spAutoFit/>
           </a:bodyPr>
           <a:lstStyle/>
@@ -9180,6 +10608,30 @@
           </a:p>
         </p:txBody>
       </p:sp>
+      <p:pic>
+        <p:nvPicPr>
+          <p:cNvPr id="26" name="Picture 25" descr="logo_b94f5789.png"/>
+          <p:cNvPicPr>
+            <a:picLocks noChangeAspect="1"/>
+          </p:cNvPicPr>
+          <p:nvPr/>
+        </p:nvPicPr>
+        <p:blipFill>
+          <a:blip r:embed="rId2"/>
+          <a:stretch>
+            <a:fillRect/>
+          </a:stretch>
+        </p:blipFill>
+        <p:spPr>
+          <a:xfrm>
+            <a:off x="10408615" y="310896"/>
+            <a:ext cx="1417320" cy="516798"/>
+          </a:xfrm>
+          <a:prstGeom prst="rect">
+            <a:avLst/>
+          </a:prstGeom>
+        </p:spPr>
+      </p:pic>
     </p:spTree>
   </p:cSld>
   <p:clrMapOvr>
@@ -9189,7 +10641,7 @@
 </file>
 
 <file path=ppt/slides/slide4.xml><?xml version="1.0" encoding="utf-8"?>
-<p:sld xmlns:a="http://schemas.openxmlformats.org/drawingml/2006/main" xmlns:p="http://schemas.openxmlformats.org/presentationml/2006/main" xmlns:r="http://schemas.openxmlformats.org/officeDocument/2006/relationships">
+<p:sld xmlns:a="http://schemas.openxmlformats.org/drawingml/2006/main" xmlns:r="http://schemas.openxmlformats.org/officeDocument/2006/relationships" xmlns:p="http://schemas.openxmlformats.org/presentationml/2006/main">
   <p:cSld>
     <p:spTree>
       <p:nvGrpSpPr>
@@ -9197,7 +10649,14 @@
         <p:cNvGrpSpPr/>
         <p:nvPr/>
       </p:nvGrpSpPr>
-      <p:grpSpPr/>
+      <p:grpSpPr>
+        <a:xfrm>
+          <a:off x="0" y="0"/>
+          <a:ext cx="0" cy="0"/>
+          <a:chOff x="0" y="0"/>
+          <a:chExt cx="0" cy="0"/>
+        </a:xfrm>
+      </p:grpSpPr>
       <p:sp>
         <p:nvSpPr>
           <p:cNvPr id="2" name="Rectangle 1"/>
@@ -9239,6 +10698,7 @@
           <a:lstStyle/>
           <a:p>
             <a:pPr algn="ctr"/>
+            <a:endParaRPr/>
           </a:p>
         </p:txBody>
       </p:sp>
@@ -9283,6 +10743,7 @@
           <a:lstStyle/>
           <a:p>
             <a:pPr algn="ctr"/>
+            <a:endParaRPr/>
           </a:p>
         </p:txBody>
       </p:sp>
@@ -9303,7 +10764,7 @@
           <a:noFill/>
         </p:spPr>
         <p:txBody>
-          <a:bodyPr wrap="square" anchor="t" lIns="25400" rIns="25400" tIns="25400" bIns="25400">
+          <a:bodyPr wrap="square" lIns="25400" tIns="25400" rIns="25400" bIns="25400" anchor="t">
             <a:spAutoFit/>
           </a:bodyPr>
           <a:lstStyle/>
@@ -9348,7 +10809,7 @@
           <a:noFill/>
         </p:spPr>
         <p:txBody>
-          <a:bodyPr wrap="square" anchor="t" lIns="25400" rIns="25400" tIns="25400" bIns="25400">
+          <a:bodyPr wrap="square" lIns="25400" tIns="25400" rIns="25400" bIns="25400" anchor="t">
             <a:spAutoFit/>
           </a:bodyPr>
           <a:lstStyle/>
@@ -9417,6 +10878,7 @@
           <a:lstStyle/>
           <a:p>
             <a:pPr algn="ctr"/>
+            <a:endParaRPr/>
           </a:p>
         </p:txBody>
       </p:sp>
@@ -9437,7 +10899,7 @@
           <a:noFill/>
         </p:spPr>
         <p:txBody>
-          <a:bodyPr wrap="square" anchor="t" lIns="25400" rIns="25400" tIns="25400" bIns="25400">
+          <a:bodyPr wrap="square" lIns="25400" tIns="25400" rIns="25400" bIns="25400" anchor="t">
             <a:spAutoFit/>
           </a:bodyPr>
           <a:lstStyle/>
@@ -9508,6 +10970,7 @@
           <a:lstStyle/>
           <a:p>
             <a:pPr algn="ctr"/>
+            <a:endParaRPr/>
           </a:p>
         </p:txBody>
       </p:sp>
@@ -9552,6 +11015,7 @@
           <a:lstStyle/>
           <a:p>
             <a:pPr algn="ctr"/>
+            <a:endParaRPr/>
           </a:p>
         </p:txBody>
       </p:sp>
@@ -9572,7 +11036,7 @@
           <a:noFill/>
         </p:spPr>
         <p:txBody>
-          <a:bodyPr wrap="square" anchor="t" lIns="25400" rIns="25400" tIns="25400" bIns="25400">
+          <a:bodyPr wrap="square" lIns="25400" tIns="25400" rIns="25400" bIns="25400" anchor="t">
             <a:spAutoFit/>
           </a:bodyPr>
           <a:lstStyle/>
@@ -9617,7 +11081,7 @@
           <a:noFill/>
         </p:spPr>
         <p:txBody>
-          <a:bodyPr wrap="square" anchor="t" lIns="25400" rIns="25400" tIns="25400" bIns="25400">
+          <a:bodyPr wrap="square" lIns="25400" tIns="25400" rIns="25400" bIns="25400" anchor="t">
             <a:spAutoFit/>
           </a:bodyPr>
           <a:lstStyle/>
@@ -9688,6 +11152,7 @@
           <a:lstStyle/>
           <a:p>
             <a:pPr algn="ctr"/>
+            <a:endParaRPr/>
           </a:p>
         </p:txBody>
       </p:sp>
@@ -9732,6 +11197,7 @@
           <a:lstStyle/>
           <a:p>
             <a:pPr algn="ctr"/>
+            <a:endParaRPr/>
           </a:p>
         </p:txBody>
       </p:sp>
@@ -9752,7 +11218,7 @@
           <a:noFill/>
         </p:spPr>
         <p:txBody>
-          <a:bodyPr wrap="square" anchor="t" lIns="25400" rIns="25400" tIns="25400" bIns="25400">
+          <a:bodyPr wrap="square" lIns="25400" tIns="25400" rIns="25400" bIns="25400" anchor="t">
             <a:spAutoFit/>
           </a:bodyPr>
           <a:lstStyle/>
@@ -9797,7 +11263,7 @@
           <a:noFill/>
         </p:spPr>
         <p:txBody>
-          <a:bodyPr wrap="square" anchor="t" lIns="25400" rIns="25400" tIns="25400" bIns="25400">
+          <a:bodyPr wrap="square" lIns="25400" tIns="25400" rIns="25400" bIns="25400" anchor="t">
             <a:spAutoFit/>
           </a:bodyPr>
           <a:lstStyle/>
@@ -9868,6 +11334,7 @@
           <a:lstStyle/>
           <a:p>
             <a:pPr algn="ctr"/>
+            <a:endParaRPr/>
           </a:p>
         </p:txBody>
       </p:sp>
@@ -9912,6 +11379,7 @@
           <a:lstStyle/>
           <a:p>
             <a:pPr algn="ctr"/>
+            <a:endParaRPr/>
           </a:p>
         </p:txBody>
       </p:sp>
@@ -9932,7 +11400,7 @@
           <a:noFill/>
         </p:spPr>
         <p:txBody>
-          <a:bodyPr wrap="square" anchor="t" lIns="25400" rIns="25400" tIns="25400" bIns="25400">
+          <a:bodyPr wrap="square" lIns="25400" tIns="25400" rIns="25400" bIns="25400" anchor="t">
             <a:spAutoFit/>
           </a:bodyPr>
           <a:lstStyle/>
@@ -9977,7 +11445,7 @@
           <a:noFill/>
         </p:spPr>
         <p:txBody>
-          <a:bodyPr wrap="square" anchor="t" lIns="25400" rIns="25400" tIns="25400" bIns="25400">
+          <a:bodyPr wrap="square" lIns="25400" tIns="25400" rIns="25400" bIns="25400" anchor="t">
             <a:spAutoFit/>
           </a:bodyPr>
           <a:lstStyle/>
@@ -10022,7 +11490,7 @@
           <a:noFill/>
         </p:spPr>
         <p:txBody>
-          <a:bodyPr wrap="square" anchor="t" lIns="25400" rIns="25400" tIns="25400" bIns="25400">
+          <a:bodyPr wrap="square" lIns="25400" tIns="25400" rIns="25400" bIns="25400" anchor="t">
             <a:spAutoFit/>
           </a:bodyPr>
           <a:lstStyle/>
@@ -10059,6 +11527,30 @@
           </a:p>
         </p:txBody>
       </p:sp>
+      <p:pic>
+        <p:nvPicPr>
+          <p:cNvPr id="21" name="Picture 20" descr="logo_b94f5789.png"/>
+          <p:cNvPicPr>
+            <a:picLocks noChangeAspect="1"/>
+          </p:cNvPicPr>
+          <p:nvPr/>
+        </p:nvPicPr>
+        <p:blipFill>
+          <a:blip r:embed="rId2"/>
+          <a:stretch>
+            <a:fillRect/>
+          </a:stretch>
+        </p:blipFill>
+        <p:spPr>
+          <a:xfrm>
+            <a:off x="10408615" y="310896"/>
+            <a:ext cx="1417320" cy="516798"/>
+          </a:xfrm>
+          <a:prstGeom prst="rect">
+            <a:avLst/>
+          </a:prstGeom>
+        </p:spPr>
+      </p:pic>
     </p:spTree>
   </p:cSld>
   <p:clrMapOvr>
@@ -10068,7 +11560,7 @@
 </file>
 
 <file path=ppt/slides/slide5.xml><?xml version="1.0" encoding="utf-8"?>
-<p:sld xmlns:a="http://schemas.openxmlformats.org/drawingml/2006/main" xmlns:p="http://schemas.openxmlformats.org/presentationml/2006/main" xmlns:r="http://schemas.openxmlformats.org/officeDocument/2006/relationships">
+<p:sld xmlns:a="http://schemas.openxmlformats.org/drawingml/2006/main" xmlns:r="http://schemas.openxmlformats.org/officeDocument/2006/relationships" xmlns:p="http://schemas.openxmlformats.org/presentationml/2006/main">
   <p:cSld>
     <p:spTree>
       <p:nvGrpSpPr>
@@ -10076,7 +11568,14 @@
         <p:cNvGrpSpPr/>
         <p:nvPr/>
       </p:nvGrpSpPr>
-      <p:grpSpPr/>
+      <p:grpSpPr>
+        <a:xfrm>
+          <a:off x="0" y="0"/>
+          <a:ext cx="0" cy="0"/>
+          <a:chOff x="0" y="0"/>
+          <a:chExt cx="0" cy="0"/>
+        </a:xfrm>
+      </p:grpSpPr>
       <p:sp>
         <p:nvSpPr>
           <p:cNvPr id="2" name="Rectangle 1"/>
@@ -10118,6 +11617,7 @@
           <a:lstStyle/>
           <a:p>
             <a:pPr algn="ctr"/>
+            <a:endParaRPr/>
           </a:p>
         </p:txBody>
       </p:sp>
@@ -10162,6 +11662,7 @@
           <a:lstStyle/>
           <a:p>
             <a:pPr algn="ctr"/>
+            <a:endParaRPr/>
           </a:p>
         </p:txBody>
       </p:sp>
@@ -10182,7 +11683,7 @@
           <a:noFill/>
         </p:spPr>
         <p:txBody>
-          <a:bodyPr wrap="square" anchor="t" lIns="25400" rIns="25400" tIns="25400" bIns="25400">
+          <a:bodyPr wrap="square" lIns="25400" tIns="25400" rIns="25400" bIns="25400" anchor="t">
             <a:spAutoFit/>
           </a:bodyPr>
           <a:lstStyle/>
@@ -10227,7 +11728,7 @@
           <a:noFill/>
         </p:spPr>
         <p:txBody>
-          <a:bodyPr wrap="square" anchor="t" lIns="25400" rIns="25400" tIns="25400" bIns="25400">
+          <a:bodyPr wrap="square" lIns="25400" tIns="25400" rIns="25400" bIns="25400" anchor="t">
             <a:spAutoFit/>
           </a:bodyPr>
           <a:lstStyle/>
@@ -10296,6 +11797,7 @@
           <a:lstStyle/>
           <a:p>
             <a:pPr algn="ctr"/>
+            <a:endParaRPr/>
           </a:p>
         </p:txBody>
       </p:sp>
@@ -10342,6 +11844,7 @@
           <a:lstStyle/>
           <a:p>
             <a:pPr algn="ctr"/>
+            <a:endParaRPr/>
           </a:p>
         </p:txBody>
       </p:sp>
@@ -10386,6 +11889,7 @@
           <a:lstStyle/>
           <a:p>
             <a:pPr algn="ctr"/>
+            <a:endParaRPr/>
           </a:p>
         </p:txBody>
       </p:sp>
@@ -10406,7 +11910,7 @@
           <a:noFill/>
         </p:spPr>
         <p:txBody>
-          <a:bodyPr wrap="square" anchor="t" lIns="25400" rIns="25400" tIns="25400" bIns="25400">
+          <a:bodyPr wrap="square" lIns="25400" tIns="25400" rIns="25400" bIns="25400" anchor="t">
             <a:spAutoFit/>
           </a:bodyPr>
           <a:lstStyle/>
@@ -10451,7 +11955,7 @@
           <a:noFill/>
         </p:spPr>
         <p:txBody>
-          <a:bodyPr wrap="square" anchor="t" lIns="25400" rIns="25400" tIns="25400" bIns="25400">
+          <a:bodyPr wrap="square" lIns="25400" tIns="25400" rIns="25400" bIns="25400" anchor="t">
             <a:spAutoFit/>
           </a:bodyPr>
           <a:lstStyle/>
@@ -10496,7 +12000,7 @@
           <a:noFill/>
         </p:spPr>
         <p:txBody>
-          <a:bodyPr wrap="square" anchor="t" lIns="25400" rIns="25400" tIns="25400" bIns="25400">
+          <a:bodyPr wrap="square" lIns="25400" tIns="25400" rIns="25400" bIns="25400" anchor="t">
             <a:spAutoFit/>
           </a:bodyPr>
           <a:lstStyle/>
@@ -10541,7 +12045,7 @@
           <a:noFill/>
         </p:spPr>
         <p:txBody>
-          <a:bodyPr wrap="square" anchor="t" lIns="25400" rIns="25400" tIns="25400" bIns="25400">
+          <a:bodyPr wrap="square" lIns="25400" tIns="25400" rIns="25400" bIns="25400" anchor="t">
             <a:spAutoFit/>
           </a:bodyPr>
           <a:lstStyle/>
@@ -10610,6 +12114,7 @@
           <a:lstStyle/>
           <a:p>
             <a:pPr algn="ctr"/>
+            <a:endParaRPr/>
           </a:p>
         </p:txBody>
       </p:sp>
@@ -10656,6 +12161,7 @@
           <a:lstStyle/>
           <a:p>
             <a:pPr algn="ctr"/>
+            <a:endParaRPr/>
           </a:p>
         </p:txBody>
       </p:sp>
@@ -10700,6 +12206,7 @@
           <a:lstStyle/>
           <a:p>
             <a:pPr algn="ctr"/>
+            <a:endParaRPr/>
           </a:p>
         </p:txBody>
       </p:sp>
@@ -10720,7 +12227,7 @@
           <a:noFill/>
         </p:spPr>
         <p:txBody>
-          <a:bodyPr wrap="square" anchor="t" lIns="25400" rIns="25400" tIns="25400" bIns="25400">
+          <a:bodyPr wrap="square" lIns="25400" tIns="25400" rIns="25400" bIns="25400" anchor="t">
             <a:spAutoFit/>
           </a:bodyPr>
           <a:lstStyle/>
@@ -10765,7 +12272,7 @@
           <a:noFill/>
         </p:spPr>
         <p:txBody>
-          <a:bodyPr wrap="square" anchor="t" lIns="25400" rIns="25400" tIns="25400" bIns="25400">
+          <a:bodyPr wrap="square" lIns="25400" tIns="25400" rIns="25400" bIns="25400" anchor="t">
             <a:spAutoFit/>
           </a:bodyPr>
           <a:lstStyle/>
@@ -10810,7 +12317,7 @@
           <a:noFill/>
         </p:spPr>
         <p:txBody>
-          <a:bodyPr wrap="square" anchor="t" lIns="25400" rIns="25400" tIns="25400" bIns="25400">
+          <a:bodyPr wrap="square" lIns="25400" tIns="25400" rIns="25400" bIns="25400" anchor="t">
             <a:spAutoFit/>
           </a:bodyPr>
           <a:lstStyle/>
@@ -10855,7 +12362,7 @@
           <a:noFill/>
         </p:spPr>
         <p:txBody>
-          <a:bodyPr wrap="square" anchor="t" lIns="25400" rIns="25400" tIns="25400" bIns="25400">
+          <a:bodyPr wrap="square" lIns="25400" tIns="25400" rIns="25400" bIns="25400" anchor="t">
             <a:spAutoFit/>
           </a:bodyPr>
           <a:lstStyle/>
@@ -10924,6 +12431,7 @@
           <a:lstStyle/>
           <a:p>
             <a:pPr algn="ctr"/>
+            <a:endParaRPr/>
           </a:p>
         </p:txBody>
       </p:sp>
@@ -10970,6 +12478,7 @@
           <a:lstStyle/>
           <a:p>
             <a:pPr algn="ctr"/>
+            <a:endParaRPr/>
           </a:p>
         </p:txBody>
       </p:sp>
@@ -11014,6 +12523,7 @@
           <a:lstStyle/>
           <a:p>
             <a:pPr algn="ctr"/>
+            <a:endParaRPr/>
           </a:p>
         </p:txBody>
       </p:sp>
@@ -11034,7 +12544,7 @@
           <a:noFill/>
         </p:spPr>
         <p:txBody>
-          <a:bodyPr wrap="square" anchor="t" lIns="25400" rIns="25400" tIns="25400" bIns="25400">
+          <a:bodyPr wrap="square" lIns="25400" tIns="25400" rIns="25400" bIns="25400" anchor="t">
             <a:spAutoFit/>
           </a:bodyPr>
           <a:lstStyle/>
@@ -11079,7 +12589,7 @@
           <a:noFill/>
         </p:spPr>
         <p:txBody>
-          <a:bodyPr wrap="square" anchor="t" lIns="25400" rIns="25400" tIns="25400" bIns="25400">
+          <a:bodyPr wrap="square" lIns="25400" tIns="25400" rIns="25400" bIns="25400" anchor="t">
             <a:spAutoFit/>
           </a:bodyPr>
           <a:lstStyle/>
@@ -11124,7 +12634,7 @@
           <a:noFill/>
         </p:spPr>
         <p:txBody>
-          <a:bodyPr wrap="square" anchor="t" lIns="25400" rIns="25400" tIns="25400" bIns="25400">
+          <a:bodyPr wrap="square" lIns="25400" tIns="25400" rIns="25400" bIns="25400" anchor="t">
             <a:spAutoFit/>
           </a:bodyPr>
           <a:lstStyle/>
@@ -11169,7 +12679,7 @@
           <a:noFill/>
         </p:spPr>
         <p:txBody>
-          <a:bodyPr wrap="square" anchor="t" lIns="25400" rIns="25400" tIns="25400" bIns="25400">
+          <a:bodyPr wrap="square" lIns="25400" tIns="25400" rIns="25400" bIns="25400" anchor="t">
             <a:spAutoFit/>
           </a:bodyPr>
           <a:lstStyle/>
@@ -11238,6 +12748,7 @@
           <a:lstStyle/>
           <a:p>
             <a:pPr algn="ctr"/>
+            <a:endParaRPr/>
           </a:p>
         </p:txBody>
       </p:sp>
@@ -11284,6 +12795,7 @@
           <a:lstStyle/>
           <a:p>
             <a:pPr algn="ctr"/>
+            <a:endParaRPr/>
           </a:p>
         </p:txBody>
       </p:sp>
@@ -11328,6 +12840,7 @@
           <a:lstStyle/>
           <a:p>
             <a:pPr algn="ctr"/>
+            <a:endParaRPr/>
           </a:p>
         </p:txBody>
       </p:sp>
@@ -11348,7 +12861,7 @@
           <a:noFill/>
         </p:spPr>
         <p:txBody>
-          <a:bodyPr wrap="square" anchor="t" lIns="25400" rIns="25400" tIns="25400" bIns="25400">
+          <a:bodyPr wrap="square" lIns="25400" tIns="25400" rIns="25400" bIns="25400" anchor="t">
             <a:spAutoFit/>
           </a:bodyPr>
           <a:lstStyle/>
@@ -11393,7 +12906,7 @@
           <a:noFill/>
         </p:spPr>
         <p:txBody>
-          <a:bodyPr wrap="square" anchor="t" lIns="25400" rIns="25400" tIns="25400" bIns="25400">
+          <a:bodyPr wrap="square" lIns="25400" tIns="25400" rIns="25400" bIns="25400" anchor="t">
             <a:spAutoFit/>
           </a:bodyPr>
           <a:lstStyle/>
@@ -11438,7 +12951,7 @@
           <a:noFill/>
         </p:spPr>
         <p:txBody>
-          <a:bodyPr wrap="square" anchor="t" lIns="25400" rIns="25400" tIns="25400" bIns="25400">
+          <a:bodyPr wrap="square" lIns="25400" tIns="25400" rIns="25400" bIns="25400" anchor="t">
             <a:spAutoFit/>
           </a:bodyPr>
           <a:lstStyle/>
@@ -11483,7 +12996,7 @@
           <a:noFill/>
         </p:spPr>
         <p:txBody>
-          <a:bodyPr wrap="square" anchor="t" lIns="25400" rIns="25400" tIns="25400" bIns="25400">
+          <a:bodyPr wrap="square" lIns="25400" tIns="25400" rIns="25400" bIns="25400" anchor="t">
             <a:spAutoFit/>
           </a:bodyPr>
           <a:lstStyle/>
@@ -11528,7 +13041,7 @@
           <a:noFill/>
         </p:spPr>
         <p:txBody>
-          <a:bodyPr wrap="square" anchor="t" lIns="25400" rIns="25400" tIns="25400" bIns="25400">
+          <a:bodyPr wrap="square" lIns="25400" tIns="25400" rIns="25400" bIns="25400" anchor="t">
             <a:spAutoFit/>
           </a:bodyPr>
           <a:lstStyle/>
@@ -11565,6 +13078,30 @@
           </a:p>
         </p:txBody>
       </p:sp>
+      <p:pic>
+        <p:nvPicPr>
+          <p:cNvPr id="35" name="Picture 34" descr="logo_b94f5789.png"/>
+          <p:cNvPicPr>
+            <a:picLocks noChangeAspect="1"/>
+          </p:cNvPicPr>
+          <p:nvPr/>
+        </p:nvPicPr>
+        <p:blipFill>
+          <a:blip r:embed="rId2"/>
+          <a:stretch>
+            <a:fillRect/>
+          </a:stretch>
+        </p:blipFill>
+        <p:spPr>
+          <a:xfrm>
+            <a:off x="10408615" y="310896"/>
+            <a:ext cx="1417320" cy="516798"/>
+          </a:xfrm>
+          <a:prstGeom prst="rect">
+            <a:avLst/>
+          </a:prstGeom>
+        </p:spPr>
+      </p:pic>
     </p:spTree>
   </p:cSld>
   <p:clrMapOvr>
@@ -11574,7 +13111,7 @@
 </file>
 
 <file path=ppt/slides/slide6.xml><?xml version="1.0" encoding="utf-8"?>
-<p:sld xmlns:a="http://schemas.openxmlformats.org/drawingml/2006/main" xmlns:p="http://schemas.openxmlformats.org/presentationml/2006/main" xmlns:r="http://schemas.openxmlformats.org/officeDocument/2006/relationships">
+<p:sld xmlns:a="http://schemas.openxmlformats.org/drawingml/2006/main" xmlns:r="http://schemas.openxmlformats.org/officeDocument/2006/relationships" xmlns:p="http://schemas.openxmlformats.org/presentationml/2006/main">
   <p:cSld>
     <p:spTree>
       <p:nvGrpSpPr>
@@ -11582,7 +13119,14 @@
         <p:cNvGrpSpPr/>
         <p:nvPr/>
       </p:nvGrpSpPr>
-      <p:grpSpPr/>
+      <p:grpSpPr>
+        <a:xfrm>
+          <a:off x="0" y="0"/>
+          <a:ext cx="0" cy="0"/>
+          <a:chOff x="0" y="0"/>
+          <a:chExt cx="0" cy="0"/>
+        </a:xfrm>
+      </p:grpSpPr>
       <p:sp>
         <p:nvSpPr>
           <p:cNvPr id="2" name="Rectangle 1"/>
@@ -11624,6 +13168,7 @@
           <a:lstStyle/>
           <a:p>
             <a:pPr algn="ctr"/>
+            <a:endParaRPr/>
           </a:p>
         </p:txBody>
       </p:sp>
@@ -11668,6 +13213,7 @@
           <a:lstStyle/>
           <a:p>
             <a:pPr algn="ctr"/>
+            <a:endParaRPr/>
           </a:p>
         </p:txBody>
       </p:sp>
@@ -11688,7 +13234,7 @@
           <a:noFill/>
         </p:spPr>
         <p:txBody>
-          <a:bodyPr wrap="square" anchor="t" lIns="25400" rIns="25400" tIns="25400" bIns="25400">
+          <a:bodyPr wrap="square" lIns="25400" tIns="25400" rIns="25400" bIns="25400" anchor="t">
             <a:spAutoFit/>
           </a:bodyPr>
           <a:lstStyle/>
@@ -11733,7 +13279,7 @@
           <a:noFill/>
         </p:spPr>
         <p:txBody>
-          <a:bodyPr wrap="square" anchor="t" lIns="25400" rIns="25400" tIns="25400" bIns="25400">
+          <a:bodyPr wrap="square" lIns="25400" tIns="25400" rIns="25400" bIns="25400" anchor="t">
             <a:spAutoFit/>
           </a:bodyPr>
           <a:lstStyle/>
@@ -11802,6 +13348,7 @@
           <a:lstStyle/>
           <a:p>
             <a:pPr algn="ctr"/>
+            <a:endParaRPr/>
           </a:p>
         </p:txBody>
       </p:sp>
@@ -11822,7 +13369,7 @@
           <a:noFill/>
         </p:spPr>
         <p:txBody>
-          <a:bodyPr wrap="square" anchor="t" lIns="25400" rIns="25400" tIns="25400" bIns="25400">
+          <a:bodyPr wrap="square" lIns="25400" tIns="25400" rIns="25400" bIns="25400" anchor="t">
             <a:spAutoFit/>
           </a:bodyPr>
           <a:lstStyle/>
@@ -11893,6 +13440,7 @@
           <a:lstStyle/>
           <a:p>
             <a:pPr algn="ctr"/>
+            <a:endParaRPr/>
           </a:p>
         </p:txBody>
       </p:sp>
@@ -11937,6 +13485,7 @@
           <a:lstStyle/>
           <a:p>
             <a:pPr algn="ctr"/>
+            <a:endParaRPr/>
           </a:p>
         </p:txBody>
       </p:sp>
@@ -11957,7 +13506,7 @@
           <a:noFill/>
         </p:spPr>
         <p:txBody>
-          <a:bodyPr wrap="square" anchor="t" lIns="25400" rIns="25400" tIns="25400" bIns="25400">
+          <a:bodyPr wrap="square" lIns="25400" tIns="25400" rIns="25400" bIns="25400" anchor="t">
             <a:spAutoFit/>
           </a:bodyPr>
           <a:lstStyle/>
@@ -12002,7 +13551,7 @@
           <a:noFill/>
         </p:spPr>
         <p:txBody>
-          <a:bodyPr wrap="square" anchor="t" lIns="25400" rIns="25400" tIns="25400" bIns="25400">
+          <a:bodyPr wrap="square" lIns="25400" tIns="25400" rIns="25400" bIns="25400" anchor="t">
             <a:spAutoFit/>
           </a:bodyPr>
           <a:lstStyle/>
@@ -12180,6 +13729,7 @@
           <a:lstStyle/>
           <a:p>
             <a:pPr algn="ctr"/>
+            <a:endParaRPr/>
           </a:p>
         </p:txBody>
       </p:sp>
@@ -12224,6 +13774,7 @@
           <a:lstStyle/>
           <a:p>
             <a:pPr algn="ctr"/>
+            <a:endParaRPr/>
           </a:p>
         </p:txBody>
       </p:sp>
@@ -12244,7 +13795,7 @@
           <a:noFill/>
         </p:spPr>
         <p:txBody>
-          <a:bodyPr wrap="square" anchor="t" lIns="25400" rIns="25400" tIns="25400" bIns="25400">
+          <a:bodyPr wrap="square" lIns="25400" tIns="25400" rIns="25400" bIns="25400" anchor="t">
             <a:spAutoFit/>
           </a:bodyPr>
           <a:lstStyle/>
@@ -12289,7 +13840,7 @@
           <a:noFill/>
         </p:spPr>
         <p:txBody>
-          <a:bodyPr wrap="square" anchor="t" lIns="25400" rIns="25400" tIns="25400" bIns="25400">
+          <a:bodyPr wrap="square" lIns="25400" tIns="25400" rIns="25400" bIns="25400" anchor="t">
             <a:spAutoFit/>
           </a:bodyPr>
           <a:lstStyle/>
@@ -12441,7 +13992,7 @@
           <a:noFill/>
         </p:spPr>
         <p:txBody>
-          <a:bodyPr wrap="square" anchor="t" lIns="25400" rIns="25400" tIns="25400" bIns="25400">
+          <a:bodyPr wrap="square" lIns="25400" tIns="25400" rIns="25400" bIns="25400" anchor="t">
             <a:spAutoFit/>
           </a:bodyPr>
           <a:lstStyle/>
@@ -12478,6 +14029,30 @@
           </a:p>
         </p:txBody>
       </p:sp>
+      <p:pic>
+        <p:nvPicPr>
+          <p:cNvPr id="19" name="Picture 18" descr="logo_b94f5789.png"/>
+          <p:cNvPicPr>
+            <a:picLocks noChangeAspect="1"/>
+          </p:cNvPicPr>
+          <p:nvPr/>
+        </p:nvPicPr>
+        <p:blipFill>
+          <a:blip r:embed="rId2"/>
+          <a:stretch>
+            <a:fillRect/>
+          </a:stretch>
+        </p:blipFill>
+        <p:spPr>
+          <a:xfrm>
+            <a:off x="10408615" y="310896"/>
+            <a:ext cx="1417320" cy="516798"/>
+          </a:xfrm>
+          <a:prstGeom prst="rect">
+            <a:avLst/>
+          </a:prstGeom>
+        </p:spPr>
+      </p:pic>
     </p:spTree>
   </p:cSld>
   <p:clrMapOvr>
@@ -12487,7 +14062,7 @@
 </file>
 
 <file path=ppt/slides/slide7.xml><?xml version="1.0" encoding="utf-8"?>
-<p:sld xmlns:a="http://schemas.openxmlformats.org/drawingml/2006/main" xmlns:p="http://schemas.openxmlformats.org/presentationml/2006/main" xmlns:r="http://schemas.openxmlformats.org/officeDocument/2006/relationships">
+<p:sld xmlns:a="http://schemas.openxmlformats.org/drawingml/2006/main" xmlns:r="http://schemas.openxmlformats.org/officeDocument/2006/relationships" xmlns:p="http://schemas.openxmlformats.org/presentationml/2006/main">
   <p:cSld>
     <p:spTree>
       <p:nvGrpSpPr>
@@ -12495,7 +14070,14 @@
         <p:cNvGrpSpPr/>
         <p:nvPr/>
       </p:nvGrpSpPr>
-      <p:grpSpPr/>
+      <p:grpSpPr>
+        <a:xfrm>
+          <a:off x="0" y="0"/>
+          <a:ext cx="0" cy="0"/>
+          <a:chOff x="0" y="0"/>
+          <a:chExt cx="0" cy="0"/>
+        </a:xfrm>
+      </p:grpSpPr>
       <p:sp>
         <p:nvSpPr>
           <p:cNvPr id="2" name="Rectangle 1"/>
@@ -12537,6 +14119,7 @@
           <a:lstStyle/>
           <a:p>
             <a:pPr algn="ctr"/>
+            <a:endParaRPr/>
           </a:p>
         </p:txBody>
       </p:sp>
@@ -12581,6 +14164,7 @@
           <a:lstStyle/>
           <a:p>
             <a:pPr algn="ctr"/>
+            <a:endParaRPr/>
           </a:p>
         </p:txBody>
       </p:sp>
@@ -12601,7 +14185,7 @@
           <a:noFill/>
         </p:spPr>
         <p:txBody>
-          <a:bodyPr wrap="square" anchor="t" lIns="25400" rIns="25400" tIns="25400" bIns="25400">
+          <a:bodyPr wrap="square" lIns="25400" tIns="25400" rIns="25400" bIns="25400" anchor="t">
             <a:spAutoFit/>
           </a:bodyPr>
           <a:lstStyle/>
@@ -12646,7 +14230,7 @@
           <a:noFill/>
         </p:spPr>
         <p:txBody>
-          <a:bodyPr wrap="square" anchor="t" lIns="25400" rIns="25400" tIns="25400" bIns="25400">
+          <a:bodyPr wrap="square" lIns="25400" tIns="25400" rIns="25400" bIns="25400" anchor="t">
             <a:spAutoFit/>
           </a:bodyPr>
           <a:lstStyle/>
@@ -12715,6 +14299,7 @@
           <a:lstStyle/>
           <a:p>
             <a:pPr algn="ctr"/>
+            <a:endParaRPr/>
           </a:p>
         </p:txBody>
       </p:sp>
@@ -12735,7 +14320,7 @@
           <a:noFill/>
         </p:spPr>
         <p:txBody>
-          <a:bodyPr wrap="square" anchor="t" lIns="25400" rIns="25400" tIns="25400" bIns="25400">
+          <a:bodyPr wrap="square" lIns="25400" tIns="25400" rIns="25400" bIns="25400" anchor="t">
             <a:spAutoFit/>
           </a:bodyPr>
           <a:lstStyle/>
@@ -13014,6 +14599,7 @@
           <a:lstStyle/>
           <a:p>
             <a:pPr algn="ctr"/>
+            <a:endParaRPr/>
           </a:p>
         </p:txBody>
       </p:sp>
@@ -13058,6 +14644,7 @@
           <a:lstStyle/>
           <a:p>
             <a:pPr algn="ctr"/>
+            <a:endParaRPr/>
           </a:p>
         </p:txBody>
       </p:sp>
@@ -13078,7 +14665,7 @@
           <a:noFill/>
         </p:spPr>
         <p:txBody>
-          <a:bodyPr wrap="square" anchor="t" lIns="25400" rIns="25400" tIns="25400" bIns="25400">
+          <a:bodyPr wrap="square" lIns="25400" tIns="25400" rIns="25400" bIns="25400" anchor="t">
             <a:spAutoFit/>
           </a:bodyPr>
           <a:lstStyle/>
@@ -13123,7 +14710,7 @@
           <a:noFill/>
         </p:spPr>
         <p:txBody>
-          <a:bodyPr wrap="square" anchor="t" lIns="25400" rIns="25400" tIns="25400" bIns="25400">
+          <a:bodyPr wrap="square" lIns="25400" tIns="25400" rIns="25400" bIns="25400" anchor="t">
             <a:spAutoFit/>
           </a:bodyPr>
           <a:lstStyle/>
@@ -13139,15 +14726,7 @@
                 <a:spcPts val="600"/>
               </a:spcAft>
             </a:pPr>
-            <a:r>
-              <a:rPr sz="1400" b="0">
-                <a:solidFill>
-                  <a:srgbClr val="64748B"/>
-                </a:solidFill>
-                <a:latin typeface="Segoe UI"/>
-              </a:rPr>
-              <a:t/>
-            </a:r>
+            <a:endParaRPr/>
           </a:p>
         </p:txBody>
       </p:sp>
@@ -13168,7 +14747,7 @@
           <a:noFill/>
         </p:spPr>
         <p:txBody>
-          <a:bodyPr wrap="square" anchor="t" lIns="25400" rIns="25400" tIns="25400" bIns="25400">
+          <a:bodyPr wrap="square" lIns="25400" tIns="25400" rIns="25400" bIns="25400" anchor="t">
             <a:spAutoFit/>
           </a:bodyPr>
           <a:lstStyle/>
@@ -13213,7 +14792,7 @@
           <a:noFill/>
         </p:spPr>
         <p:txBody>
-          <a:bodyPr wrap="square" anchor="t" lIns="25400" rIns="25400" tIns="25400" bIns="25400">
+          <a:bodyPr wrap="square" lIns="25400" tIns="25400" rIns="25400" bIns="25400" anchor="t">
             <a:spAutoFit/>
           </a:bodyPr>
           <a:lstStyle/>
@@ -13258,7 +14837,7 @@
           <a:noFill/>
         </p:spPr>
         <p:txBody>
-          <a:bodyPr wrap="square" anchor="t" lIns="25400" rIns="25400" tIns="25400" bIns="25400">
+          <a:bodyPr wrap="square" lIns="25400" tIns="25400" rIns="25400" bIns="25400" anchor="t">
             <a:spAutoFit/>
           </a:bodyPr>
           <a:lstStyle/>
@@ -13303,7 +14882,7 @@
           <a:noFill/>
         </p:spPr>
         <p:txBody>
-          <a:bodyPr wrap="square" anchor="t" lIns="25400" rIns="25400" tIns="25400" bIns="25400">
+          <a:bodyPr wrap="square" lIns="25400" tIns="25400" rIns="25400" bIns="25400" anchor="t">
             <a:spAutoFit/>
           </a:bodyPr>
           <a:lstStyle/>
@@ -13348,7 +14927,7 @@
           <a:noFill/>
         </p:spPr>
         <p:txBody>
-          <a:bodyPr wrap="square" anchor="t" lIns="25400" rIns="25400" tIns="25400" bIns="25400">
+          <a:bodyPr wrap="square" lIns="25400" tIns="25400" rIns="25400" bIns="25400" anchor="t">
             <a:spAutoFit/>
           </a:bodyPr>
           <a:lstStyle/>
@@ -13393,7 +14972,7 @@
           <a:noFill/>
         </p:spPr>
         <p:txBody>
-          <a:bodyPr wrap="square" anchor="t" lIns="25400" rIns="25400" tIns="25400" bIns="25400">
+          <a:bodyPr wrap="square" lIns="25400" tIns="25400" rIns="25400" bIns="25400" anchor="t">
             <a:spAutoFit/>
           </a:bodyPr>
           <a:lstStyle/>
@@ -13438,7 +15017,7 @@
           <a:noFill/>
         </p:spPr>
         <p:txBody>
-          <a:bodyPr wrap="square" anchor="t" lIns="25400" rIns="25400" tIns="25400" bIns="25400">
+          <a:bodyPr wrap="square" lIns="25400" tIns="25400" rIns="25400" bIns="25400" anchor="t">
             <a:spAutoFit/>
           </a:bodyPr>
           <a:lstStyle/>
@@ -13483,7 +15062,7 @@
           <a:noFill/>
         </p:spPr>
         <p:txBody>
-          <a:bodyPr wrap="square" anchor="t" lIns="25400" rIns="25400" tIns="25400" bIns="25400">
+          <a:bodyPr wrap="square" lIns="25400" tIns="25400" rIns="25400" bIns="25400" anchor="t">
             <a:spAutoFit/>
           </a:bodyPr>
           <a:lstStyle/>
@@ -13511,6 +15090,30 @@
           </a:p>
         </p:txBody>
       </p:sp>
+      <p:pic>
+        <p:nvPicPr>
+          <p:cNvPr id="21" name="Picture 20" descr="logo_b94f5789.png"/>
+          <p:cNvPicPr>
+            <a:picLocks noChangeAspect="1"/>
+          </p:cNvPicPr>
+          <p:nvPr/>
+        </p:nvPicPr>
+        <p:blipFill>
+          <a:blip r:embed="rId2"/>
+          <a:stretch>
+            <a:fillRect/>
+          </a:stretch>
+        </p:blipFill>
+        <p:spPr>
+          <a:xfrm>
+            <a:off x="10408615" y="310896"/>
+            <a:ext cx="1417320" cy="516798"/>
+          </a:xfrm>
+          <a:prstGeom prst="rect">
+            <a:avLst/>
+          </a:prstGeom>
+        </p:spPr>
+      </p:pic>
     </p:spTree>
   </p:cSld>
   <p:clrMapOvr>
@@ -13520,7 +15123,7 @@
 </file>
 
 <file path=ppt/slides/slide8.xml><?xml version="1.0" encoding="utf-8"?>
-<p:sld xmlns:a="http://schemas.openxmlformats.org/drawingml/2006/main" xmlns:p="http://schemas.openxmlformats.org/presentationml/2006/main" xmlns:r="http://schemas.openxmlformats.org/officeDocument/2006/relationships">
+<p:sld xmlns:a="http://schemas.openxmlformats.org/drawingml/2006/main" xmlns:r="http://schemas.openxmlformats.org/officeDocument/2006/relationships" xmlns:p="http://schemas.openxmlformats.org/presentationml/2006/main">
   <p:cSld>
     <p:spTree>
       <p:nvGrpSpPr>
@@ -13528,7 +15131,14 @@
         <p:cNvGrpSpPr/>
         <p:nvPr/>
       </p:nvGrpSpPr>
-      <p:grpSpPr/>
+      <p:grpSpPr>
+        <a:xfrm>
+          <a:off x="0" y="0"/>
+          <a:ext cx="0" cy="0"/>
+          <a:chOff x="0" y="0"/>
+          <a:chExt cx="0" cy="0"/>
+        </a:xfrm>
+      </p:grpSpPr>
       <p:sp>
         <p:nvSpPr>
           <p:cNvPr id="2" name="Rectangle 1"/>
@@ -13570,6 +15180,7 @@
           <a:lstStyle/>
           <a:p>
             <a:pPr algn="ctr"/>
+            <a:endParaRPr/>
           </a:p>
         </p:txBody>
       </p:sp>
@@ -13614,6 +15225,7 @@
           <a:lstStyle/>
           <a:p>
             <a:pPr algn="ctr"/>
+            <a:endParaRPr/>
           </a:p>
         </p:txBody>
       </p:sp>
@@ -13634,7 +15246,7 @@
           <a:noFill/>
         </p:spPr>
         <p:txBody>
-          <a:bodyPr wrap="square" anchor="t" lIns="25400" rIns="25400" tIns="25400" bIns="25400">
+          <a:bodyPr wrap="square" lIns="25400" tIns="25400" rIns="25400" bIns="25400" anchor="t">
             <a:spAutoFit/>
           </a:bodyPr>
           <a:lstStyle/>
@@ -13679,7 +15291,7 @@
           <a:noFill/>
         </p:spPr>
         <p:txBody>
-          <a:bodyPr wrap="square" anchor="t" lIns="25400" rIns="25400" tIns="25400" bIns="25400">
+          <a:bodyPr wrap="square" lIns="25400" tIns="25400" rIns="25400" bIns="25400" anchor="t">
             <a:spAutoFit/>
           </a:bodyPr>
           <a:lstStyle/>
@@ -13748,6 +15360,7 @@
           <a:lstStyle/>
           <a:p>
             <a:pPr algn="ctr"/>
+            <a:endParaRPr/>
           </a:p>
         </p:txBody>
       </p:sp>
@@ -13760,7 +15373,7 @@
         <p:spPr>
           <a:xfrm>
             <a:off x="658368" y="1874519"/>
-            <a:ext cx="10789920" cy="640080"/>
+            <a:ext cx="10789920" cy="457200"/>
           </a:xfrm>
           <a:prstGeom prst="rect">
             <a:avLst/>
@@ -13768,7 +15381,7 @@
           <a:noFill/>
         </p:spPr>
         <p:txBody>
-          <a:bodyPr wrap="square" anchor="t" lIns="25400" rIns="25400" tIns="25400" bIns="25400">
+          <a:bodyPr wrap="square" lIns="25400" tIns="25400" rIns="25400" bIns="25400" anchor="t">
             <a:spAutoFit/>
           </a:bodyPr>
           <a:lstStyle/>
@@ -13785,7 +15398,7 @@
               </a:spcAft>
             </a:pPr>
             <a:r>
-              <a:rPr sz="1800" b="0">
+              <a:rPr sz="1700" b="0">
                 <a:solidFill>
                   <a:srgbClr val="475569"/>
                 </a:solidFill>
@@ -13804,8 +15417,8 @@
         </p:nvSpPr>
         <p:spPr>
           <a:xfrm>
-            <a:off x="658368" y="2743199"/>
-            <a:ext cx="3520440" cy="2651760"/>
+            <a:off x="658368" y="2468879"/>
+            <a:ext cx="3520440" cy="1965960"/>
           </a:xfrm>
           <a:prstGeom prst="roundRect">
             <a:avLst/>
@@ -13839,6 +15452,7 @@
           <a:lstStyle/>
           <a:p>
             <a:pPr algn="ctr"/>
+            <a:endParaRPr/>
           </a:p>
         </p:txBody>
       </p:sp>
@@ -13850,8 +15464,8 @@
         </p:nvSpPr>
         <p:spPr>
           <a:xfrm>
-            <a:off x="658368" y="2743199"/>
-            <a:ext cx="109728" cy="2651760"/>
+            <a:off x="658368" y="2468879"/>
+            <a:ext cx="109728" cy="1965960"/>
           </a:xfrm>
           <a:prstGeom prst="rect">
             <a:avLst/>
@@ -13883,6 +15497,7 @@
           <a:lstStyle/>
           <a:p>
             <a:pPr algn="ctr"/>
+            <a:endParaRPr/>
           </a:p>
         </p:txBody>
       </p:sp>
@@ -13894,7 +15509,7 @@
         </p:nvSpPr>
         <p:spPr>
           <a:xfrm>
-            <a:off x="950976" y="2926079"/>
+            <a:off x="950976" y="2651759"/>
             <a:ext cx="3063240" cy="457200"/>
           </a:xfrm>
           <a:prstGeom prst="rect">
@@ -13903,7 +15518,7 @@
           <a:noFill/>
         </p:spPr>
         <p:txBody>
-          <a:bodyPr wrap="square" anchor="t" lIns="25400" rIns="25400" tIns="25400" bIns="25400">
+          <a:bodyPr wrap="square" lIns="25400" tIns="25400" rIns="25400" bIns="25400" anchor="t">
             <a:spAutoFit/>
           </a:bodyPr>
           <a:lstStyle/>
@@ -13920,7 +15535,7 @@
               </a:spcAft>
             </a:pPr>
             <a:r>
-              <a:rPr sz="1800" b="1">
+              <a:rPr sz="1700" b="1">
                 <a:solidFill>
                   <a:srgbClr val="0F172A"/>
                 </a:solidFill>
@@ -13939,8 +15554,8 @@
         </p:nvSpPr>
         <p:spPr>
           <a:xfrm>
-            <a:off x="950976" y="3401567"/>
-            <a:ext cx="3063240" cy="1874520"/>
+            <a:off x="950976" y="3127247"/>
+            <a:ext cx="3063240" cy="1188720"/>
           </a:xfrm>
           <a:prstGeom prst="rect">
             <a:avLst/>
@@ -13948,7 +15563,7 @@
           <a:noFill/>
         </p:spPr>
         <p:txBody>
-          <a:bodyPr wrap="square" anchor="t" lIns="25400" rIns="25400" tIns="25400" bIns="25400">
+          <a:bodyPr wrap="square" lIns="25400" tIns="25400" rIns="25400" bIns="25400" anchor="t">
             <a:spAutoFit/>
           </a:bodyPr>
           <a:lstStyle/>
@@ -13965,15 +15580,13 @@
               </a:spcAft>
             </a:pPr>
             <a:r>
-              <a:rPr sz="1400" b="0">
+              <a:rPr sz="1350" b="0">
                 <a:solidFill>
                   <a:srgbClr val="64748B"/>
                 </a:solidFill>
                 <a:latin typeface="Segoe UI"/>
               </a:rPr>
-              <a:t>One row per commit:
-Date + time, Author, Summary, Hours, Status.
-Your full timesheet log.</a:t>
+              <a:t>One row per commit: Date + time, Author, Summary, Hours, Status.</a:t>
             </a:r>
           </a:p>
         </p:txBody>
@@ -13986,8 +15599,8 @@
         </p:nvSpPr>
         <p:spPr>
           <a:xfrm>
-            <a:off x="4343400" y="2743199"/>
-            <a:ext cx="3520440" cy="2651760"/>
+            <a:off x="4343400" y="2468879"/>
+            <a:ext cx="3520440" cy="1965960"/>
           </a:xfrm>
           <a:prstGeom prst="roundRect">
             <a:avLst/>
@@ -14021,6 +15634,7 @@
           <a:lstStyle/>
           <a:p>
             <a:pPr algn="ctr"/>
+            <a:endParaRPr/>
           </a:p>
         </p:txBody>
       </p:sp>
@@ -14032,8 +15646,8 @@
         </p:nvSpPr>
         <p:spPr>
           <a:xfrm>
-            <a:off x="4343400" y="2743199"/>
-            <a:ext cx="109728" cy="2651760"/>
+            <a:off x="4343400" y="2468879"/>
+            <a:ext cx="109728" cy="1965960"/>
           </a:xfrm>
           <a:prstGeom prst="rect">
             <a:avLst/>
@@ -14065,6 +15679,7 @@
           <a:lstStyle/>
           <a:p>
             <a:pPr algn="ctr"/>
+            <a:endParaRPr/>
           </a:p>
         </p:txBody>
       </p:sp>
@@ -14076,7 +15691,7 @@
         </p:nvSpPr>
         <p:spPr>
           <a:xfrm>
-            <a:off x="4636008" y="2926079"/>
+            <a:off x="4636008" y="2651759"/>
             <a:ext cx="3063240" cy="457200"/>
           </a:xfrm>
           <a:prstGeom prst="rect">
@@ -14085,7 +15700,7 @@
           <a:noFill/>
         </p:spPr>
         <p:txBody>
-          <a:bodyPr wrap="square" anchor="t" lIns="25400" rIns="25400" tIns="25400" bIns="25400">
+          <a:bodyPr wrap="square" lIns="25400" tIns="25400" rIns="25400" bIns="25400" anchor="t">
             <a:spAutoFit/>
           </a:bodyPr>
           <a:lstStyle/>
@@ -14102,7 +15717,7 @@
               </a:spcAft>
             </a:pPr>
             <a:r>
-              <a:rPr sz="1800" b="1">
+              <a:rPr sz="1700" b="1">
                 <a:solidFill>
                   <a:srgbClr val="0F172A"/>
                 </a:solidFill>
@@ -14121,8 +15736,8 @@
         </p:nvSpPr>
         <p:spPr>
           <a:xfrm>
-            <a:off x="4636008" y="3401567"/>
-            <a:ext cx="3063240" cy="1874520"/>
+            <a:off x="4636008" y="3127247"/>
+            <a:ext cx="3063240" cy="1188720"/>
           </a:xfrm>
           <a:prstGeom prst="rect">
             <a:avLst/>
@@ -14130,7 +15745,7 @@
           <a:noFill/>
         </p:spPr>
         <p:txBody>
-          <a:bodyPr wrap="square" anchor="t" lIns="25400" rIns="25400" tIns="25400" bIns="25400">
+          <a:bodyPr wrap="square" lIns="25400" tIns="25400" rIns="25400" bIns="25400" anchor="t">
             <a:spAutoFit/>
           </a:bodyPr>
           <a:lstStyle/>
@@ -14147,14 +15762,13 @@
               </a:spcAft>
             </a:pPr>
             <a:r>
-              <a:rPr sz="1400" b="0">
+              <a:rPr sz="1350" b="0">
                 <a:solidFill>
                   <a:srgbClr val="64748B"/>
                 </a:solidFill>
                 <a:latin typeface="Segoe UI"/>
               </a:rPr>
-              <a:t>One row per week:
-Total hours, top author, an AI-written standup, and blockers.</a:t>
+              <a:t>One row per week: total hours, top author, AI standup, blockers.</a:t>
             </a:r>
           </a:p>
         </p:txBody>
@@ -14167,8 +15781,8 @@
         </p:nvSpPr>
         <p:spPr>
           <a:xfrm>
-            <a:off x="8028431" y="2743199"/>
-            <a:ext cx="3520440" cy="2651760"/>
+            <a:off x="8028431" y="2468879"/>
+            <a:ext cx="3520440" cy="1965960"/>
           </a:xfrm>
           <a:prstGeom prst="roundRect">
             <a:avLst/>
@@ -14202,6 +15816,7 @@
           <a:lstStyle/>
           <a:p>
             <a:pPr algn="ctr"/>
+            <a:endParaRPr/>
           </a:p>
         </p:txBody>
       </p:sp>
@@ -14213,8 +15828,8 @@
         </p:nvSpPr>
         <p:spPr>
           <a:xfrm>
-            <a:off x="8028431" y="2743199"/>
-            <a:ext cx="109728" cy="2651760"/>
+            <a:off x="8028431" y="2468879"/>
+            <a:ext cx="109728" cy="1965960"/>
           </a:xfrm>
           <a:prstGeom prst="rect">
             <a:avLst/>
@@ -14246,6 +15861,7 @@
           <a:lstStyle/>
           <a:p>
             <a:pPr algn="ctr"/>
+            <a:endParaRPr/>
           </a:p>
         </p:txBody>
       </p:sp>
@@ -14257,7 +15873,7 @@
         </p:nvSpPr>
         <p:spPr>
           <a:xfrm>
-            <a:off x="8321039" y="2926079"/>
+            <a:off x="8321039" y="2651759"/>
             <a:ext cx="3063240" cy="457200"/>
           </a:xfrm>
           <a:prstGeom prst="rect">
@@ -14266,7 +15882,7 @@
           <a:noFill/>
         </p:spPr>
         <p:txBody>
-          <a:bodyPr wrap="square" anchor="t" lIns="25400" rIns="25400" tIns="25400" bIns="25400">
+          <a:bodyPr wrap="square" lIns="25400" tIns="25400" rIns="25400" bIns="25400" anchor="t">
             <a:spAutoFit/>
           </a:bodyPr>
           <a:lstStyle/>
@@ -14283,7 +15899,7 @@
               </a:spcAft>
             </a:pPr>
             <a:r>
-              <a:rPr sz="1800" b="1">
+              <a:rPr sz="1700" b="1">
                 <a:solidFill>
                   <a:srgbClr val="0F172A"/>
                 </a:solidFill>
@@ -14302,8 +15918,8 @@
         </p:nvSpPr>
         <p:spPr>
           <a:xfrm>
-            <a:off x="8321039" y="3401567"/>
-            <a:ext cx="3063240" cy="1874520"/>
+            <a:off x="8321039" y="3127247"/>
+            <a:ext cx="3063240" cy="1188720"/>
           </a:xfrm>
           <a:prstGeom prst="rect">
             <a:avLst/>
@@ -14311,7 +15927,7 @@
           <a:noFill/>
         </p:spPr>
         <p:txBody>
-          <a:bodyPr wrap="square" anchor="t" lIns="25400" rIns="25400" tIns="25400" bIns="25400">
+          <a:bodyPr wrap="square" lIns="25400" tIns="25400" rIns="25400" bIns="25400" anchor="t">
             <a:spAutoFit/>
           </a:bodyPr>
           <a:lstStyle/>
@@ -14328,29 +15944,74 @@
               </a:spcAft>
             </a:pPr>
             <a:r>
-              <a:rPr sz="1400" b="0">
+              <a:rPr sz="1350" b="0">
                 <a:solidFill>
                   <a:srgbClr val="64748B"/>
                 </a:solidFill>
                 <a:latin typeface="Segoe UI"/>
               </a:rPr>
-              <a:t>Hourly rate per author
-(Author, Client, Rate).
-Used by the chat for billing math.</a:t>
-            </a:r>
-          </a:p>
-        </p:txBody>
-      </p:sp>
-      <p:sp>
-        <p:nvSpPr>
-          <p:cNvPr id="20" name="TextBox 19"/>
+              <a:t>Hourly rate per author (Author, Client, Rate) — used for billing.</a:t>
+            </a:r>
+          </a:p>
+        </p:txBody>
+      </p:sp>
+      <p:sp>
+        <p:nvSpPr>
+          <p:cNvPr id="20" name="Rounded Rectangle 19"/>
+          <p:cNvSpPr/>
+          <p:nvPr/>
+        </p:nvSpPr>
+        <p:spPr>
+          <a:xfrm>
+            <a:off x="658368" y="4617719"/>
+            <a:ext cx="10835640" cy="1600200"/>
+          </a:xfrm>
+          <a:prstGeom prst="roundRect">
+            <a:avLst/>
+          </a:prstGeom>
+          <a:solidFill>
+            <a:srgbClr val="F6F8FC"/>
+          </a:solidFill>
+          <a:ln w="19050">
+            <a:solidFill>
+              <a:srgbClr val="A7B1C4"/>
+            </a:solidFill>
+          </a:ln>
+          <a:effectLst/>
+        </p:spPr>
+        <p:style>
+          <a:lnRef idx="1">
+            <a:schemeClr val="accent1"/>
+          </a:lnRef>
+          <a:fillRef idx="3">
+            <a:schemeClr val="accent1"/>
+          </a:fillRef>
+          <a:effectRef idx="2">
+            <a:schemeClr val="accent1"/>
+          </a:effectRef>
+          <a:fontRef idx="minor">
+            <a:schemeClr val="lt1"/>
+          </a:fontRef>
+        </p:style>
+        <p:txBody>
+          <a:bodyPr rtlCol="0" anchor="ctr"/>
+          <a:lstStyle/>
+          <a:p>
+            <a:pPr algn="ctr"/>
+            <a:endParaRPr/>
+          </a:p>
+        </p:txBody>
+      </p:sp>
+      <p:sp>
+        <p:nvSpPr>
+          <p:cNvPr id="21" name="TextBox 20"/>
           <p:cNvSpPr txBox="1"/>
           <p:nvPr/>
         </p:nvSpPr>
         <p:spPr>
           <a:xfrm>
-            <a:off x="658368" y="5623559"/>
-            <a:ext cx="10881360" cy="457200"/>
+            <a:off x="658368" y="4850891"/>
+            <a:ext cx="10835640" cy="548640"/>
           </a:xfrm>
           <a:prstGeom prst="rect">
             <a:avLst/>
@@ -14358,12 +16019,12 @@
           <a:noFill/>
         </p:spPr>
         <p:txBody>
-          <a:bodyPr wrap="square" anchor="t" lIns="25400" rIns="25400" tIns="25400" bIns="25400">
+          <a:bodyPr wrap="square" lIns="25400" tIns="25400" rIns="25400" bIns="25400" anchor="t">
             <a:spAutoFit/>
           </a:bodyPr>
           <a:lstStyle/>
           <a:p>
-            <a:pPr algn="l">
+            <a:pPr algn="ctr">
               <a:lnSpc>
                 <a:spcPct val="105000"/>
               </a:lnSpc>
@@ -14375,17 +16036,131 @@
               </a:spcAft>
             </a:pPr>
             <a:r>
-              <a:rPr sz="1500" b="0">
+              <a:rPr sz="3400" b="0">
                 <a:solidFill>
                   <a:srgbClr val="64748B"/>
                 </a:solidFill>
                 <a:latin typeface="Segoe UI"/>
               </a:rPr>
-              <a:t>Any tool or teammate can read the same tabs — it doubles as a lightweight API.</a:t>
-            </a:r>
-          </a:p>
-        </p:txBody>
-      </p:sp>
+              <a:t>🖼</a:t>
+            </a:r>
+          </a:p>
+        </p:txBody>
+      </p:sp>
+      <p:sp>
+        <p:nvSpPr>
+          <p:cNvPr id="22" name="TextBox 21"/>
+          <p:cNvSpPr txBox="1"/>
+          <p:nvPr/>
+        </p:nvSpPr>
+        <p:spPr>
+          <a:xfrm>
+            <a:off x="658368" y="5436107"/>
+            <a:ext cx="10835640" cy="502920"/>
+          </a:xfrm>
+          <a:prstGeom prst="rect">
+            <a:avLst/>
+          </a:prstGeom>
+          <a:noFill/>
+        </p:spPr>
+        <p:txBody>
+          <a:bodyPr wrap="square" lIns="25400" tIns="25400" rIns="25400" bIns="25400" anchor="t">
+            <a:spAutoFit/>
+          </a:bodyPr>
+          <a:lstStyle/>
+          <a:p>
+            <a:pPr algn="ctr">
+              <a:lnSpc>
+                <a:spcPct val="105000"/>
+              </a:lnSpc>
+              <a:spcBef>
+                <a:spcPts val="0"/>
+              </a:spcBef>
+              <a:spcAft>
+                <a:spcPts val="600"/>
+              </a:spcAft>
+            </a:pPr>
+            <a:r>
+              <a:rPr sz="1400" b="1">
+                <a:solidFill>
+                  <a:srgbClr val="0F172A"/>
+                </a:solidFill>
+                <a:latin typeface="Segoe UI Semibold"/>
+              </a:rPr>
+              <a:t>Screenshot 2 — The Google Sheet (online, 3 tabs)</a:t>
+            </a:r>
+          </a:p>
+        </p:txBody>
+      </p:sp>
+      <p:sp>
+        <p:nvSpPr>
+          <p:cNvPr id="23" name="TextBox 22"/>
+          <p:cNvSpPr txBox="1"/>
+          <p:nvPr/>
+        </p:nvSpPr>
+        <p:spPr>
+          <a:xfrm>
+            <a:off x="658368" y="5833871"/>
+            <a:ext cx="10835640" cy="320040"/>
+          </a:xfrm>
+          <a:prstGeom prst="rect">
+            <a:avLst/>
+          </a:prstGeom>
+          <a:noFill/>
+        </p:spPr>
+        <p:txBody>
+          <a:bodyPr wrap="square" lIns="25400" tIns="25400" rIns="25400" bIns="25400" anchor="t">
+            <a:spAutoFit/>
+          </a:bodyPr>
+          <a:lstStyle/>
+          <a:p>
+            <a:pPr algn="ctr">
+              <a:lnSpc>
+                <a:spcPct val="105000"/>
+              </a:lnSpc>
+              <a:spcBef>
+                <a:spcPts val="0"/>
+              </a:spcBef>
+              <a:spcAft>
+                <a:spcPts val="600"/>
+              </a:spcAft>
+            </a:pPr>
+            <a:r>
+              <a:rPr sz="1100" b="0">
+                <a:solidFill>
+                  <a:srgbClr val="64748B"/>
+                </a:solidFill>
+                <a:latin typeface="Segoe UI"/>
+              </a:rPr>
+              <a:t>paste screenshot here</a:t>
+            </a:r>
+          </a:p>
+        </p:txBody>
+      </p:sp>
+      <p:pic>
+        <p:nvPicPr>
+          <p:cNvPr id="24" name="Picture 23" descr="logo_b94f5789.png"/>
+          <p:cNvPicPr>
+            <a:picLocks noChangeAspect="1"/>
+          </p:cNvPicPr>
+          <p:nvPr/>
+        </p:nvPicPr>
+        <p:blipFill>
+          <a:blip r:embed="rId2"/>
+          <a:stretch>
+            <a:fillRect/>
+          </a:stretch>
+        </p:blipFill>
+        <p:spPr>
+          <a:xfrm>
+            <a:off x="10408615" y="310896"/>
+            <a:ext cx="1417320" cy="516798"/>
+          </a:xfrm>
+          <a:prstGeom prst="rect">
+            <a:avLst/>
+          </a:prstGeom>
+        </p:spPr>
+      </p:pic>
     </p:spTree>
   </p:cSld>
   <p:clrMapOvr>
@@ -14395,7 +16170,7 @@
 </file>
 
 <file path=ppt/slides/slide9.xml><?xml version="1.0" encoding="utf-8"?>
-<p:sld xmlns:a="http://schemas.openxmlformats.org/drawingml/2006/main" xmlns:p="http://schemas.openxmlformats.org/presentationml/2006/main" xmlns:r="http://schemas.openxmlformats.org/officeDocument/2006/relationships">
+<p:sld xmlns:a="http://schemas.openxmlformats.org/drawingml/2006/main" xmlns:r="http://schemas.openxmlformats.org/officeDocument/2006/relationships" xmlns:p="http://schemas.openxmlformats.org/presentationml/2006/main">
   <p:cSld>
     <p:spTree>
       <p:nvGrpSpPr>
@@ -14403,7 +16178,14 @@
         <p:cNvGrpSpPr/>
         <p:nvPr/>
       </p:nvGrpSpPr>
-      <p:grpSpPr/>
+      <p:grpSpPr>
+        <a:xfrm>
+          <a:off x="0" y="0"/>
+          <a:ext cx="0" cy="0"/>
+          <a:chOff x="0" y="0"/>
+          <a:chExt cx="0" cy="0"/>
+        </a:xfrm>
+      </p:grpSpPr>
       <p:sp>
         <p:nvSpPr>
           <p:cNvPr id="2" name="Rectangle 1"/>
@@ -14445,6 +16227,7 @@
           <a:lstStyle/>
           <a:p>
             <a:pPr algn="ctr"/>
+            <a:endParaRPr/>
           </a:p>
         </p:txBody>
       </p:sp>
@@ -14489,6 +16272,7 @@
           <a:lstStyle/>
           <a:p>
             <a:pPr algn="ctr"/>
+            <a:endParaRPr/>
           </a:p>
         </p:txBody>
       </p:sp>
@@ -14509,7 +16293,7 @@
           <a:noFill/>
         </p:spPr>
         <p:txBody>
-          <a:bodyPr wrap="square" anchor="t" lIns="25400" rIns="25400" tIns="25400" bIns="25400">
+          <a:bodyPr wrap="square" lIns="25400" tIns="25400" rIns="25400" bIns="25400" anchor="t">
             <a:spAutoFit/>
           </a:bodyPr>
           <a:lstStyle/>
@@ -14554,7 +16338,7 @@
           <a:noFill/>
         </p:spPr>
         <p:txBody>
-          <a:bodyPr wrap="square" anchor="t" lIns="25400" rIns="25400" tIns="25400" bIns="25400">
+          <a:bodyPr wrap="square" lIns="25400" tIns="25400" rIns="25400" bIns="25400" anchor="t">
             <a:spAutoFit/>
           </a:bodyPr>
           <a:lstStyle/>
@@ -14577,7 +16361,7 @@
                 </a:solidFill>
                 <a:latin typeface="Segoe UI Semibold"/>
               </a:rPr>
-              <a:t>Generate, review, export</a:t>
+              <a:t>Generate, review &amp; export</a:t>
             </a:r>
           </a:p>
         </p:txBody>
@@ -14623,6 +16407,7 @@
           <a:lstStyle/>
           <a:p>
             <a:pPr algn="ctr"/>
+            <a:endParaRPr/>
           </a:p>
         </p:txBody>
       </p:sp>
@@ -14634,8 +16419,8 @@
         </p:nvSpPr>
         <p:spPr>
           <a:xfrm>
-            <a:off x="658368" y="1874519"/>
-            <a:ext cx="10789920" cy="4526281"/>
+            <a:off x="658368" y="1920239"/>
+            <a:ext cx="5852160" cy="4480561"/>
           </a:xfrm>
           <a:prstGeom prst="rect">
             <a:avLst/>
@@ -14653,11 +16438,11 @@
                 <a:spcPct val="108000"/>
               </a:lnSpc>
               <a:spcAft>
-                <a:spcPts val="1400"/>
-              </a:spcAft>
-            </a:pPr>
-            <a:r>
-              <a:rPr sz="1200">
+                <a:spcPts val="1300"/>
+              </a:spcAft>
+            </a:pPr>
+            <a:r>
+              <a:rPr sz="1050">
                 <a:solidFill>
                   <a:srgbClr val="2563EB"/>
                 </a:solidFill>
@@ -14666,7 +16451,7 @@
               <a:t>●  </a:t>
             </a:r>
             <a:r>
-              <a:rPr sz="1800" b="1">
+              <a:rPr sz="1650" b="1">
                 <a:solidFill>
                   <a:srgbClr val="475569"/>
                 </a:solidFill>
@@ -14675,13 +16460,13 @@
               <a:t>One click to generate</a:t>
             </a:r>
             <a:r>
-              <a:rPr sz="1800">
+              <a:rPr sz="1650">
                 <a:solidFill>
                   <a:srgbClr val="64748B"/>
                 </a:solidFill>
                 <a:latin typeface="Segoe UI"/>
               </a:rPr>
-              <a:t>  —  pull commits for the last 7–90 days and build the table</a:t>
+              <a:t>  —  commits for the last 7–90 days</a:t>
             </a:r>
           </a:p>
           <a:p>
@@ -14690,11 +16475,11 @@
                 <a:spcPct val="108000"/>
               </a:lnSpc>
               <a:spcAft>
-                <a:spcPts val="1400"/>
-              </a:spcAft>
-            </a:pPr>
-            <a:r>
-              <a:rPr sz="1200">
+                <a:spcPts val="1300"/>
+              </a:spcAft>
+            </a:pPr>
+            <a:r>
+              <a:rPr sz="1050">
                 <a:solidFill>
                   <a:srgbClr val="2563EB"/>
                 </a:solidFill>
@@ -14703,7 +16488,7 @@
               <a:t>●  </a:t>
             </a:r>
             <a:r>
-              <a:rPr sz="1800" b="1">
+              <a:rPr sz="1650" b="1">
                 <a:solidFill>
                   <a:srgbClr val="475569"/>
                 </a:solidFill>
@@ -14712,13 +16497,13 @@
               <a:t>Live stat cards</a:t>
             </a:r>
             <a:r>
-              <a:rPr sz="1800">
+              <a:rPr sz="1650">
                 <a:solidFill>
                   <a:srgbClr val="64748B"/>
                 </a:solidFill>
                 <a:latin typeface="Segoe UI"/>
               </a:rPr>
-              <a:t>  —  total commits, hours, completion %, contributors</a:t>
+              <a:t>  —  commits, hours, completion %, contributors</a:t>
             </a:r>
           </a:p>
           <a:p>
@@ -14727,11 +16512,11 @@
                 <a:spcPct val="108000"/>
               </a:lnSpc>
               <a:spcAft>
-                <a:spcPts val="1400"/>
-              </a:spcAft>
-            </a:pPr>
-            <a:r>
-              <a:rPr sz="1200">
+                <a:spcPts val="1300"/>
+              </a:spcAft>
+            </a:pPr>
+            <a:r>
+              <a:rPr sz="1050">
                 <a:solidFill>
                   <a:srgbClr val="2563EB"/>
                 </a:solidFill>
@@ -14740,7 +16525,7 @@
               <a:t>●  </a:t>
             </a:r>
             <a:r>
-              <a:rPr sz="1800" b="1">
+              <a:rPr sz="1650" b="1">
                 <a:solidFill>
                   <a:srgbClr val="475569"/>
                 </a:solidFill>
@@ -14749,7 +16534,7 @@
               <a:t>Editable, spreadsheet-style table</a:t>
             </a:r>
             <a:r>
-              <a:rPr sz="1800">
+              <a:rPr sz="1650">
                 <a:solidFill>
                   <a:srgbClr val="64748B"/>
                 </a:solidFill>
@@ -14764,11 +16549,11 @@
                 <a:spcPct val="108000"/>
               </a:lnSpc>
               <a:spcAft>
-                <a:spcPts val="1400"/>
-              </a:spcAft>
-            </a:pPr>
-            <a:r>
-              <a:rPr sz="1200">
+                <a:spcPts val="1300"/>
+              </a:spcAft>
+            </a:pPr>
+            <a:r>
+              <a:rPr sz="1050">
                 <a:solidFill>
                   <a:srgbClr val="2563EB"/>
                 </a:solidFill>
@@ -14777,7 +16562,7 @@
               <a:t>●  </a:t>
             </a:r>
             <a:r>
-              <a:rPr sz="1800" b="1">
+              <a:rPr sz="1650" b="1">
                 <a:solidFill>
                   <a:srgbClr val="475569"/>
                 </a:solidFill>
@@ -14786,13 +16571,13 @@
               <a:t>Business rules</a:t>
             </a:r>
             <a:r>
-              <a:rPr sz="1800">
+              <a:rPr sz="1650">
                 <a:solidFill>
                   <a:srgbClr val="64748B"/>
                 </a:solidFill>
                 <a:latin typeface="Segoe UI"/>
               </a:rPr>
-              <a:t>  —  cap hours/day, include weekends, flag short days</a:t>
+              <a:t>  —  cap hours/day, weekends, flag short days</a:t>
             </a:r>
           </a:p>
           <a:p>
@@ -14801,11 +16586,11 @@
                 <a:spcPct val="108000"/>
               </a:lnSpc>
               <a:spcAft>
-                <a:spcPts val="1400"/>
-              </a:spcAft>
-            </a:pPr>
-            <a:r>
-              <a:rPr sz="1200">
+                <a:spcPts val="1300"/>
+              </a:spcAft>
+            </a:pPr>
+            <a:r>
+              <a:rPr sz="1050">
                 <a:solidFill>
                   <a:srgbClr val="2563EB"/>
                 </a:solidFill>
@@ -14814,7 +16599,7 @@
               <a:t>●  </a:t>
             </a:r>
             <a:r>
-              <a:rPr sz="1800" b="1">
+              <a:rPr sz="1650" b="1">
                 <a:solidFill>
                   <a:srgbClr val="475569"/>
                 </a:solidFill>
@@ -14823,13 +16608,13 @@
               <a:t>Author dropdown</a:t>
             </a:r>
             <a:r>
-              <a:rPr sz="1800">
+              <a:rPr sz="1650">
                 <a:solidFill>
                   <a:srgbClr val="64748B"/>
                 </a:solidFill>
                 <a:latin typeface="Segoe UI"/>
               </a:rPr>
-              <a:t>  —  auto-filled from the repo — filter to just you</a:t>
+              <a:t>  —  auto-filled from the repo</a:t>
             </a:r>
           </a:p>
           <a:p>
@@ -14838,11 +16623,11 @@
                 <a:spcPct val="108000"/>
               </a:lnSpc>
               <a:spcAft>
-                <a:spcPts val="1400"/>
-              </a:spcAft>
-            </a:pPr>
-            <a:r>
-              <a:rPr sz="1200">
+                <a:spcPts val="1300"/>
+              </a:spcAft>
+            </a:pPr>
+            <a:r>
+              <a:rPr sz="1050">
                 <a:solidFill>
                   <a:srgbClr val="2563EB"/>
                 </a:solidFill>
@@ -14851,7 +16636,7 @@
               <a:t>●  </a:t>
             </a:r>
             <a:r>
-              <a:rPr sz="1800" b="1">
+              <a:rPr sz="1650" b="1">
                 <a:solidFill>
                   <a:srgbClr val="475569"/>
                 </a:solidFill>
@@ -14860,17 +16645,223 @@
               <a:t>Export to Google Sheets</a:t>
             </a:r>
             <a:r>
-              <a:rPr sz="1800">
+              <a:rPr sz="1650">
                 <a:solidFill>
                   <a:srgbClr val="64748B"/>
                 </a:solidFill>
                 <a:latin typeface="Segoe UI"/>
               </a:rPr>
-              <a:t>  —  one click, with clean styling &amp; a frozen header</a:t>
-            </a:r>
-          </a:p>
-        </p:txBody>
-      </p:sp>
+              <a:t>  —  styled, one click</a:t>
+            </a:r>
+          </a:p>
+        </p:txBody>
+      </p:sp>
+      <p:sp>
+        <p:nvSpPr>
+          <p:cNvPr id="8" name="Rounded Rectangle 7"/>
+          <p:cNvSpPr/>
+          <p:nvPr/>
+        </p:nvSpPr>
+        <p:spPr>
+          <a:xfrm>
+            <a:off x="6766560" y="1874519"/>
+            <a:ext cx="4754880" cy="4023360"/>
+          </a:xfrm>
+          <a:prstGeom prst="roundRect">
+            <a:avLst/>
+          </a:prstGeom>
+          <a:solidFill>
+            <a:srgbClr val="F6F8FC"/>
+          </a:solidFill>
+          <a:ln w="19050">
+            <a:solidFill>
+              <a:srgbClr val="A7B1C4"/>
+            </a:solidFill>
+          </a:ln>
+          <a:effectLst/>
+        </p:spPr>
+        <p:style>
+          <a:lnRef idx="1">
+            <a:schemeClr val="accent1"/>
+          </a:lnRef>
+          <a:fillRef idx="3">
+            <a:schemeClr val="accent1"/>
+          </a:fillRef>
+          <a:effectRef idx="2">
+            <a:schemeClr val="accent1"/>
+          </a:effectRef>
+          <a:fontRef idx="minor">
+            <a:schemeClr val="lt1"/>
+          </a:fontRef>
+        </p:style>
+        <p:txBody>
+          <a:bodyPr rtlCol="0" anchor="ctr"/>
+          <a:lstStyle/>
+          <a:p>
+            <a:pPr algn="ctr"/>
+            <a:endParaRPr/>
+          </a:p>
+        </p:txBody>
+      </p:sp>
+      <p:sp>
+        <p:nvSpPr>
+          <p:cNvPr id="9" name="TextBox 8"/>
+          <p:cNvSpPr txBox="1"/>
+          <p:nvPr/>
+        </p:nvSpPr>
+        <p:spPr>
+          <a:xfrm>
+            <a:off x="6766560" y="3319271"/>
+            <a:ext cx="4754880" cy="548640"/>
+          </a:xfrm>
+          <a:prstGeom prst="rect">
+            <a:avLst/>
+          </a:prstGeom>
+          <a:noFill/>
+        </p:spPr>
+        <p:txBody>
+          <a:bodyPr wrap="square" lIns="25400" tIns="25400" rIns="25400" bIns="25400" anchor="t">
+            <a:spAutoFit/>
+          </a:bodyPr>
+          <a:lstStyle/>
+          <a:p>
+            <a:pPr algn="ctr">
+              <a:lnSpc>
+                <a:spcPct val="105000"/>
+              </a:lnSpc>
+              <a:spcBef>
+                <a:spcPts val="0"/>
+              </a:spcBef>
+              <a:spcAft>
+                <a:spcPts val="600"/>
+              </a:spcAft>
+            </a:pPr>
+            <a:r>
+              <a:rPr sz="3400" b="0">
+                <a:solidFill>
+                  <a:srgbClr val="64748B"/>
+                </a:solidFill>
+                <a:latin typeface="Segoe UI"/>
+              </a:rPr>
+              <a:t>🖼</a:t>
+            </a:r>
+          </a:p>
+        </p:txBody>
+      </p:sp>
+      <p:sp>
+        <p:nvSpPr>
+          <p:cNvPr id="10" name="TextBox 9"/>
+          <p:cNvSpPr txBox="1"/>
+          <p:nvPr/>
+        </p:nvSpPr>
+        <p:spPr>
+          <a:xfrm>
+            <a:off x="6766560" y="3904487"/>
+            <a:ext cx="4754880" cy="502920"/>
+          </a:xfrm>
+          <a:prstGeom prst="rect">
+            <a:avLst/>
+          </a:prstGeom>
+          <a:noFill/>
+        </p:spPr>
+        <p:txBody>
+          <a:bodyPr wrap="square" lIns="25400" tIns="25400" rIns="25400" bIns="25400" anchor="t">
+            <a:spAutoFit/>
+          </a:bodyPr>
+          <a:lstStyle/>
+          <a:p>
+            <a:pPr algn="ctr">
+              <a:lnSpc>
+                <a:spcPct val="105000"/>
+              </a:lnSpc>
+              <a:spcBef>
+                <a:spcPts val="0"/>
+              </a:spcBef>
+              <a:spcAft>
+                <a:spcPts val="600"/>
+              </a:spcAft>
+            </a:pPr>
+            <a:r>
+              <a:rPr sz="1400" b="1">
+                <a:solidFill>
+                  <a:srgbClr val="0F172A"/>
+                </a:solidFill>
+                <a:latin typeface="Segoe UI Semibold"/>
+              </a:rPr>
+              <a:t>Screenshot 1 — Main app page (Generator)</a:t>
+            </a:r>
+          </a:p>
+        </p:txBody>
+      </p:sp>
+      <p:sp>
+        <p:nvSpPr>
+          <p:cNvPr id="11" name="TextBox 10"/>
+          <p:cNvSpPr txBox="1"/>
+          <p:nvPr/>
+        </p:nvSpPr>
+        <p:spPr>
+          <a:xfrm>
+            <a:off x="6766560" y="5513831"/>
+            <a:ext cx="4754880" cy="320040"/>
+          </a:xfrm>
+          <a:prstGeom prst="rect">
+            <a:avLst/>
+          </a:prstGeom>
+          <a:noFill/>
+        </p:spPr>
+        <p:txBody>
+          <a:bodyPr wrap="square" lIns="25400" tIns="25400" rIns="25400" bIns="25400" anchor="t">
+            <a:spAutoFit/>
+          </a:bodyPr>
+          <a:lstStyle/>
+          <a:p>
+            <a:pPr algn="ctr">
+              <a:lnSpc>
+                <a:spcPct val="105000"/>
+              </a:lnSpc>
+              <a:spcBef>
+                <a:spcPts val="0"/>
+              </a:spcBef>
+              <a:spcAft>
+                <a:spcPts val="600"/>
+              </a:spcAft>
+            </a:pPr>
+            <a:r>
+              <a:rPr sz="1100" b="0">
+                <a:solidFill>
+                  <a:srgbClr val="64748B"/>
+                </a:solidFill>
+                <a:latin typeface="Segoe UI"/>
+              </a:rPr>
+              <a:t>paste screenshot here</a:t>
+            </a:r>
+          </a:p>
+        </p:txBody>
+      </p:sp>
+      <p:pic>
+        <p:nvPicPr>
+          <p:cNvPr id="12" name="Picture 11" descr="logo_b94f5789.png"/>
+          <p:cNvPicPr>
+            <a:picLocks noChangeAspect="1"/>
+          </p:cNvPicPr>
+          <p:nvPr/>
+        </p:nvPicPr>
+        <p:blipFill>
+          <a:blip r:embed="rId2"/>
+          <a:stretch>
+            <a:fillRect/>
+          </a:stretch>
+        </p:blipFill>
+        <p:spPr>
+          <a:xfrm>
+            <a:off x="10408615" y="310896"/>
+            <a:ext cx="1417320" cy="516798"/>
+          </a:xfrm>
+          <a:prstGeom prst="rect">
+            <a:avLst/>
+          </a:prstGeom>
+        </p:spPr>
+      </p:pic>
     </p:spTree>
   </p:cSld>
   <p:clrMapOvr>
